--- a/DarwishInterserve_Executive_Presentation.pptx
+++ b/DarwishInterserve_Executive_Presentation.pptx
@@ -20,6 +20,9 @@
     <p:sldId id="268" r:id="rId19"/>
     <p:sldId id="269" r:id="rId20"/>
     <p:sldId id="270" r:id="rId21"/>
+    <p:sldId id="271" r:id="rId22"/>
+    <p:sldId id="272" r:id="rId23"/>
+    <p:sldId id="273" r:id="rId24"/>
   </p:sldIdLst>
   <p:sldSz cx="12188952" cy="6858000" type="screen4x3"/>
   <p:notesSz cx="6858000" cy="9144000"/>
@@ -17732,6 +17735,7039 @@
 </file>
 
 <file path=ppt/slides/slide15.xml><?xml version="1.0" encoding="utf-8"?>
+<p:sld xmlns:a="http://schemas.openxmlformats.org/drawingml/2006/main" xmlns:p="http://schemas.openxmlformats.org/presentationml/2006/main" xmlns:r="http://schemas.openxmlformats.org/officeDocument/2006/relationships">
+  <p:cSld>
+    <p:spTree>
+      <p:nvGrpSpPr>
+        <p:cNvPr id="1" name=""/>
+        <p:cNvGrpSpPr/>
+        <p:nvPr/>
+      </p:nvGrpSpPr>
+      <p:grpSpPr/>
+      <p:sp>
+        <p:nvSpPr>
+          <p:cNvPr id="2" name="Rectangle 1"/>
+          <p:cNvSpPr/>
+          <p:nvPr/>
+        </p:nvSpPr>
+        <p:spPr>
+          <a:xfrm>
+            <a:off x="0" y="0"/>
+            <a:ext cx="12188952" cy="6858000"/>
+          </a:xfrm>
+          <a:prstGeom prst="rect">
+            <a:avLst/>
+          </a:prstGeom>
+          <a:solidFill>
+            <a:srgbClr val="F5F6FA"/>
+          </a:solidFill>
+          <a:ln>
+            <a:noFill/>
+          </a:ln>
+        </p:spPr>
+        <p:style>
+          <a:lnRef idx="1">
+            <a:schemeClr val="accent1"/>
+          </a:lnRef>
+          <a:fillRef idx="3">
+            <a:schemeClr val="accent1"/>
+          </a:fillRef>
+          <a:effectRef idx="2">
+            <a:schemeClr val="accent1"/>
+          </a:effectRef>
+          <a:fontRef idx="minor">
+            <a:schemeClr val="lt1"/>
+          </a:fontRef>
+        </p:style>
+        <p:txBody>
+          <a:bodyPr rtlCol="0" anchor="ctr"/>
+          <a:lstStyle/>
+          <a:p>
+            <a:pPr algn="ctr"/>
+          </a:p>
+        </p:txBody>
+      </p:sp>
+      <p:sp>
+        <p:nvSpPr>
+          <p:cNvPr id="3" name="Rectangle 2"/>
+          <p:cNvSpPr/>
+          <p:nvPr/>
+        </p:nvSpPr>
+        <p:spPr>
+          <a:xfrm>
+            <a:off x="0" y="0"/>
+            <a:ext cx="12188952" cy="1325880"/>
+          </a:xfrm>
+          <a:prstGeom prst="rect">
+            <a:avLst/>
+          </a:prstGeom>
+          <a:solidFill>
+            <a:srgbClr val="122649"/>
+          </a:solidFill>
+          <a:ln>
+            <a:noFill/>
+          </a:ln>
+        </p:spPr>
+        <p:style>
+          <a:lnRef idx="1">
+            <a:schemeClr val="accent1"/>
+          </a:lnRef>
+          <a:fillRef idx="3">
+            <a:schemeClr val="accent1"/>
+          </a:fillRef>
+          <a:effectRef idx="2">
+            <a:schemeClr val="accent1"/>
+          </a:effectRef>
+          <a:fontRef idx="minor">
+            <a:schemeClr val="lt1"/>
+          </a:fontRef>
+        </p:style>
+        <p:txBody>
+          <a:bodyPr rtlCol="0" anchor="ctr"/>
+          <a:lstStyle/>
+          <a:p>
+            <a:pPr algn="ctr"/>
+          </a:p>
+        </p:txBody>
+      </p:sp>
+      <p:sp>
+        <p:nvSpPr>
+          <p:cNvPr id="4" name="Rectangle 3"/>
+          <p:cNvSpPr/>
+          <p:nvPr/>
+        </p:nvSpPr>
+        <p:spPr>
+          <a:xfrm>
+            <a:off x="0" y="0"/>
+            <a:ext cx="164592" cy="6858000"/>
+          </a:xfrm>
+          <a:prstGeom prst="rect">
+            <a:avLst/>
+          </a:prstGeom>
+          <a:solidFill>
+            <a:srgbClr val="C9A84C"/>
+          </a:solidFill>
+          <a:ln>
+            <a:noFill/>
+          </a:ln>
+        </p:spPr>
+        <p:style>
+          <a:lnRef idx="1">
+            <a:schemeClr val="accent1"/>
+          </a:lnRef>
+          <a:fillRef idx="3">
+            <a:schemeClr val="accent1"/>
+          </a:fillRef>
+          <a:effectRef idx="2">
+            <a:schemeClr val="accent1"/>
+          </a:effectRef>
+          <a:fontRef idx="minor">
+            <a:schemeClr val="lt1"/>
+          </a:fontRef>
+        </p:style>
+        <p:txBody>
+          <a:bodyPr rtlCol="0" anchor="ctr"/>
+          <a:lstStyle/>
+          <a:p>
+            <a:pPr algn="ctr"/>
+          </a:p>
+        </p:txBody>
+      </p:sp>
+      <p:sp>
+        <p:nvSpPr>
+          <p:cNvPr id="5" name="TextBox 4"/>
+          <p:cNvSpPr txBox="1"/>
+          <p:nvPr/>
+        </p:nvSpPr>
+        <p:spPr>
+          <a:xfrm>
+            <a:off x="411480" y="109728"/>
+            <a:ext cx="7315200" cy="292608"/>
+          </a:xfrm>
+          <a:prstGeom prst="rect">
+            <a:avLst/>
+          </a:prstGeom>
+          <a:noFill/>
+        </p:spPr>
+        <p:txBody>
+          <a:bodyPr wrap="square">
+            <a:spAutoFit/>
+          </a:bodyPr>
+          <a:lstStyle/>
+          <a:p>
+            <a:pPr algn="l"/>
+            <a:r>
+              <a:rPr sz="1000" b="1" i="0">
+                <a:solidFill>
+                  <a:srgbClr val="C9A84C"/>
+                </a:solidFill>
+                <a:latin typeface="Calibri"/>
+              </a:rPr>
+              <a:t>ACCESS COMPARISON</a:t>
+            </a:r>
+          </a:p>
+        </p:txBody>
+      </p:sp>
+      <p:sp>
+        <p:nvSpPr>
+          <p:cNvPr id="6" name="TextBox 5"/>
+          <p:cNvSpPr txBox="1"/>
+          <p:nvPr/>
+        </p:nvSpPr>
+        <p:spPr>
+          <a:xfrm>
+            <a:off x="411480" y="384048"/>
+            <a:ext cx="10972800" cy="640080"/>
+          </a:xfrm>
+          <a:prstGeom prst="rect">
+            <a:avLst/>
+          </a:prstGeom>
+          <a:noFill/>
+        </p:spPr>
+        <p:txBody>
+          <a:bodyPr wrap="square">
+            <a:spAutoFit/>
+          </a:bodyPr>
+          <a:lstStyle/>
+          <a:p>
+            <a:pPr algn="l"/>
+            <a:r>
+              <a:rPr sz="2800" b="1" i="0">
+                <a:solidFill>
+                  <a:srgbClr val="FFFFFF"/>
+                </a:solidFill>
+                <a:latin typeface="Calibri"/>
+              </a:rPr>
+              <a:t>Guest vs Employee — What Each User Sees</a:t>
+            </a:r>
+          </a:p>
+        </p:txBody>
+      </p:sp>
+      <p:sp>
+        <p:nvSpPr>
+          <p:cNvPr id="7" name="Rounded Rectangle 6"/>
+          <p:cNvSpPr/>
+          <p:nvPr/>
+        </p:nvSpPr>
+        <p:spPr>
+          <a:xfrm>
+            <a:off x="411480" y="1508760"/>
+            <a:ext cx="5669280" cy="5074920"/>
+          </a:xfrm>
+          <a:prstGeom prst="roundRect">
+            <a:avLst>
+              <a:gd name="adj" fmla="val 5000"/>
+            </a:avLst>
+          </a:prstGeom>
+          <a:solidFill>
+            <a:srgbClr val="FFFFFF"/>
+          </a:solidFill>
+          <a:ln w="6350">
+            <a:solidFill>
+              <a:srgbClr val="E5E7EB"/>
+            </a:solidFill>
+          </a:ln>
+        </p:spPr>
+        <p:style>
+          <a:lnRef idx="1">
+            <a:schemeClr val="accent1"/>
+          </a:lnRef>
+          <a:fillRef idx="3">
+            <a:schemeClr val="accent1"/>
+          </a:fillRef>
+          <a:effectRef idx="2">
+            <a:schemeClr val="accent1"/>
+          </a:effectRef>
+          <a:fontRef idx="minor">
+            <a:schemeClr val="lt1"/>
+          </a:fontRef>
+        </p:style>
+        <p:txBody>
+          <a:bodyPr rtlCol="0" anchor="ctr"/>
+          <a:lstStyle/>
+          <a:p>
+            <a:pPr algn="ctr"/>
+          </a:p>
+        </p:txBody>
+      </p:sp>
+      <p:sp>
+        <p:nvSpPr>
+          <p:cNvPr id="8" name="Rectangle 7"/>
+          <p:cNvSpPr/>
+          <p:nvPr/>
+        </p:nvSpPr>
+        <p:spPr>
+          <a:xfrm>
+            <a:off x="411480" y="1508760"/>
+            <a:ext cx="5669280" cy="960120"/>
+          </a:xfrm>
+          <a:prstGeom prst="rect">
+            <a:avLst/>
+          </a:prstGeom>
+          <a:solidFill>
+            <a:srgbClr val="C9A84C"/>
+          </a:solidFill>
+          <a:ln>
+            <a:noFill/>
+          </a:ln>
+        </p:spPr>
+        <p:style>
+          <a:lnRef idx="1">
+            <a:schemeClr val="accent1"/>
+          </a:lnRef>
+          <a:fillRef idx="3">
+            <a:schemeClr val="accent1"/>
+          </a:fillRef>
+          <a:effectRef idx="2">
+            <a:schemeClr val="accent1"/>
+          </a:effectRef>
+          <a:fontRef idx="minor">
+            <a:schemeClr val="lt1"/>
+          </a:fontRef>
+        </p:style>
+        <p:txBody>
+          <a:bodyPr rtlCol="0" anchor="ctr"/>
+          <a:lstStyle/>
+          <a:p>
+            <a:pPr algn="ctr"/>
+          </a:p>
+        </p:txBody>
+      </p:sp>
+      <p:sp>
+        <p:nvSpPr>
+          <p:cNvPr id="9" name="Oval 8"/>
+          <p:cNvSpPr/>
+          <p:nvPr/>
+        </p:nvSpPr>
+        <p:spPr>
+          <a:xfrm>
+            <a:off x="640080" y="1673352"/>
+            <a:ext cx="640080" cy="640080"/>
+          </a:xfrm>
+          <a:prstGeom prst="ellipse">
+            <a:avLst/>
+          </a:prstGeom>
+          <a:solidFill>
+            <a:srgbClr val="FFFFFF"/>
+          </a:solidFill>
+          <a:ln>
+            <a:noFill/>
+          </a:ln>
+        </p:spPr>
+        <p:style>
+          <a:lnRef idx="1">
+            <a:schemeClr val="accent1"/>
+          </a:lnRef>
+          <a:fillRef idx="3">
+            <a:schemeClr val="accent1"/>
+          </a:fillRef>
+          <a:effectRef idx="2">
+            <a:schemeClr val="accent1"/>
+          </a:effectRef>
+          <a:fontRef idx="minor">
+            <a:schemeClr val="lt1"/>
+          </a:fontRef>
+        </p:style>
+        <p:txBody>
+          <a:bodyPr rtlCol="0" anchor="ctr"/>
+          <a:lstStyle/>
+          <a:p>
+            <a:pPr algn="ctr"/>
+          </a:p>
+        </p:txBody>
+      </p:sp>
+      <p:sp>
+        <p:nvSpPr>
+          <p:cNvPr id="10" name="TextBox 9"/>
+          <p:cNvSpPr txBox="1"/>
+          <p:nvPr/>
+        </p:nvSpPr>
+        <p:spPr>
+          <a:xfrm>
+            <a:off x="640080" y="1719072"/>
+            <a:ext cx="640080" cy="548640"/>
+          </a:xfrm>
+          <a:prstGeom prst="rect">
+            <a:avLst/>
+          </a:prstGeom>
+          <a:noFill/>
+        </p:spPr>
+        <p:txBody>
+          <a:bodyPr wrap="square">
+            <a:spAutoFit/>
+          </a:bodyPr>
+          <a:lstStyle/>
+          <a:p>
+            <a:pPr algn="ctr"/>
+            <a:r>
+              <a:rPr sz="2200" b="1" i="0">
+                <a:solidFill>
+                  <a:srgbClr val="122649"/>
+                </a:solidFill>
+                <a:latin typeface="Calibri"/>
+              </a:rPr>
+              <a:t>G</a:t>
+            </a:r>
+          </a:p>
+        </p:txBody>
+      </p:sp>
+      <p:sp>
+        <p:nvSpPr>
+          <p:cNvPr id="11" name="TextBox 10"/>
+          <p:cNvSpPr txBox="1"/>
+          <p:nvPr/>
+        </p:nvSpPr>
+        <p:spPr>
+          <a:xfrm>
+            <a:off x="1417320" y="1627632"/>
+            <a:ext cx="4114800" cy="320040"/>
+          </a:xfrm>
+          <a:prstGeom prst="rect">
+            <a:avLst/>
+          </a:prstGeom>
+          <a:noFill/>
+        </p:spPr>
+        <p:txBody>
+          <a:bodyPr wrap="square">
+            <a:spAutoFit/>
+          </a:bodyPr>
+          <a:lstStyle/>
+          <a:p>
+            <a:pPr algn="l"/>
+            <a:r>
+              <a:rPr sz="1100" b="1" i="0">
+                <a:solidFill>
+                  <a:srgbClr val="122649"/>
+                </a:solidFill>
+                <a:latin typeface="Calibri"/>
+              </a:rPr>
+              <a:t>GUEST USER</a:t>
+            </a:r>
+          </a:p>
+        </p:txBody>
+      </p:sp>
+      <p:sp>
+        <p:nvSpPr>
+          <p:cNvPr id="12" name="TextBox 11"/>
+          <p:cNvSpPr txBox="1"/>
+          <p:nvPr/>
+        </p:nvSpPr>
+        <p:spPr>
+          <a:xfrm>
+            <a:off x="1417320" y="1920240"/>
+            <a:ext cx="4114800" cy="365760"/>
+          </a:xfrm>
+          <a:prstGeom prst="rect">
+            <a:avLst/>
+          </a:prstGeom>
+          <a:noFill/>
+        </p:spPr>
+        <p:txBody>
+          <a:bodyPr wrap="square">
+            <a:spAutoFit/>
+          </a:bodyPr>
+          <a:lstStyle/>
+          <a:p>
+            <a:pPr algn="l"/>
+            <a:r>
+              <a:rPr sz="1800" b="1" i="0">
+                <a:solidFill>
+                  <a:srgbClr val="FFFFFF"/>
+                </a:solidFill>
+                <a:latin typeface="Calibri"/>
+              </a:rPr>
+              <a:t>View-Only Access</a:t>
+            </a:r>
+          </a:p>
+        </p:txBody>
+      </p:sp>
+      <p:sp>
+        <p:nvSpPr>
+          <p:cNvPr id="13" name="TextBox 12"/>
+          <p:cNvSpPr txBox="1"/>
+          <p:nvPr/>
+        </p:nvSpPr>
+        <p:spPr>
+          <a:xfrm>
+            <a:off x="1417320" y="2212848"/>
+            <a:ext cx="4572000" cy="256032"/>
+          </a:xfrm>
+          <a:prstGeom prst="rect">
+            <a:avLst/>
+          </a:prstGeom>
+          <a:noFill/>
+        </p:spPr>
+        <p:txBody>
+          <a:bodyPr wrap="square">
+            <a:spAutoFit/>
+          </a:bodyPr>
+          <a:lstStyle/>
+          <a:p>
+            <a:pPr algn="l"/>
+            <a:r>
+              <a:rPr sz="1000" b="0" i="0">
+                <a:solidFill>
+                  <a:srgbClr val="FFFFFF"/>
+                </a:solidFill>
+                <a:latin typeface="Calibri"/>
+              </a:rPr>
+              <a:t>Authenticated via Gmail OTP  ·  No account required</a:t>
+            </a:r>
+          </a:p>
+        </p:txBody>
+      </p:sp>
+      <p:sp>
+        <p:nvSpPr>
+          <p:cNvPr id="14" name="TextBox 13"/>
+          <p:cNvSpPr txBox="1"/>
+          <p:nvPr/>
+        </p:nvSpPr>
+        <p:spPr>
+          <a:xfrm>
+            <a:off x="594360" y="2670048"/>
+            <a:ext cx="5029200" cy="274320"/>
+          </a:xfrm>
+          <a:prstGeom prst="rect">
+            <a:avLst/>
+          </a:prstGeom>
+          <a:noFill/>
+        </p:spPr>
+        <p:txBody>
+          <a:bodyPr wrap="square">
+            <a:spAutoFit/>
+          </a:bodyPr>
+          <a:lstStyle/>
+          <a:p>
+            <a:pPr algn="l"/>
+            <a:r>
+              <a:rPr sz="900" b="1" i="0">
+                <a:solidFill>
+                  <a:srgbClr val="C9A84C"/>
+                </a:solidFill>
+                <a:latin typeface="Calibri"/>
+              </a:rPr>
+              <a:t>WHAT GUESTS CAN VIEW</a:t>
+            </a:r>
+          </a:p>
+        </p:txBody>
+      </p:sp>
+      <p:sp>
+        <p:nvSpPr>
+          <p:cNvPr id="15" name="TextBox 14"/>
+          <p:cNvSpPr txBox="1"/>
+          <p:nvPr/>
+        </p:nvSpPr>
+        <p:spPr>
+          <a:xfrm>
+            <a:off x="640080" y="3017520"/>
+            <a:ext cx="274320" cy="320040"/>
+          </a:xfrm>
+          <a:prstGeom prst="rect">
+            <a:avLst/>
+          </a:prstGeom>
+          <a:noFill/>
+        </p:spPr>
+        <p:txBody>
+          <a:bodyPr wrap="square">
+            <a:spAutoFit/>
+          </a:bodyPr>
+          <a:lstStyle/>
+          <a:p>
+            <a:pPr algn="l"/>
+            <a:r>
+              <a:rPr sz="1400" b="1" i="0">
+                <a:solidFill>
+                  <a:srgbClr val="10B981"/>
+                </a:solidFill>
+                <a:latin typeface="Calibri"/>
+              </a:rPr>
+              <a:t>✓</a:t>
+            </a:r>
+          </a:p>
+        </p:txBody>
+      </p:sp>
+      <p:sp>
+        <p:nvSpPr>
+          <p:cNvPr id="16" name="TextBox 15"/>
+          <p:cNvSpPr txBox="1"/>
+          <p:nvPr/>
+        </p:nvSpPr>
+        <p:spPr>
+          <a:xfrm>
+            <a:off x="914400" y="3017520"/>
+            <a:ext cx="4937760" cy="320040"/>
+          </a:xfrm>
+          <a:prstGeom prst="rect">
+            <a:avLst/>
+          </a:prstGeom>
+          <a:noFill/>
+        </p:spPr>
+        <p:txBody>
+          <a:bodyPr wrap="square">
+            <a:spAutoFit/>
+          </a:bodyPr>
+          <a:lstStyle/>
+          <a:p>
+            <a:pPr algn="l"/>
+            <a:r>
+              <a:rPr sz="1100" b="0" i="0">
+                <a:solidFill>
+                  <a:srgbClr val="6B7280"/>
+                </a:solidFill>
+                <a:latin typeface="Calibri"/>
+              </a:rPr>
+              <a:t>Company website content — About, Vision, Mission</a:t>
+            </a:r>
+          </a:p>
+        </p:txBody>
+      </p:sp>
+      <p:sp>
+        <p:nvSpPr>
+          <p:cNvPr id="17" name="TextBox 16"/>
+          <p:cNvSpPr txBox="1"/>
+          <p:nvPr/>
+        </p:nvSpPr>
+        <p:spPr>
+          <a:xfrm>
+            <a:off x="640080" y="3447287"/>
+            <a:ext cx="274320" cy="320040"/>
+          </a:xfrm>
+          <a:prstGeom prst="rect">
+            <a:avLst/>
+          </a:prstGeom>
+          <a:noFill/>
+        </p:spPr>
+        <p:txBody>
+          <a:bodyPr wrap="square">
+            <a:spAutoFit/>
+          </a:bodyPr>
+          <a:lstStyle/>
+          <a:p>
+            <a:pPr algn="l"/>
+            <a:r>
+              <a:rPr sz="1400" b="1" i="0">
+                <a:solidFill>
+                  <a:srgbClr val="10B981"/>
+                </a:solidFill>
+                <a:latin typeface="Calibri"/>
+              </a:rPr>
+              <a:t>✓</a:t>
+            </a:r>
+          </a:p>
+        </p:txBody>
+      </p:sp>
+      <p:sp>
+        <p:nvSpPr>
+          <p:cNvPr id="18" name="TextBox 17"/>
+          <p:cNvSpPr txBox="1"/>
+          <p:nvPr/>
+        </p:nvSpPr>
+        <p:spPr>
+          <a:xfrm>
+            <a:off x="914400" y="3447287"/>
+            <a:ext cx="4937760" cy="320040"/>
+          </a:xfrm>
+          <a:prstGeom prst="rect">
+            <a:avLst/>
+          </a:prstGeom>
+          <a:noFill/>
+        </p:spPr>
+        <p:txBody>
+          <a:bodyPr wrap="square">
+            <a:spAutoFit/>
+          </a:bodyPr>
+          <a:lstStyle/>
+          <a:p>
+            <a:pPr algn="l"/>
+            <a:r>
+              <a:rPr sz="1100" b="0" i="0">
+                <a:solidFill>
+                  <a:srgbClr val="6B7280"/>
+                </a:solidFill>
+                <a:latin typeface="Calibri"/>
+              </a:rPr>
+              <a:t>Services portfolio (Hard, Soft, Managed)</a:t>
+            </a:r>
+          </a:p>
+        </p:txBody>
+      </p:sp>
+      <p:sp>
+        <p:nvSpPr>
+          <p:cNvPr id="19" name="TextBox 18"/>
+          <p:cNvSpPr txBox="1"/>
+          <p:nvPr/>
+        </p:nvSpPr>
+        <p:spPr>
+          <a:xfrm>
+            <a:off x="640080" y="3877056"/>
+            <a:ext cx="274320" cy="320040"/>
+          </a:xfrm>
+          <a:prstGeom prst="rect">
+            <a:avLst/>
+          </a:prstGeom>
+          <a:noFill/>
+        </p:spPr>
+        <p:txBody>
+          <a:bodyPr wrap="square">
+            <a:spAutoFit/>
+          </a:bodyPr>
+          <a:lstStyle/>
+          <a:p>
+            <a:pPr algn="l"/>
+            <a:r>
+              <a:rPr sz="1400" b="1" i="0">
+                <a:solidFill>
+                  <a:srgbClr val="10B981"/>
+                </a:solidFill>
+                <a:latin typeface="Calibri"/>
+              </a:rPr>
+              <a:t>✓</a:t>
+            </a:r>
+          </a:p>
+        </p:txBody>
+      </p:sp>
+      <p:sp>
+        <p:nvSpPr>
+          <p:cNvPr id="20" name="TextBox 19"/>
+          <p:cNvSpPr txBox="1"/>
+          <p:nvPr/>
+        </p:nvSpPr>
+        <p:spPr>
+          <a:xfrm>
+            <a:off x="914400" y="3877056"/>
+            <a:ext cx="4937760" cy="320040"/>
+          </a:xfrm>
+          <a:prstGeom prst="rect">
+            <a:avLst/>
+          </a:prstGeom>
+          <a:noFill/>
+        </p:spPr>
+        <p:txBody>
+          <a:bodyPr wrap="square">
+            <a:spAutoFit/>
+          </a:bodyPr>
+          <a:lstStyle/>
+          <a:p>
+            <a:pPr algn="l"/>
+            <a:r>
+              <a:rPr sz="1100" b="0" i="0">
+                <a:solidFill>
+                  <a:srgbClr val="6B7280"/>
+                </a:solidFill>
+                <a:latin typeface="Calibri"/>
+              </a:rPr>
+              <a:t>Public projects gallery &amp; client showcase</a:t>
+            </a:r>
+          </a:p>
+        </p:txBody>
+      </p:sp>
+      <p:sp>
+        <p:nvSpPr>
+          <p:cNvPr id="21" name="TextBox 20"/>
+          <p:cNvSpPr txBox="1"/>
+          <p:nvPr/>
+        </p:nvSpPr>
+        <p:spPr>
+          <a:xfrm>
+            <a:off x="640080" y="4306824"/>
+            <a:ext cx="274320" cy="320040"/>
+          </a:xfrm>
+          <a:prstGeom prst="rect">
+            <a:avLst/>
+          </a:prstGeom>
+          <a:noFill/>
+        </p:spPr>
+        <p:txBody>
+          <a:bodyPr wrap="square">
+            <a:spAutoFit/>
+          </a:bodyPr>
+          <a:lstStyle/>
+          <a:p>
+            <a:pPr algn="l"/>
+            <a:r>
+              <a:rPr sz="1400" b="1" i="0">
+                <a:solidFill>
+                  <a:srgbClr val="10B981"/>
+                </a:solidFill>
+                <a:latin typeface="Calibri"/>
+              </a:rPr>
+              <a:t>✓</a:t>
+            </a:r>
+          </a:p>
+        </p:txBody>
+      </p:sp>
+      <p:sp>
+        <p:nvSpPr>
+          <p:cNvPr id="22" name="TextBox 21"/>
+          <p:cNvSpPr txBox="1"/>
+          <p:nvPr/>
+        </p:nvSpPr>
+        <p:spPr>
+          <a:xfrm>
+            <a:off x="914400" y="4306824"/>
+            <a:ext cx="4937760" cy="320040"/>
+          </a:xfrm>
+          <a:prstGeom prst="rect">
+            <a:avLst/>
+          </a:prstGeom>
+          <a:noFill/>
+        </p:spPr>
+        <p:txBody>
+          <a:bodyPr wrap="square">
+            <a:spAutoFit/>
+          </a:bodyPr>
+          <a:lstStyle/>
+          <a:p>
+            <a:pPr algn="l"/>
+            <a:r>
+              <a:rPr sz="1100" b="0" i="0">
+                <a:solidFill>
+                  <a:srgbClr val="6B7280"/>
+                </a:solidFill>
+                <a:latin typeface="Calibri"/>
+              </a:rPr>
+              <a:t>Management team org chart</a:t>
+            </a:r>
+          </a:p>
+        </p:txBody>
+      </p:sp>
+      <p:sp>
+        <p:nvSpPr>
+          <p:cNvPr id="23" name="TextBox 22"/>
+          <p:cNvSpPr txBox="1"/>
+          <p:nvPr/>
+        </p:nvSpPr>
+        <p:spPr>
+          <a:xfrm>
+            <a:off x="640080" y="4736592"/>
+            <a:ext cx="274320" cy="320040"/>
+          </a:xfrm>
+          <a:prstGeom prst="rect">
+            <a:avLst/>
+          </a:prstGeom>
+          <a:noFill/>
+        </p:spPr>
+        <p:txBody>
+          <a:bodyPr wrap="square">
+            <a:spAutoFit/>
+          </a:bodyPr>
+          <a:lstStyle/>
+          <a:p>
+            <a:pPr algn="l"/>
+            <a:r>
+              <a:rPr sz="1400" b="1" i="0">
+                <a:solidFill>
+                  <a:srgbClr val="10B981"/>
+                </a:solidFill>
+                <a:latin typeface="Calibri"/>
+              </a:rPr>
+              <a:t>✓</a:t>
+            </a:r>
+          </a:p>
+        </p:txBody>
+      </p:sp>
+      <p:sp>
+        <p:nvSpPr>
+          <p:cNvPr id="24" name="TextBox 23"/>
+          <p:cNvSpPr txBox="1"/>
+          <p:nvPr/>
+        </p:nvSpPr>
+        <p:spPr>
+          <a:xfrm>
+            <a:off x="914400" y="4736592"/>
+            <a:ext cx="4937760" cy="320040"/>
+          </a:xfrm>
+          <a:prstGeom prst="rect">
+            <a:avLst/>
+          </a:prstGeom>
+          <a:noFill/>
+        </p:spPr>
+        <p:txBody>
+          <a:bodyPr wrap="square">
+            <a:spAutoFit/>
+          </a:bodyPr>
+          <a:lstStyle/>
+          <a:p>
+            <a:pPr algn="l"/>
+            <a:r>
+              <a:rPr sz="1100" b="0" i="0">
+                <a:solidFill>
+                  <a:srgbClr val="6B7280"/>
+                </a:solidFill>
+                <a:latin typeface="Calibri"/>
+              </a:rPr>
+              <a:t>Department heads overview</a:t>
+            </a:r>
+          </a:p>
+        </p:txBody>
+      </p:sp>
+      <p:sp>
+        <p:nvSpPr>
+          <p:cNvPr id="25" name="TextBox 24"/>
+          <p:cNvSpPr txBox="1"/>
+          <p:nvPr/>
+        </p:nvSpPr>
+        <p:spPr>
+          <a:xfrm>
+            <a:off x="640080" y="5166359"/>
+            <a:ext cx="274320" cy="320040"/>
+          </a:xfrm>
+          <a:prstGeom prst="rect">
+            <a:avLst/>
+          </a:prstGeom>
+          <a:noFill/>
+        </p:spPr>
+        <p:txBody>
+          <a:bodyPr wrap="square">
+            <a:spAutoFit/>
+          </a:bodyPr>
+          <a:lstStyle/>
+          <a:p>
+            <a:pPr algn="l"/>
+            <a:r>
+              <a:rPr sz="1400" b="1" i="0">
+                <a:solidFill>
+                  <a:srgbClr val="10B981"/>
+                </a:solidFill>
+                <a:latin typeface="Calibri"/>
+              </a:rPr>
+              <a:t>✓</a:t>
+            </a:r>
+          </a:p>
+        </p:txBody>
+      </p:sp>
+      <p:sp>
+        <p:nvSpPr>
+          <p:cNvPr id="26" name="TextBox 25"/>
+          <p:cNvSpPr txBox="1"/>
+          <p:nvPr/>
+        </p:nvSpPr>
+        <p:spPr>
+          <a:xfrm>
+            <a:off x="914400" y="5166359"/>
+            <a:ext cx="4937760" cy="320040"/>
+          </a:xfrm>
+          <a:prstGeom prst="rect">
+            <a:avLst/>
+          </a:prstGeom>
+          <a:noFill/>
+        </p:spPr>
+        <p:txBody>
+          <a:bodyPr wrap="square">
+            <a:spAutoFit/>
+          </a:bodyPr>
+          <a:lstStyle/>
+          <a:p>
+            <a:pPr algn="l"/>
+            <a:r>
+              <a:rPr sz="1100" b="0" i="0">
+                <a:solidFill>
+                  <a:srgbClr val="6B7280"/>
+                </a:solidFill>
+                <a:latin typeface="Calibri"/>
+              </a:rPr>
+              <a:t>Published news &amp; company events</a:t>
+            </a:r>
+          </a:p>
+        </p:txBody>
+      </p:sp>
+      <p:sp>
+        <p:nvSpPr>
+          <p:cNvPr id="27" name="TextBox 26"/>
+          <p:cNvSpPr txBox="1"/>
+          <p:nvPr/>
+        </p:nvSpPr>
+        <p:spPr>
+          <a:xfrm>
+            <a:off x="640080" y="5596127"/>
+            <a:ext cx="274320" cy="320040"/>
+          </a:xfrm>
+          <a:prstGeom prst="rect">
+            <a:avLst/>
+          </a:prstGeom>
+          <a:noFill/>
+        </p:spPr>
+        <p:txBody>
+          <a:bodyPr wrap="square">
+            <a:spAutoFit/>
+          </a:bodyPr>
+          <a:lstStyle/>
+          <a:p>
+            <a:pPr algn="l"/>
+            <a:r>
+              <a:rPr sz="1400" b="1" i="0">
+                <a:solidFill>
+                  <a:srgbClr val="10B981"/>
+                </a:solidFill>
+                <a:latin typeface="Calibri"/>
+              </a:rPr>
+              <a:t>✓</a:t>
+            </a:r>
+          </a:p>
+        </p:txBody>
+      </p:sp>
+      <p:sp>
+        <p:nvSpPr>
+          <p:cNvPr id="28" name="TextBox 27"/>
+          <p:cNvSpPr txBox="1"/>
+          <p:nvPr/>
+        </p:nvSpPr>
+        <p:spPr>
+          <a:xfrm>
+            <a:off x="914400" y="5596127"/>
+            <a:ext cx="4937760" cy="320040"/>
+          </a:xfrm>
+          <a:prstGeom prst="rect">
+            <a:avLst/>
+          </a:prstGeom>
+          <a:noFill/>
+        </p:spPr>
+        <p:txBody>
+          <a:bodyPr wrap="square">
+            <a:spAutoFit/>
+          </a:bodyPr>
+          <a:lstStyle/>
+          <a:p>
+            <a:pPr algn="l"/>
+            <a:r>
+              <a:rPr sz="1100" b="0" i="0">
+                <a:solidFill>
+                  <a:srgbClr val="6B7280"/>
+                </a:solidFill>
+                <a:latin typeface="Calibri"/>
+              </a:rPr>
+              <a:t>Contact information &amp; office locations</a:t>
+            </a:r>
+          </a:p>
+        </p:txBody>
+      </p:sp>
+      <p:sp>
+        <p:nvSpPr>
+          <p:cNvPr id="29" name="TextBox 28"/>
+          <p:cNvSpPr txBox="1"/>
+          <p:nvPr/>
+        </p:nvSpPr>
+        <p:spPr>
+          <a:xfrm>
+            <a:off x="640080" y="6025896"/>
+            <a:ext cx="274320" cy="320040"/>
+          </a:xfrm>
+          <a:prstGeom prst="rect">
+            <a:avLst/>
+          </a:prstGeom>
+          <a:noFill/>
+        </p:spPr>
+        <p:txBody>
+          <a:bodyPr wrap="square">
+            <a:spAutoFit/>
+          </a:bodyPr>
+          <a:lstStyle/>
+          <a:p>
+            <a:pPr algn="l"/>
+            <a:r>
+              <a:rPr sz="1400" b="1" i="0">
+                <a:solidFill>
+                  <a:srgbClr val="10B981"/>
+                </a:solidFill>
+                <a:latin typeface="Calibri"/>
+              </a:rPr>
+              <a:t>✓</a:t>
+            </a:r>
+          </a:p>
+        </p:txBody>
+      </p:sp>
+      <p:sp>
+        <p:nvSpPr>
+          <p:cNvPr id="30" name="TextBox 29"/>
+          <p:cNvSpPr txBox="1"/>
+          <p:nvPr/>
+        </p:nvSpPr>
+        <p:spPr>
+          <a:xfrm>
+            <a:off x="914400" y="6025896"/>
+            <a:ext cx="4937760" cy="320040"/>
+          </a:xfrm>
+          <a:prstGeom prst="rect">
+            <a:avLst/>
+          </a:prstGeom>
+          <a:noFill/>
+        </p:spPr>
+        <p:txBody>
+          <a:bodyPr wrap="square">
+            <a:spAutoFit/>
+          </a:bodyPr>
+          <a:lstStyle/>
+          <a:p>
+            <a:pPr algn="l"/>
+            <a:r>
+              <a:rPr sz="1100" b="0" i="0">
+                <a:solidFill>
+                  <a:srgbClr val="6B7280"/>
+                </a:solidFill>
+                <a:latin typeface="Calibri"/>
+              </a:rPr>
+              <a:t>ISO certifications &amp; company milestones</a:t>
+            </a:r>
+          </a:p>
+        </p:txBody>
+      </p:sp>
+      <p:sp>
+        <p:nvSpPr>
+          <p:cNvPr id="31" name="Rounded Rectangle 30"/>
+          <p:cNvSpPr/>
+          <p:nvPr/>
+        </p:nvSpPr>
+        <p:spPr>
+          <a:xfrm>
+            <a:off x="6263640" y="1508760"/>
+            <a:ext cx="5577840" cy="5074920"/>
+          </a:xfrm>
+          <a:prstGeom prst="roundRect">
+            <a:avLst>
+              <a:gd name="adj" fmla="val 5000"/>
+            </a:avLst>
+          </a:prstGeom>
+          <a:solidFill>
+            <a:srgbClr val="FFFFFF"/>
+          </a:solidFill>
+          <a:ln w="6350">
+            <a:solidFill>
+              <a:srgbClr val="E5E7EB"/>
+            </a:solidFill>
+          </a:ln>
+        </p:spPr>
+        <p:style>
+          <a:lnRef idx="1">
+            <a:schemeClr val="accent1"/>
+          </a:lnRef>
+          <a:fillRef idx="3">
+            <a:schemeClr val="accent1"/>
+          </a:fillRef>
+          <a:effectRef idx="2">
+            <a:schemeClr val="accent1"/>
+          </a:effectRef>
+          <a:fontRef idx="minor">
+            <a:schemeClr val="lt1"/>
+          </a:fontRef>
+        </p:style>
+        <p:txBody>
+          <a:bodyPr rtlCol="0" anchor="ctr"/>
+          <a:lstStyle/>
+          <a:p>
+            <a:pPr algn="ctr"/>
+          </a:p>
+        </p:txBody>
+      </p:sp>
+      <p:sp>
+        <p:nvSpPr>
+          <p:cNvPr id="32" name="Rectangle 31"/>
+          <p:cNvSpPr/>
+          <p:nvPr/>
+        </p:nvSpPr>
+        <p:spPr>
+          <a:xfrm>
+            <a:off x="6263640" y="1508760"/>
+            <a:ext cx="5577840" cy="960120"/>
+          </a:xfrm>
+          <a:prstGeom prst="rect">
+            <a:avLst/>
+          </a:prstGeom>
+          <a:solidFill>
+            <a:srgbClr val="1B3A6B"/>
+          </a:solidFill>
+          <a:ln>
+            <a:noFill/>
+          </a:ln>
+        </p:spPr>
+        <p:style>
+          <a:lnRef idx="1">
+            <a:schemeClr val="accent1"/>
+          </a:lnRef>
+          <a:fillRef idx="3">
+            <a:schemeClr val="accent1"/>
+          </a:fillRef>
+          <a:effectRef idx="2">
+            <a:schemeClr val="accent1"/>
+          </a:effectRef>
+          <a:fontRef idx="minor">
+            <a:schemeClr val="lt1"/>
+          </a:fontRef>
+        </p:style>
+        <p:txBody>
+          <a:bodyPr rtlCol="0" anchor="ctr"/>
+          <a:lstStyle/>
+          <a:p>
+            <a:pPr algn="ctr"/>
+          </a:p>
+        </p:txBody>
+      </p:sp>
+      <p:sp>
+        <p:nvSpPr>
+          <p:cNvPr id="33" name="Oval 32"/>
+          <p:cNvSpPr/>
+          <p:nvPr/>
+        </p:nvSpPr>
+        <p:spPr>
+          <a:xfrm>
+            <a:off x="6492240" y="1673352"/>
+            <a:ext cx="640080" cy="640080"/>
+          </a:xfrm>
+          <a:prstGeom prst="ellipse">
+            <a:avLst/>
+          </a:prstGeom>
+          <a:solidFill>
+            <a:srgbClr val="C9A84C"/>
+          </a:solidFill>
+          <a:ln>
+            <a:noFill/>
+          </a:ln>
+        </p:spPr>
+        <p:style>
+          <a:lnRef idx="1">
+            <a:schemeClr val="accent1"/>
+          </a:lnRef>
+          <a:fillRef idx="3">
+            <a:schemeClr val="accent1"/>
+          </a:fillRef>
+          <a:effectRef idx="2">
+            <a:schemeClr val="accent1"/>
+          </a:effectRef>
+          <a:fontRef idx="minor">
+            <a:schemeClr val="lt1"/>
+          </a:fontRef>
+        </p:style>
+        <p:txBody>
+          <a:bodyPr rtlCol="0" anchor="ctr"/>
+          <a:lstStyle/>
+          <a:p>
+            <a:pPr algn="ctr"/>
+          </a:p>
+        </p:txBody>
+      </p:sp>
+      <p:sp>
+        <p:nvSpPr>
+          <p:cNvPr id="34" name="TextBox 33"/>
+          <p:cNvSpPr txBox="1"/>
+          <p:nvPr/>
+        </p:nvSpPr>
+        <p:spPr>
+          <a:xfrm>
+            <a:off x="6492240" y="1719072"/>
+            <a:ext cx="640080" cy="548640"/>
+          </a:xfrm>
+          <a:prstGeom prst="rect">
+            <a:avLst/>
+          </a:prstGeom>
+          <a:noFill/>
+        </p:spPr>
+        <p:txBody>
+          <a:bodyPr wrap="square">
+            <a:spAutoFit/>
+          </a:bodyPr>
+          <a:lstStyle/>
+          <a:p>
+            <a:pPr algn="ctr"/>
+            <a:r>
+              <a:rPr sz="2200" b="1" i="0">
+                <a:solidFill>
+                  <a:srgbClr val="122649"/>
+                </a:solidFill>
+                <a:latin typeface="Calibri"/>
+              </a:rPr>
+              <a:t>E</a:t>
+            </a:r>
+          </a:p>
+        </p:txBody>
+      </p:sp>
+      <p:sp>
+        <p:nvSpPr>
+          <p:cNvPr id="35" name="TextBox 34"/>
+          <p:cNvSpPr txBox="1"/>
+          <p:nvPr/>
+        </p:nvSpPr>
+        <p:spPr>
+          <a:xfrm>
+            <a:off x="7269480" y="1627632"/>
+            <a:ext cx="4114800" cy="320040"/>
+          </a:xfrm>
+          <a:prstGeom prst="rect">
+            <a:avLst/>
+          </a:prstGeom>
+          <a:noFill/>
+        </p:spPr>
+        <p:txBody>
+          <a:bodyPr wrap="square">
+            <a:spAutoFit/>
+          </a:bodyPr>
+          <a:lstStyle/>
+          <a:p>
+            <a:pPr algn="l"/>
+            <a:r>
+              <a:rPr sz="1100" b="1" i="0">
+                <a:solidFill>
+                  <a:srgbClr val="E8C96A"/>
+                </a:solidFill>
+                <a:latin typeface="Calibri"/>
+              </a:rPr>
+              <a:t>EMPLOYEE USER</a:t>
+            </a:r>
+          </a:p>
+        </p:txBody>
+      </p:sp>
+      <p:sp>
+        <p:nvSpPr>
+          <p:cNvPr id="36" name="TextBox 35"/>
+          <p:cNvSpPr txBox="1"/>
+          <p:nvPr/>
+        </p:nvSpPr>
+        <p:spPr>
+          <a:xfrm>
+            <a:off x="7269480" y="1920240"/>
+            <a:ext cx="4114800" cy="365760"/>
+          </a:xfrm>
+          <a:prstGeom prst="rect">
+            <a:avLst/>
+          </a:prstGeom>
+          <a:noFill/>
+        </p:spPr>
+        <p:txBody>
+          <a:bodyPr wrap="square">
+            <a:spAutoFit/>
+          </a:bodyPr>
+          <a:lstStyle/>
+          <a:p>
+            <a:pPr algn="l"/>
+            <a:r>
+              <a:rPr sz="1800" b="1" i="0">
+                <a:solidFill>
+                  <a:srgbClr val="FFFFFF"/>
+                </a:solidFill>
+                <a:latin typeface="Calibri"/>
+              </a:rPr>
+              <a:t>Full Self-Service Portal</a:t>
+            </a:r>
+          </a:p>
+        </p:txBody>
+      </p:sp>
+      <p:sp>
+        <p:nvSpPr>
+          <p:cNvPr id="37" name="TextBox 36"/>
+          <p:cNvSpPr txBox="1"/>
+          <p:nvPr/>
+        </p:nvSpPr>
+        <p:spPr>
+          <a:xfrm>
+            <a:off x="7269480" y="2212848"/>
+            <a:ext cx="4572000" cy="256032"/>
+          </a:xfrm>
+          <a:prstGeom prst="rect">
+            <a:avLst/>
+          </a:prstGeom>
+          <a:noFill/>
+        </p:spPr>
+        <p:txBody>
+          <a:bodyPr wrap="square">
+            <a:spAutoFit/>
+          </a:bodyPr>
+          <a:lstStyle/>
+          <a:p>
+            <a:pPr algn="l"/>
+            <a:r>
+              <a:rPr sz="1000" b="0" i="0">
+                <a:solidFill>
+                  <a:srgbClr val="CCDDEE"/>
+                </a:solidFill>
+                <a:latin typeface="Calibri"/>
+              </a:rPr>
+              <a:t>Authenticated via Employee ID + SMS OTP</a:t>
+            </a:r>
+          </a:p>
+        </p:txBody>
+      </p:sp>
+      <p:sp>
+        <p:nvSpPr>
+          <p:cNvPr id="38" name="TextBox 37"/>
+          <p:cNvSpPr txBox="1"/>
+          <p:nvPr/>
+        </p:nvSpPr>
+        <p:spPr>
+          <a:xfrm>
+            <a:off x="6446520" y="2670048"/>
+            <a:ext cx="5212080" cy="274320"/>
+          </a:xfrm>
+          <a:prstGeom prst="rect">
+            <a:avLst/>
+          </a:prstGeom>
+          <a:noFill/>
+        </p:spPr>
+        <p:txBody>
+          <a:bodyPr wrap="square">
+            <a:spAutoFit/>
+          </a:bodyPr>
+          <a:lstStyle/>
+          <a:p>
+            <a:pPr algn="l"/>
+            <a:r>
+              <a:rPr sz="900" b="1" i="0">
+                <a:solidFill>
+                  <a:srgbClr val="C9A84C"/>
+                </a:solidFill>
+                <a:latin typeface="Calibri"/>
+              </a:rPr>
+              <a:t>EVERYTHING GUESTS SEE  +  PERSONAL HR PORTAL</a:t>
+            </a:r>
+          </a:p>
+        </p:txBody>
+      </p:sp>
+      <p:sp>
+        <p:nvSpPr>
+          <p:cNvPr id="39" name="TextBox 38"/>
+          <p:cNvSpPr txBox="1"/>
+          <p:nvPr/>
+        </p:nvSpPr>
+        <p:spPr>
+          <a:xfrm>
+            <a:off x="6446520" y="3017520"/>
+            <a:ext cx="320040" cy="320040"/>
+          </a:xfrm>
+          <a:prstGeom prst="rect">
+            <a:avLst/>
+          </a:prstGeom>
+          <a:noFill/>
+        </p:spPr>
+        <p:txBody>
+          <a:bodyPr wrap="square">
+            <a:spAutoFit/>
+          </a:bodyPr>
+          <a:lstStyle/>
+          <a:p>
+            <a:pPr algn="l"/>
+            <a:r>
+              <a:rPr sz="1300" b="1" i="0">
+                <a:solidFill>
+                  <a:srgbClr val="C9A84C"/>
+                </a:solidFill>
+                <a:latin typeface="Calibri"/>
+              </a:rPr>
+              <a:t>★</a:t>
+            </a:r>
+          </a:p>
+        </p:txBody>
+      </p:sp>
+      <p:sp>
+        <p:nvSpPr>
+          <p:cNvPr id="40" name="TextBox 39"/>
+          <p:cNvSpPr txBox="1"/>
+          <p:nvPr/>
+        </p:nvSpPr>
+        <p:spPr>
+          <a:xfrm>
+            <a:off x="6812280" y="3017520"/>
+            <a:ext cx="4983480" cy="320040"/>
+          </a:xfrm>
+          <a:prstGeom prst="rect">
+            <a:avLst/>
+          </a:prstGeom>
+          <a:noFill/>
+        </p:spPr>
+        <p:txBody>
+          <a:bodyPr wrap="square">
+            <a:spAutoFit/>
+          </a:bodyPr>
+          <a:lstStyle/>
+          <a:p>
+            <a:pPr algn="l"/>
+            <a:r>
+              <a:rPr sz="1100" b="0" i="0">
+                <a:solidFill>
+                  <a:srgbClr val="6B7280"/>
+                </a:solidFill>
+                <a:latin typeface="Calibri"/>
+              </a:rPr>
+              <a:t>Personal profile · Joining date · Designation</a:t>
+            </a:r>
+          </a:p>
+        </p:txBody>
+      </p:sp>
+      <p:sp>
+        <p:nvSpPr>
+          <p:cNvPr id="41" name="TextBox 40"/>
+          <p:cNvSpPr txBox="1"/>
+          <p:nvPr/>
+        </p:nvSpPr>
+        <p:spPr>
+          <a:xfrm>
+            <a:off x="6446520" y="3447287"/>
+            <a:ext cx="320040" cy="320040"/>
+          </a:xfrm>
+          <a:prstGeom prst="rect">
+            <a:avLst/>
+          </a:prstGeom>
+          <a:noFill/>
+        </p:spPr>
+        <p:txBody>
+          <a:bodyPr wrap="square">
+            <a:spAutoFit/>
+          </a:bodyPr>
+          <a:lstStyle/>
+          <a:p>
+            <a:pPr algn="l"/>
+            <a:r>
+              <a:rPr sz="1300" b="1" i="0">
+                <a:solidFill>
+                  <a:srgbClr val="C9A84C"/>
+                </a:solidFill>
+                <a:latin typeface="Calibri"/>
+              </a:rPr>
+              <a:t>★</a:t>
+            </a:r>
+          </a:p>
+        </p:txBody>
+      </p:sp>
+      <p:sp>
+        <p:nvSpPr>
+          <p:cNvPr id="42" name="TextBox 41"/>
+          <p:cNvSpPr txBox="1"/>
+          <p:nvPr/>
+        </p:nvSpPr>
+        <p:spPr>
+          <a:xfrm>
+            <a:off x="6812280" y="3447287"/>
+            <a:ext cx="4983480" cy="320040"/>
+          </a:xfrm>
+          <a:prstGeom prst="rect">
+            <a:avLst/>
+          </a:prstGeom>
+          <a:noFill/>
+        </p:spPr>
+        <p:txBody>
+          <a:bodyPr wrap="square">
+            <a:spAutoFit/>
+          </a:bodyPr>
+          <a:lstStyle/>
+          <a:p>
+            <a:pPr algn="l"/>
+            <a:r>
+              <a:rPr sz="1100" b="0" i="0">
+                <a:solidFill>
+                  <a:srgbClr val="6B7280"/>
+                </a:solidFill>
+                <a:latin typeface="Calibri"/>
+              </a:rPr>
+              <a:t>Leave balance · Apply leave · Approval status</a:t>
+            </a:r>
+          </a:p>
+        </p:txBody>
+      </p:sp>
+      <p:sp>
+        <p:nvSpPr>
+          <p:cNvPr id="43" name="TextBox 42"/>
+          <p:cNvSpPr txBox="1"/>
+          <p:nvPr/>
+        </p:nvSpPr>
+        <p:spPr>
+          <a:xfrm>
+            <a:off x="6446520" y="3877056"/>
+            <a:ext cx="320040" cy="320040"/>
+          </a:xfrm>
+          <a:prstGeom prst="rect">
+            <a:avLst/>
+          </a:prstGeom>
+          <a:noFill/>
+        </p:spPr>
+        <p:txBody>
+          <a:bodyPr wrap="square">
+            <a:spAutoFit/>
+          </a:bodyPr>
+          <a:lstStyle/>
+          <a:p>
+            <a:pPr algn="l"/>
+            <a:r>
+              <a:rPr sz="1300" b="1" i="0">
+                <a:solidFill>
+                  <a:srgbClr val="C9A84C"/>
+                </a:solidFill>
+                <a:latin typeface="Calibri"/>
+              </a:rPr>
+              <a:t>★</a:t>
+            </a:r>
+          </a:p>
+        </p:txBody>
+      </p:sp>
+      <p:sp>
+        <p:nvSpPr>
+          <p:cNvPr id="44" name="TextBox 43"/>
+          <p:cNvSpPr txBox="1"/>
+          <p:nvPr/>
+        </p:nvSpPr>
+        <p:spPr>
+          <a:xfrm>
+            <a:off x="6812280" y="3877056"/>
+            <a:ext cx="4983480" cy="320040"/>
+          </a:xfrm>
+          <a:prstGeom prst="rect">
+            <a:avLst/>
+          </a:prstGeom>
+          <a:noFill/>
+        </p:spPr>
+        <p:txBody>
+          <a:bodyPr wrap="square">
+            <a:spAutoFit/>
+          </a:bodyPr>
+          <a:lstStyle/>
+          <a:p>
+            <a:pPr algn="l"/>
+            <a:r>
+              <a:rPr sz="1100" b="0" i="0">
+                <a:solidFill>
+                  <a:srgbClr val="6B7280"/>
+                </a:solidFill>
+                <a:latin typeface="Calibri"/>
+              </a:rPr>
+              <a:t>Pay slips — current &amp; historical downloads</a:t>
+            </a:r>
+          </a:p>
+        </p:txBody>
+      </p:sp>
+      <p:sp>
+        <p:nvSpPr>
+          <p:cNvPr id="45" name="TextBox 44"/>
+          <p:cNvSpPr txBox="1"/>
+          <p:nvPr/>
+        </p:nvSpPr>
+        <p:spPr>
+          <a:xfrm>
+            <a:off x="6446520" y="4306824"/>
+            <a:ext cx="320040" cy="320040"/>
+          </a:xfrm>
+          <a:prstGeom prst="rect">
+            <a:avLst/>
+          </a:prstGeom>
+          <a:noFill/>
+        </p:spPr>
+        <p:txBody>
+          <a:bodyPr wrap="square">
+            <a:spAutoFit/>
+          </a:bodyPr>
+          <a:lstStyle/>
+          <a:p>
+            <a:pPr algn="l"/>
+            <a:r>
+              <a:rPr sz="1300" b="1" i="0">
+                <a:solidFill>
+                  <a:srgbClr val="C9A84C"/>
+                </a:solidFill>
+                <a:latin typeface="Calibri"/>
+              </a:rPr>
+              <a:t>★</a:t>
+            </a:r>
+          </a:p>
+        </p:txBody>
+      </p:sp>
+      <p:sp>
+        <p:nvSpPr>
+          <p:cNvPr id="46" name="TextBox 45"/>
+          <p:cNvSpPr txBox="1"/>
+          <p:nvPr/>
+        </p:nvSpPr>
+        <p:spPr>
+          <a:xfrm>
+            <a:off x="6812280" y="4306824"/>
+            <a:ext cx="4983480" cy="320040"/>
+          </a:xfrm>
+          <a:prstGeom prst="rect">
+            <a:avLst/>
+          </a:prstGeom>
+          <a:noFill/>
+        </p:spPr>
+        <p:txBody>
+          <a:bodyPr wrap="square">
+            <a:spAutoFit/>
+          </a:bodyPr>
+          <a:lstStyle/>
+          <a:p>
+            <a:pPr algn="l"/>
+            <a:r>
+              <a:rPr sz="1100" b="0" i="0">
+                <a:solidFill>
+                  <a:srgbClr val="6B7280"/>
+                </a:solidFill>
+                <a:latin typeface="Calibri"/>
+              </a:rPr>
+              <a:t>Signed offer letter &amp; employment contract</a:t>
+            </a:r>
+          </a:p>
+        </p:txBody>
+      </p:sp>
+      <p:sp>
+        <p:nvSpPr>
+          <p:cNvPr id="47" name="TextBox 46"/>
+          <p:cNvSpPr txBox="1"/>
+          <p:nvPr/>
+        </p:nvSpPr>
+        <p:spPr>
+          <a:xfrm>
+            <a:off x="6446520" y="4736592"/>
+            <a:ext cx="320040" cy="320040"/>
+          </a:xfrm>
+          <a:prstGeom prst="rect">
+            <a:avLst/>
+          </a:prstGeom>
+          <a:noFill/>
+        </p:spPr>
+        <p:txBody>
+          <a:bodyPr wrap="square">
+            <a:spAutoFit/>
+          </a:bodyPr>
+          <a:lstStyle/>
+          <a:p>
+            <a:pPr algn="l"/>
+            <a:r>
+              <a:rPr sz="1300" b="1" i="0">
+                <a:solidFill>
+                  <a:srgbClr val="C9A84C"/>
+                </a:solidFill>
+                <a:latin typeface="Calibri"/>
+              </a:rPr>
+              <a:t>★</a:t>
+            </a:r>
+          </a:p>
+        </p:txBody>
+      </p:sp>
+      <p:sp>
+        <p:nvSpPr>
+          <p:cNvPr id="48" name="TextBox 47"/>
+          <p:cNvSpPr txBox="1"/>
+          <p:nvPr/>
+        </p:nvSpPr>
+        <p:spPr>
+          <a:xfrm>
+            <a:off x="6812280" y="4736592"/>
+            <a:ext cx="4983480" cy="320040"/>
+          </a:xfrm>
+          <a:prstGeom prst="rect">
+            <a:avLst/>
+          </a:prstGeom>
+          <a:noFill/>
+        </p:spPr>
+        <p:txBody>
+          <a:bodyPr wrap="square">
+            <a:spAutoFit/>
+          </a:bodyPr>
+          <a:lstStyle/>
+          <a:p>
+            <a:pPr algn="l"/>
+            <a:r>
+              <a:rPr sz="1100" b="0" i="0">
+                <a:solidFill>
+                  <a:srgbClr val="6B7280"/>
+                </a:solidFill>
+                <a:latin typeface="Calibri"/>
+              </a:rPr>
+              <a:t>Request salary / employment certificates</a:t>
+            </a:r>
+          </a:p>
+        </p:txBody>
+      </p:sp>
+      <p:sp>
+        <p:nvSpPr>
+          <p:cNvPr id="49" name="TextBox 48"/>
+          <p:cNvSpPr txBox="1"/>
+          <p:nvPr/>
+        </p:nvSpPr>
+        <p:spPr>
+          <a:xfrm>
+            <a:off x="6446520" y="5166359"/>
+            <a:ext cx="320040" cy="320040"/>
+          </a:xfrm>
+          <a:prstGeom prst="rect">
+            <a:avLst/>
+          </a:prstGeom>
+          <a:noFill/>
+        </p:spPr>
+        <p:txBody>
+          <a:bodyPr wrap="square">
+            <a:spAutoFit/>
+          </a:bodyPr>
+          <a:lstStyle/>
+          <a:p>
+            <a:pPr algn="l"/>
+            <a:r>
+              <a:rPr sz="1300" b="1" i="0">
+                <a:solidFill>
+                  <a:srgbClr val="C9A84C"/>
+                </a:solidFill>
+                <a:latin typeface="Calibri"/>
+              </a:rPr>
+              <a:t>★</a:t>
+            </a:r>
+          </a:p>
+        </p:txBody>
+      </p:sp>
+      <p:sp>
+        <p:nvSpPr>
+          <p:cNvPr id="50" name="TextBox 49"/>
+          <p:cNvSpPr txBox="1"/>
+          <p:nvPr/>
+        </p:nvSpPr>
+        <p:spPr>
+          <a:xfrm>
+            <a:off x="6812280" y="5166359"/>
+            <a:ext cx="4983480" cy="320040"/>
+          </a:xfrm>
+          <a:prstGeom prst="rect">
+            <a:avLst/>
+          </a:prstGeom>
+          <a:noFill/>
+        </p:spPr>
+        <p:txBody>
+          <a:bodyPr wrap="square">
+            <a:spAutoFit/>
+          </a:bodyPr>
+          <a:lstStyle/>
+          <a:p>
+            <a:pPr algn="l"/>
+            <a:r>
+              <a:rPr sz="1100" b="0" i="0">
+                <a:solidFill>
+                  <a:srgbClr val="6B7280"/>
+                </a:solidFill>
+                <a:latin typeface="Calibri"/>
+              </a:rPr>
+              <a:t>Submit complaints &amp; grievances directly to HR</a:t>
+            </a:r>
+          </a:p>
+        </p:txBody>
+      </p:sp>
+      <p:sp>
+        <p:nvSpPr>
+          <p:cNvPr id="51" name="TextBox 50"/>
+          <p:cNvSpPr txBox="1"/>
+          <p:nvPr/>
+        </p:nvSpPr>
+        <p:spPr>
+          <a:xfrm>
+            <a:off x="6446520" y="5596127"/>
+            <a:ext cx="320040" cy="320040"/>
+          </a:xfrm>
+          <a:prstGeom prst="rect">
+            <a:avLst/>
+          </a:prstGeom>
+          <a:noFill/>
+        </p:spPr>
+        <p:txBody>
+          <a:bodyPr wrap="square">
+            <a:spAutoFit/>
+          </a:bodyPr>
+          <a:lstStyle/>
+          <a:p>
+            <a:pPr algn="l"/>
+            <a:r>
+              <a:rPr sz="1300" b="1" i="0">
+                <a:solidFill>
+                  <a:srgbClr val="C9A84C"/>
+                </a:solidFill>
+                <a:latin typeface="Calibri"/>
+              </a:rPr>
+              <a:t>★</a:t>
+            </a:r>
+          </a:p>
+        </p:txBody>
+      </p:sp>
+      <p:sp>
+        <p:nvSpPr>
+          <p:cNvPr id="52" name="TextBox 51"/>
+          <p:cNvSpPr txBox="1"/>
+          <p:nvPr/>
+        </p:nvSpPr>
+        <p:spPr>
+          <a:xfrm>
+            <a:off x="6812280" y="5596127"/>
+            <a:ext cx="4983480" cy="320040"/>
+          </a:xfrm>
+          <a:prstGeom prst="rect">
+            <a:avLst/>
+          </a:prstGeom>
+          <a:noFill/>
+        </p:spPr>
+        <p:txBody>
+          <a:bodyPr wrap="square">
+            <a:spAutoFit/>
+          </a:bodyPr>
+          <a:lstStyle/>
+          <a:p>
+            <a:pPr algn="l"/>
+            <a:r>
+              <a:rPr sz="1100" b="0" i="0">
+                <a:solidFill>
+                  <a:srgbClr val="6B7280"/>
+                </a:solidFill>
+                <a:latin typeface="Calibri"/>
+              </a:rPr>
+              <a:t>Access HR forms — claims, transfers, training</a:t>
+            </a:r>
+          </a:p>
+        </p:txBody>
+      </p:sp>
+      <p:sp>
+        <p:nvSpPr>
+          <p:cNvPr id="53" name="TextBox 52"/>
+          <p:cNvSpPr txBox="1"/>
+          <p:nvPr/>
+        </p:nvSpPr>
+        <p:spPr>
+          <a:xfrm>
+            <a:off x="6446520" y="6025896"/>
+            <a:ext cx="320040" cy="320040"/>
+          </a:xfrm>
+          <a:prstGeom prst="rect">
+            <a:avLst/>
+          </a:prstGeom>
+          <a:noFill/>
+        </p:spPr>
+        <p:txBody>
+          <a:bodyPr wrap="square">
+            <a:spAutoFit/>
+          </a:bodyPr>
+          <a:lstStyle/>
+          <a:p>
+            <a:pPr algn="l"/>
+            <a:r>
+              <a:rPr sz="1300" b="1" i="0">
+                <a:solidFill>
+                  <a:srgbClr val="C9A84C"/>
+                </a:solidFill>
+                <a:latin typeface="Calibri"/>
+              </a:rPr>
+              <a:t>★</a:t>
+            </a:r>
+          </a:p>
+        </p:txBody>
+      </p:sp>
+      <p:sp>
+        <p:nvSpPr>
+          <p:cNvPr id="54" name="TextBox 53"/>
+          <p:cNvSpPr txBox="1"/>
+          <p:nvPr/>
+        </p:nvSpPr>
+        <p:spPr>
+          <a:xfrm>
+            <a:off x="6812280" y="6025896"/>
+            <a:ext cx="4983480" cy="320040"/>
+          </a:xfrm>
+          <a:prstGeom prst="rect">
+            <a:avLst/>
+          </a:prstGeom>
+          <a:noFill/>
+        </p:spPr>
+        <p:txBody>
+          <a:bodyPr wrap="square">
+            <a:spAutoFit/>
+          </a:bodyPr>
+          <a:lstStyle/>
+          <a:p>
+            <a:pPr algn="l"/>
+            <a:r>
+              <a:rPr sz="1100" b="0" i="0">
+                <a:solidFill>
+                  <a:srgbClr val="6B7280"/>
+                </a:solidFill>
+                <a:latin typeface="Calibri"/>
+              </a:rPr>
+              <a:t>Personalised notifications &amp; work updates</a:t>
+            </a:r>
+          </a:p>
+        </p:txBody>
+      </p:sp>
+    </p:spTree>
+  </p:cSld>
+  <p:clrMapOvr>
+    <a:masterClrMapping/>
+  </p:clrMapOvr>
+</p:sld>
+</file>
+
+<file path=ppt/slides/slide16.xml><?xml version="1.0" encoding="utf-8"?>
+<p:sld xmlns:a="http://schemas.openxmlformats.org/drawingml/2006/main" xmlns:p="http://schemas.openxmlformats.org/presentationml/2006/main" xmlns:r="http://schemas.openxmlformats.org/officeDocument/2006/relationships">
+  <p:cSld>
+    <p:spTree>
+      <p:nvGrpSpPr>
+        <p:cNvPr id="1" name=""/>
+        <p:cNvGrpSpPr/>
+        <p:nvPr/>
+      </p:nvGrpSpPr>
+      <p:grpSpPr/>
+      <p:sp>
+        <p:nvSpPr>
+          <p:cNvPr id="2" name="Rectangle 1"/>
+          <p:cNvSpPr/>
+          <p:nvPr/>
+        </p:nvSpPr>
+        <p:spPr>
+          <a:xfrm>
+            <a:off x="0" y="0"/>
+            <a:ext cx="12188952" cy="6858000"/>
+          </a:xfrm>
+          <a:prstGeom prst="rect">
+            <a:avLst/>
+          </a:prstGeom>
+          <a:solidFill>
+            <a:srgbClr val="F5F6FA"/>
+          </a:solidFill>
+          <a:ln>
+            <a:noFill/>
+          </a:ln>
+        </p:spPr>
+        <p:style>
+          <a:lnRef idx="1">
+            <a:schemeClr val="accent1"/>
+          </a:lnRef>
+          <a:fillRef idx="3">
+            <a:schemeClr val="accent1"/>
+          </a:fillRef>
+          <a:effectRef idx="2">
+            <a:schemeClr val="accent1"/>
+          </a:effectRef>
+          <a:fontRef idx="minor">
+            <a:schemeClr val="lt1"/>
+          </a:fontRef>
+        </p:style>
+        <p:txBody>
+          <a:bodyPr rtlCol="0" anchor="ctr"/>
+          <a:lstStyle/>
+          <a:p>
+            <a:pPr algn="ctr"/>
+          </a:p>
+        </p:txBody>
+      </p:sp>
+      <p:sp>
+        <p:nvSpPr>
+          <p:cNvPr id="3" name="Rectangle 2"/>
+          <p:cNvSpPr/>
+          <p:nvPr/>
+        </p:nvSpPr>
+        <p:spPr>
+          <a:xfrm>
+            <a:off x="0" y="0"/>
+            <a:ext cx="12188952" cy="1325880"/>
+          </a:xfrm>
+          <a:prstGeom prst="rect">
+            <a:avLst/>
+          </a:prstGeom>
+          <a:solidFill>
+            <a:srgbClr val="122649"/>
+          </a:solidFill>
+          <a:ln>
+            <a:noFill/>
+          </a:ln>
+        </p:spPr>
+        <p:style>
+          <a:lnRef idx="1">
+            <a:schemeClr val="accent1"/>
+          </a:lnRef>
+          <a:fillRef idx="3">
+            <a:schemeClr val="accent1"/>
+          </a:fillRef>
+          <a:effectRef idx="2">
+            <a:schemeClr val="accent1"/>
+          </a:effectRef>
+          <a:fontRef idx="minor">
+            <a:schemeClr val="lt1"/>
+          </a:fontRef>
+        </p:style>
+        <p:txBody>
+          <a:bodyPr rtlCol="0" anchor="ctr"/>
+          <a:lstStyle/>
+          <a:p>
+            <a:pPr algn="ctr"/>
+          </a:p>
+        </p:txBody>
+      </p:sp>
+      <p:sp>
+        <p:nvSpPr>
+          <p:cNvPr id="4" name="Rectangle 3"/>
+          <p:cNvSpPr/>
+          <p:nvPr/>
+        </p:nvSpPr>
+        <p:spPr>
+          <a:xfrm>
+            <a:off x="0" y="0"/>
+            <a:ext cx="164592" cy="6858000"/>
+          </a:xfrm>
+          <a:prstGeom prst="rect">
+            <a:avLst/>
+          </a:prstGeom>
+          <a:solidFill>
+            <a:srgbClr val="C9A84C"/>
+          </a:solidFill>
+          <a:ln>
+            <a:noFill/>
+          </a:ln>
+        </p:spPr>
+        <p:style>
+          <a:lnRef idx="1">
+            <a:schemeClr val="accent1"/>
+          </a:lnRef>
+          <a:fillRef idx="3">
+            <a:schemeClr val="accent1"/>
+          </a:fillRef>
+          <a:effectRef idx="2">
+            <a:schemeClr val="accent1"/>
+          </a:effectRef>
+          <a:fontRef idx="minor">
+            <a:schemeClr val="lt1"/>
+          </a:fontRef>
+        </p:style>
+        <p:txBody>
+          <a:bodyPr rtlCol="0" anchor="ctr"/>
+          <a:lstStyle/>
+          <a:p>
+            <a:pPr algn="ctr"/>
+          </a:p>
+        </p:txBody>
+      </p:sp>
+      <p:sp>
+        <p:nvSpPr>
+          <p:cNvPr id="5" name="TextBox 4"/>
+          <p:cNvSpPr txBox="1"/>
+          <p:nvPr/>
+        </p:nvSpPr>
+        <p:spPr>
+          <a:xfrm>
+            <a:off x="411480" y="109728"/>
+            <a:ext cx="7315200" cy="292608"/>
+          </a:xfrm>
+          <a:prstGeom prst="rect">
+            <a:avLst/>
+          </a:prstGeom>
+          <a:noFill/>
+        </p:spPr>
+        <p:txBody>
+          <a:bodyPr wrap="square">
+            <a:spAutoFit/>
+          </a:bodyPr>
+          <a:lstStyle/>
+          <a:p>
+            <a:pPr algn="l"/>
+            <a:r>
+              <a:rPr sz="1000" b="1" i="0">
+                <a:solidFill>
+                  <a:srgbClr val="C9A84C"/>
+                </a:solidFill>
+                <a:latin typeface="Calibri"/>
+              </a:rPr>
+              <a:t>EMPLOYEE SELF-SERVICE</a:t>
+            </a:r>
+          </a:p>
+        </p:txBody>
+      </p:sp>
+      <p:sp>
+        <p:nvSpPr>
+          <p:cNvPr id="6" name="TextBox 5"/>
+          <p:cNvSpPr txBox="1"/>
+          <p:nvPr/>
+        </p:nvSpPr>
+        <p:spPr>
+          <a:xfrm>
+            <a:off x="411480" y="384048"/>
+            <a:ext cx="10058400" cy="640080"/>
+          </a:xfrm>
+          <a:prstGeom prst="rect">
+            <a:avLst/>
+          </a:prstGeom>
+          <a:noFill/>
+        </p:spPr>
+        <p:txBody>
+          <a:bodyPr wrap="square">
+            <a:spAutoFit/>
+          </a:bodyPr>
+          <a:lstStyle/>
+          <a:p>
+            <a:pPr algn="l"/>
+            <a:r>
+              <a:rPr sz="2800" b="1" i="0">
+                <a:solidFill>
+                  <a:srgbClr val="FFFFFF"/>
+                </a:solidFill>
+                <a:latin typeface="Calibri"/>
+              </a:rPr>
+              <a:t>HR Portal Features for Employees</a:t>
+            </a:r>
+          </a:p>
+        </p:txBody>
+      </p:sp>
+      <p:sp>
+        <p:nvSpPr>
+          <p:cNvPr id="7" name="Rounded Rectangle 6"/>
+          <p:cNvSpPr/>
+          <p:nvPr/>
+        </p:nvSpPr>
+        <p:spPr>
+          <a:xfrm>
+            <a:off x="411480" y="1508760"/>
+            <a:ext cx="3703320" cy="1554480"/>
+          </a:xfrm>
+          <a:prstGeom prst="roundRect">
+            <a:avLst>
+              <a:gd name="adj" fmla="val 5000"/>
+            </a:avLst>
+          </a:prstGeom>
+          <a:solidFill>
+            <a:srgbClr val="FFFFFF"/>
+          </a:solidFill>
+          <a:ln w="6350">
+            <a:solidFill>
+              <a:srgbClr val="E5E7EB"/>
+            </a:solidFill>
+          </a:ln>
+        </p:spPr>
+        <p:style>
+          <a:lnRef idx="1">
+            <a:schemeClr val="accent1"/>
+          </a:lnRef>
+          <a:fillRef idx="3">
+            <a:schemeClr val="accent1"/>
+          </a:fillRef>
+          <a:effectRef idx="2">
+            <a:schemeClr val="accent1"/>
+          </a:effectRef>
+          <a:fontRef idx="minor">
+            <a:schemeClr val="lt1"/>
+          </a:fontRef>
+        </p:style>
+        <p:txBody>
+          <a:bodyPr rtlCol="0" anchor="ctr"/>
+          <a:lstStyle/>
+          <a:p>
+            <a:pPr algn="ctr"/>
+          </a:p>
+        </p:txBody>
+      </p:sp>
+      <p:sp>
+        <p:nvSpPr>
+          <p:cNvPr id="8" name="Rectangle 7"/>
+          <p:cNvSpPr/>
+          <p:nvPr/>
+        </p:nvSpPr>
+        <p:spPr>
+          <a:xfrm>
+            <a:off x="411480" y="1508760"/>
+            <a:ext cx="3703320" cy="91440"/>
+          </a:xfrm>
+          <a:prstGeom prst="rect">
+            <a:avLst/>
+          </a:prstGeom>
+          <a:solidFill>
+            <a:srgbClr val="1B3A6B"/>
+          </a:solidFill>
+          <a:ln>
+            <a:noFill/>
+          </a:ln>
+        </p:spPr>
+        <p:style>
+          <a:lnRef idx="1">
+            <a:schemeClr val="accent1"/>
+          </a:lnRef>
+          <a:fillRef idx="3">
+            <a:schemeClr val="accent1"/>
+          </a:fillRef>
+          <a:effectRef idx="2">
+            <a:schemeClr val="accent1"/>
+          </a:effectRef>
+          <a:fontRef idx="minor">
+            <a:schemeClr val="lt1"/>
+          </a:fontRef>
+        </p:style>
+        <p:txBody>
+          <a:bodyPr rtlCol="0" anchor="ctr"/>
+          <a:lstStyle/>
+          <a:p>
+            <a:pPr algn="ctr"/>
+          </a:p>
+        </p:txBody>
+      </p:sp>
+      <p:sp>
+        <p:nvSpPr>
+          <p:cNvPr id="9" name="Oval 8"/>
+          <p:cNvSpPr/>
+          <p:nvPr/>
+        </p:nvSpPr>
+        <p:spPr>
+          <a:xfrm>
+            <a:off x="576072" y="1709928"/>
+            <a:ext cx="502920" cy="502920"/>
+          </a:xfrm>
+          <a:prstGeom prst="ellipse">
+            <a:avLst/>
+          </a:prstGeom>
+          <a:solidFill>
+            <a:srgbClr val="1B3A6B"/>
+          </a:solidFill>
+          <a:ln>
+            <a:noFill/>
+          </a:ln>
+        </p:spPr>
+        <p:style>
+          <a:lnRef idx="1">
+            <a:schemeClr val="accent1"/>
+          </a:lnRef>
+          <a:fillRef idx="3">
+            <a:schemeClr val="accent1"/>
+          </a:fillRef>
+          <a:effectRef idx="2">
+            <a:schemeClr val="accent1"/>
+          </a:effectRef>
+          <a:fontRef idx="minor">
+            <a:schemeClr val="lt1"/>
+          </a:fontRef>
+        </p:style>
+        <p:txBody>
+          <a:bodyPr rtlCol="0" anchor="ctr"/>
+          <a:lstStyle/>
+          <a:p>
+            <a:pPr algn="ctr"/>
+          </a:p>
+        </p:txBody>
+      </p:sp>
+      <p:sp>
+        <p:nvSpPr>
+          <p:cNvPr id="10" name="TextBox 9"/>
+          <p:cNvSpPr txBox="1"/>
+          <p:nvPr/>
+        </p:nvSpPr>
+        <p:spPr>
+          <a:xfrm>
+            <a:off x="576072" y="1783080"/>
+            <a:ext cx="502920" cy="365760"/>
+          </a:xfrm>
+          <a:prstGeom prst="rect">
+            <a:avLst/>
+          </a:prstGeom>
+          <a:noFill/>
+        </p:spPr>
+        <p:txBody>
+          <a:bodyPr wrap="square">
+            <a:spAutoFit/>
+          </a:bodyPr>
+          <a:lstStyle/>
+          <a:p>
+            <a:pPr algn="ctr"/>
+            <a:r>
+              <a:rPr sz="1500" b="1" i="0">
+                <a:solidFill>
+                  <a:srgbClr val="FFFFFF"/>
+                </a:solidFill>
+                <a:latin typeface="Calibri"/>
+              </a:rPr>
+              <a:t>1</a:t>
+            </a:r>
+          </a:p>
+        </p:txBody>
+      </p:sp>
+      <p:sp>
+        <p:nvSpPr>
+          <p:cNvPr id="11" name="TextBox 10"/>
+          <p:cNvSpPr txBox="1"/>
+          <p:nvPr/>
+        </p:nvSpPr>
+        <p:spPr>
+          <a:xfrm>
+            <a:off x="1188720" y="1764792"/>
+            <a:ext cx="2834640" cy="365760"/>
+          </a:xfrm>
+          <a:prstGeom prst="rect">
+            <a:avLst/>
+          </a:prstGeom>
+          <a:noFill/>
+        </p:spPr>
+        <p:txBody>
+          <a:bodyPr wrap="square">
+            <a:spAutoFit/>
+          </a:bodyPr>
+          <a:lstStyle/>
+          <a:p>
+            <a:pPr algn="l"/>
+            <a:r>
+              <a:rPr sz="1300" b="1" i="0">
+                <a:solidFill>
+                  <a:srgbClr val="122649"/>
+                </a:solidFill>
+                <a:latin typeface="Calibri"/>
+              </a:rPr>
+              <a:t>Joining &amp; Tenure</a:t>
+            </a:r>
+          </a:p>
+        </p:txBody>
+      </p:sp>
+      <p:sp>
+        <p:nvSpPr>
+          <p:cNvPr id="12" name="TextBox 11"/>
+          <p:cNvSpPr txBox="1"/>
+          <p:nvPr/>
+        </p:nvSpPr>
+        <p:spPr>
+          <a:xfrm>
+            <a:off x="576072" y="2286000"/>
+            <a:ext cx="3474720" cy="777240"/>
+          </a:xfrm>
+          <a:prstGeom prst="rect">
+            <a:avLst/>
+          </a:prstGeom>
+          <a:noFill/>
+        </p:spPr>
+        <p:txBody>
+          <a:bodyPr wrap="square">
+            <a:spAutoFit/>
+          </a:bodyPr>
+          <a:lstStyle/>
+          <a:p>
+            <a:pPr algn="l"/>
+            <a:r>
+              <a:rPr sz="1050" b="0" i="0">
+                <a:solidFill>
+                  <a:srgbClr val="6B7280"/>
+                </a:solidFill>
+                <a:latin typeface="Calibri"/>
+              </a:rPr>
+              <a:t>View confirmed joining date, probation status, years of service, and upcoming work anniversaries.</a:t>
+            </a:r>
+          </a:p>
+        </p:txBody>
+      </p:sp>
+      <p:sp>
+        <p:nvSpPr>
+          <p:cNvPr id="13" name="Rounded Rectangle 12"/>
+          <p:cNvSpPr/>
+          <p:nvPr/>
+        </p:nvSpPr>
+        <p:spPr>
+          <a:xfrm>
+            <a:off x="4343400" y="1508760"/>
+            <a:ext cx="3703320" cy="1554480"/>
+          </a:xfrm>
+          <a:prstGeom prst="roundRect">
+            <a:avLst>
+              <a:gd name="adj" fmla="val 5000"/>
+            </a:avLst>
+          </a:prstGeom>
+          <a:solidFill>
+            <a:srgbClr val="FFFFFF"/>
+          </a:solidFill>
+          <a:ln w="6350">
+            <a:solidFill>
+              <a:srgbClr val="E5E7EB"/>
+            </a:solidFill>
+          </a:ln>
+        </p:spPr>
+        <p:style>
+          <a:lnRef idx="1">
+            <a:schemeClr val="accent1"/>
+          </a:lnRef>
+          <a:fillRef idx="3">
+            <a:schemeClr val="accent1"/>
+          </a:fillRef>
+          <a:effectRef idx="2">
+            <a:schemeClr val="accent1"/>
+          </a:effectRef>
+          <a:fontRef idx="minor">
+            <a:schemeClr val="lt1"/>
+          </a:fontRef>
+        </p:style>
+        <p:txBody>
+          <a:bodyPr rtlCol="0" anchor="ctr"/>
+          <a:lstStyle/>
+          <a:p>
+            <a:pPr algn="ctr"/>
+          </a:p>
+        </p:txBody>
+      </p:sp>
+      <p:sp>
+        <p:nvSpPr>
+          <p:cNvPr id="14" name="Rectangle 13"/>
+          <p:cNvSpPr/>
+          <p:nvPr/>
+        </p:nvSpPr>
+        <p:spPr>
+          <a:xfrm>
+            <a:off x="4343400" y="1508760"/>
+            <a:ext cx="3703320" cy="91440"/>
+          </a:xfrm>
+          <a:prstGeom prst="rect">
+            <a:avLst/>
+          </a:prstGeom>
+          <a:solidFill>
+            <a:srgbClr val="10B981"/>
+          </a:solidFill>
+          <a:ln>
+            <a:noFill/>
+          </a:ln>
+        </p:spPr>
+        <p:style>
+          <a:lnRef idx="1">
+            <a:schemeClr val="accent1"/>
+          </a:lnRef>
+          <a:fillRef idx="3">
+            <a:schemeClr val="accent1"/>
+          </a:fillRef>
+          <a:effectRef idx="2">
+            <a:schemeClr val="accent1"/>
+          </a:effectRef>
+          <a:fontRef idx="minor">
+            <a:schemeClr val="lt1"/>
+          </a:fontRef>
+        </p:style>
+        <p:txBody>
+          <a:bodyPr rtlCol="0" anchor="ctr"/>
+          <a:lstStyle/>
+          <a:p>
+            <a:pPr algn="ctr"/>
+          </a:p>
+        </p:txBody>
+      </p:sp>
+      <p:sp>
+        <p:nvSpPr>
+          <p:cNvPr id="15" name="Oval 14"/>
+          <p:cNvSpPr/>
+          <p:nvPr/>
+        </p:nvSpPr>
+        <p:spPr>
+          <a:xfrm>
+            <a:off x="4507992" y="1709928"/>
+            <a:ext cx="502920" cy="502920"/>
+          </a:xfrm>
+          <a:prstGeom prst="ellipse">
+            <a:avLst/>
+          </a:prstGeom>
+          <a:solidFill>
+            <a:srgbClr val="10B981"/>
+          </a:solidFill>
+          <a:ln>
+            <a:noFill/>
+          </a:ln>
+        </p:spPr>
+        <p:style>
+          <a:lnRef idx="1">
+            <a:schemeClr val="accent1"/>
+          </a:lnRef>
+          <a:fillRef idx="3">
+            <a:schemeClr val="accent1"/>
+          </a:fillRef>
+          <a:effectRef idx="2">
+            <a:schemeClr val="accent1"/>
+          </a:effectRef>
+          <a:fontRef idx="minor">
+            <a:schemeClr val="lt1"/>
+          </a:fontRef>
+        </p:style>
+        <p:txBody>
+          <a:bodyPr rtlCol="0" anchor="ctr"/>
+          <a:lstStyle/>
+          <a:p>
+            <a:pPr algn="ctr"/>
+          </a:p>
+        </p:txBody>
+      </p:sp>
+      <p:sp>
+        <p:nvSpPr>
+          <p:cNvPr id="16" name="TextBox 15"/>
+          <p:cNvSpPr txBox="1"/>
+          <p:nvPr/>
+        </p:nvSpPr>
+        <p:spPr>
+          <a:xfrm>
+            <a:off x="4507992" y="1783080"/>
+            <a:ext cx="502920" cy="365760"/>
+          </a:xfrm>
+          <a:prstGeom prst="rect">
+            <a:avLst/>
+          </a:prstGeom>
+          <a:noFill/>
+        </p:spPr>
+        <p:txBody>
+          <a:bodyPr wrap="square">
+            <a:spAutoFit/>
+          </a:bodyPr>
+          <a:lstStyle/>
+          <a:p>
+            <a:pPr algn="ctr"/>
+            <a:r>
+              <a:rPr sz="1500" b="1" i="0">
+                <a:solidFill>
+                  <a:srgbClr val="FFFFFF"/>
+                </a:solidFill>
+                <a:latin typeface="Calibri"/>
+              </a:rPr>
+              <a:t>2</a:t>
+            </a:r>
+          </a:p>
+        </p:txBody>
+      </p:sp>
+      <p:sp>
+        <p:nvSpPr>
+          <p:cNvPr id="17" name="TextBox 16"/>
+          <p:cNvSpPr txBox="1"/>
+          <p:nvPr/>
+        </p:nvSpPr>
+        <p:spPr>
+          <a:xfrm>
+            <a:off x="5120640" y="1764792"/>
+            <a:ext cx="2834640" cy="365760"/>
+          </a:xfrm>
+          <a:prstGeom prst="rect">
+            <a:avLst/>
+          </a:prstGeom>
+          <a:noFill/>
+        </p:spPr>
+        <p:txBody>
+          <a:bodyPr wrap="square">
+            <a:spAutoFit/>
+          </a:bodyPr>
+          <a:lstStyle/>
+          <a:p>
+            <a:pPr algn="l"/>
+            <a:r>
+              <a:rPr sz="1300" b="1" i="0">
+                <a:solidFill>
+                  <a:srgbClr val="122649"/>
+                </a:solidFill>
+                <a:latin typeface="Calibri"/>
+              </a:rPr>
+              <a:t>Leave Balance</a:t>
+            </a:r>
+          </a:p>
+        </p:txBody>
+      </p:sp>
+      <p:sp>
+        <p:nvSpPr>
+          <p:cNvPr id="18" name="TextBox 17"/>
+          <p:cNvSpPr txBox="1"/>
+          <p:nvPr/>
+        </p:nvSpPr>
+        <p:spPr>
+          <a:xfrm>
+            <a:off x="4507992" y="2286000"/>
+            <a:ext cx="3474720" cy="777240"/>
+          </a:xfrm>
+          <a:prstGeom prst="rect">
+            <a:avLst/>
+          </a:prstGeom>
+          <a:noFill/>
+        </p:spPr>
+        <p:txBody>
+          <a:bodyPr wrap="square">
+            <a:spAutoFit/>
+          </a:bodyPr>
+          <a:lstStyle/>
+          <a:p>
+            <a:pPr algn="l"/>
+            <a:r>
+              <a:rPr sz="1050" b="0" i="0">
+                <a:solidFill>
+                  <a:srgbClr val="6B7280"/>
+                </a:solidFill>
+                <a:latin typeface="Calibri"/>
+              </a:rPr>
+              <a:t>Live balance: Annual · Sick · Casual · Emergency. View entitlement, used, pending and remaining days.</a:t>
+            </a:r>
+          </a:p>
+        </p:txBody>
+      </p:sp>
+      <p:sp>
+        <p:nvSpPr>
+          <p:cNvPr id="19" name="Rounded Rectangle 18"/>
+          <p:cNvSpPr/>
+          <p:nvPr/>
+        </p:nvSpPr>
+        <p:spPr>
+          <a:xfrm>
+            <a:off x="8275319" y="1508760"/>
+            <a:ext cx="3703320" cy="1554480"/>
+          </a:xfrm>
+          <a:prstGeom prst="roundRect">
+            <a:avLst>
+              <a:gd name="adj" fmla="val 5000"/>
+            </a:avLst>
+          </a:prstGeom>
+          <a:solidFill>
+            <a:srgbClr val="FFFFFF"/>
+          </a:solidFill>
+          <a:ln w="6350">
+            <a:solidFill>
+              <a:srgbClr val="E5E7EB"/>
+            </a:solidFill>
+          </a:ln>
+        </p:spPr>
+        <p:style>
+          <a:lnRef idx="1">
+            <a:schemeClr val="accent1"/>
+          </a:lnRef>
+          <a:fillRef idx="3">
+            <a:schemeClr val="accent1"/>
+          </a:fillRef>
+          <a:effectRef idx="2">
+            <a:schemeClr val="accent1"/>
+          </a:effectRef>
+          <a:fontRef idx="minor">
+            <a:schemeClr val="lt1"/>
+          </a:fontRef>
+        </p:style>
+        <p:txBody>
+          <a:bodyPr rtlCol="0" anchor="ctr"/>
+          <a:lstStyle/>
+          <a:p>
+            <a:pPr algn="ctr"/>
+          </a:p>
+        </p:txBody>
+      </p:sp>
+      <p:sp>
+        <p:nvSpPr>
+          <p:cNvPr id="20" name="Rectangle 19"/>
+          <p:cNvSpPr/>
+          <p:nvPr/>
+        </p:nvSpPr>
+        <p:spPr>
+          <a:xfrm>
+            <a:off x="8275319" y="1508760"/>
+            <a:ext cx="3703320" cy="91440"/>
+          </a:xfrm>
+          <a:prstGeom prst="rect">
+            <a:avLst/>
+          </a:prstGeom>
+          <a:solidFill>
+            <a:srgbClr val="C9A84C"/>
+          </a:solidFill>
+          <a:ln>
+            <a:noFill/>
+          </a:ln>
+        </p:spPr>
+        <p:style>
+          <a:lnRef idx="1">
+            <a:schemeClr val="accent1"/>
+          </a:lnRef>
+          <a:fillRef idx="3">
+            <a:schemeClr val="accent1"/>
+          </a:fillRef>
+          <a:effectRef idx="2">
+            <a:schemeClr val="accent1"/>
+          </a:effectRef>
+          <a:fontRef idx="minor">
+            <a:schemeClr val="lt1"/>
+          </a:fontRef>
+        </p:style>
+        <p:txBody>
+          <a:bodyPr rtlCol="0" anchor="ctr"/>
+          <a:lstStyle/>
+          <a:p>
+            <a:pPr algn="ctr"/>
+          </a:p>
+        </p:txBody>
+      </p:sp>
+      <p:sp>
+        <p:nvSpPr>
+          <p:cNvPr id="21" name="Oval 20"/>
+          <p:cNvSpPr/>
+          <p:nvPr/>
+        </p:nvSpPr>
+        <p:spPr>
+          <a:xfrm>
+            <a:off x="8439911" y="1709928"/>
+            <a:ext cx="502920" cy="502920"/>
+          </a:xfrm>
+          <a:prstGeom prst="ellipse">
+            <a:avLst/>
+          </a:prstGeom>
+          <a:solidFill>
+            <a:srgbClr val="C9A84C"/>
+          </a:solidFill>
+          <a:ln>
+            <a:noFill/>
+          </a:ln>
+        </p:spPr>
+        <p:style>
+          <a:lnRef idx="1">
+            <a:schemeClr val="accent1"/>
+          </a:lnRef>
+          <a:fillRef idx="3">
+            <a:schemeClr val="accent1"/>
+          </a:fillRef>
+          <a:effectRef idx="2">
+            <a:schemeClr val="accent1"/>
+          </a:effectRef>
+          <a:fontRef idx="minor">
+            <a:schemeClr val="lt1"/>
+          </a:fontRef>
+        </p:style>
+        <p:txBody>
+          <a:bodyPr rtlCol="0" anchor="ctr"/>
+          <a:lstStyle/>
+          <a:p>
+            <a:pPr algn="ctr"/>
+          </a:p>
+        </p:txBody>
+      </p:sp>
+      <p:sp>
+        <p:nvSpPr>
+          <p:cNvPr id="22" name="TextBox 21"/>
+          <p:cNvSpPr txBox="1"/>
+          <p:nvPr/>
+        </p:nvSpPr>
+        <p:spPr>
+          <a:xfrm>
+            <a:off x="8439911" y="1783080"/>
+            <a:ext cx="502920" cy="365760"/>
+          </a:xfrm>
+          <a:prstGeom prst="rect">
+            <a:avLst/>
+          </a:prstGeom>
+          <a:noFill/>
+        </p:spPr>
+        <p:txBody>
+          <a:bodyPr wrap="square">
+            <a:spAutoFit/>
+          </a:bodyPr>
+          <a:lstStyle/>
+          <a:p>
+            <a:pPr algn="ctr"/>
+            <a:r>
+              <a:rPr sz="1500" b="1" i="0">
+                <a:solidFill>
+                  <a:srgbClr val="FFFFFF"/>
+                </a:solidFill>
+                <a:latin typeface="Calibri"/>
+              </a:rPr>
+              <a:t>3</a:t>
+            </a:r>
+          </a:p>
+        </p:txBody>
+      </p:sp>
+      <p:sp>
+        <p:nvSpPr>
+          <p:cNvPr id="23" name="TextBox 22"/>
+          <p:cNvSpPr txBox="1"/>
+          <p:nvPr/>
+        </p:nvSpPr>
+        <p:spPr>
+          <a:xfrm>
+            <a:off x="9052559" y="1764792"/>
+            <a:ext cx="2834640" cy="365760"/>
+          </a:xfrm>
+          <a:prstGeom prst="rect">
+            <a:avLst/>
+          </a:prstGeom>
+          <a:noFill/>
+        </p:spPr>
+        <p:txBody>
+          <a:bodyPr wrap="square">
+            <a:spAutoFit/>
+          </a:bodyPr>
+          <a:lstStyle/>
+          <a:p>
+            <a:pPr algn="l"/>
+            <a:r>
+              <a:rPr sz="1300" b="1" i="0">
+                <a:solidFill>
+                  <a:srgbClr val="122649"/>
+                </a:solidFill>
+                <a:latin typeface="Calibri"/>
+              </a:rPr>
+              <a:t>Digital Pay Slips</a:t>
+            </a:r>
+          </a:p>
+        </p:txBody>
+      </p:sp>
+      <p:sp>
+        <p:nvSpPr>
+          <p:cNvPr id="24" name="TextBox 23"/>
+          <p:cNvSpPr txBox="1"/>
+          <p:nvPr/>
+        </p:nvSpPr>
+        <p:spPr>
+          <a:xfrm>
+            <a:off x="8439911" y="2286000"/>
+            <a:ext cx="3474720" cy="777240"/>
+          </a:xfrm>
+          <a:prstGeom prst="rect">
+            <a:avLst/>
+          </a:prstGeom>
+          <a:noFill/>
+        </p:spPr>
+        <p:txBody>
+          <a:bodyPr wrap="square">
+            <a:spAutoFit/>
+          </a:bodyPr>
+          <a:lstStyle/>
+          <a:p>
+            <a:pPr algn="l"/>
+            <a:r>
+              <a:rPr sz="1050" b="0" i="0">
+                <a:solidFill>
+                  <a:srgbClr val="6B7280"/>
+                </a:solidFill>
+                <a:latin typeface="Calibri"/>
+              </a:rPr>
+              <a:t>Download current and historical pay slips as PDF. Breakdown of basic, allowances, deductions &amp; net pay.</a:t>
+            </a:r>
+          </a:p>
+        </p:txBody>
+      </p:sp>
+      <p:sp>
+        <p:nvSpPr>
+          <p:cNvPr id="25" name="Rounded Rectangle 24"/>
+          <p:cNvSpPr/>
+          <p:nvPr/>
+        </p:nvSpPr>
+        <p:spPr>
+          <a:xfrm>
+            <a:off x="411480" y="3200400"/>
+            <a:ext cx="3703320" cy="1554480"/>
+          </a:xfrm>
+          <a:prstGeom prst="roundRect">
+            <a:avLst>
+              <a:gd name="adj" fmla="val 5000"/>
+            </a:avLst>
+          </a:prstGeom>
+          <a:solidFill>
+            <a:srgbClr val="FFFFFF"/>
+          </a:solidFill>
+          <a:ln w="6350">
+            <a:solidFill>
+              <a:srgbClr val="E5E7EB"/>
+            </a:solidFill>
+          </a:ln>
+        </p:spPr>
+        <p:style>
+          <a:lnRef idx="1">
+            <a:schemeClr val="accent1"/>
+          </a:lnRef>
+          <a:fillRef idx="3">
+            <a:schemeClr val="accent1"/>
+          </a:fillRef>
+          <a:effectRef idx="2">
+            <a:schemeClr val="accent1"/>
+          </a:effectRef>
+          <a:fontRef idx="minor">
+            <a:schemeClr val="lt1"/>
+          </a:fontRef>
+        </p:style>
+        <p:txBody>
+          <a:bodyPr rtlCol="0" anchor="ctr"/>
+          <a:lstStyle/>
+          <a:p>
+            <a:pPr algn="ctr"/>
+          </a:p>
+        </p:txBody>
+      </p:sp>
+      <p:sp>
+        <p:nvSpPr>
+          <p:cNvPr id="26" name="Rectangle 25"/>
+          <p:cNvSpPr/>
+          <p:nvPr/>
+        </p:nvSpPr>
+        <p:spPr>
+          <a:xfrm>
+            <a:off x="411480" y="3200400"/>
+            <a:ext cx="3703320" cy="91440"/>
+          </a:xfrm>
+          <a:prstGeom prst="rect">
+            <a:avLst/>
+          </a:prstGeom>
+          <a:solidFill>
+            <a:srgbClr val="7C3AED"/>
+          </a:solidFill>
+          <a:ln>
+            <a:noFill/>
+          </a:ln>
+        </p:spPr>
+        <p:style>
+          <a:lnRef idx="1">
+            <a:schemeClr val="accent1"/>
+          </a:lnRef>
+          <a:fillRef idx="3">
+            <a:schemeClr val="accent1"/>
+          </a:fillRef>
+          <a:effectRef idx="2">
+            <a:schemeClr val="accent1"/>
+          </a:effectRef>
+          <a:fontRef idx="minor">
+            <a:schemeClr val="lt1"/>
+          </a:fontRef>
+        </p:style>
+        <p:txBody>
+          <a:bodyPr rtlCol="0" anchor="ctr"/>
+          <a:lstStyle/>
+          <a:p>
+            <a:pPr algn="ctr"/>
+          </a:p>
+        </p:txBody>
+      </p:sp>
+      <p:sp>
+        <p:nvSpPr>
+          <p:cNvPr id="27" name="Oval 26"/>
+          <p:cNvSpPr/>
+          <p:nvPr/>
+        </p:nvSpPr>
+        <p:spPr>
+          <a:xfrm>
+            <a:off x="576072" y="3401568"/>
+            <a:ext cx="502920" cy="502920"/>
+          </a:xfrm>
+          <a:prstGeom prst="ellipse">
+            <a:avLst/>
+          </a:prstGeom>
+          <a:solidFill>
+            <a:srgbClr val="7C3AED"/>
+          </a:solidFill>
+          <a:ln>
+            <a:noFill/>
+          </a:ln>
+        </p:spPr>
+        <p:style>
+          <a:lnRef idx="1">
+            <a:schemeClr val="accent1"/>
+          </a:lnRef>
+          <a:fillRef idx="3">
+            <a:schemeClr val="accent1"/>
+          </a:fillRef>
+          <a:effectRef idx="2">
+            <a:schemeClr val="accent1"/>
+          </a:effectRef>
+          <a:fontRef idx="minor">
+            <a:schemeClr val="lt1"/>
+          </a:fontRef>
+        </p:style>
+        <p:txBody>
+          <a:bodyPr rtlCol="0" anchor="ctr"/>
+          <a:lstStyle/>
+          <a:p>
+            <a:pPr algn="ctr"/>
+          </a:p>
+        </p:txBody>
+      </p:sp>
+      <p:sp>
+        <p:nvSpPr>
+          <p:cNvPr id="28" name="TextBox 27"/>
+          <p:cNvSpPr txBox="1"/>
+          <p:nvPr/>
+        </p:nvSpPr>
+        <p:spPr>
+          <a:xfrm>
+            <a:off x="576072" y="3474720"/>
+            <a:ext cx="502920" cy="365760"/>
+          </a:xfrm>
+          <a:prstGeom prst="rect">
+            <a:avLst/>
+          </a:prstGeom>
+          <a:noFill/>
+        </p:spPr>
+        <p:txBody>
+          <a:bodyPr wrap="square">
+            <a:spAutoFit/>
+          </a:bodyPr>
+          <a:lstStyle/>
+          <a:p>
+            <a:pPr algn="ctr"/>
+            <a:r>
+              <a:rPr sz="1500" b="1" i="0">
+                <a:solidFill>
+                  <a:srgbClr val="FFFFFF"/>
+                </a:solidFill>
+                <a:latin typeface="Calibri"/>
+              </a:rPr>
+              <a:t>4</a:t>
+            </a:r>
+          </a:p>
+        </p:txBody>
+      </p:sp>
+      <p:sp>
+        <p:nvSpPr>
+          <p:cNvPr id="29" name="TextBox 28"/>
+          <p:cNvSpPr txBox="1"/>
+          <p:nvPr/>
+        </p:nvSpPr>
+        <p:spPr>
+          <a:xfrm>
+            <a:off x="1188720" y="3456432"/>
+            <a:ext cx="2834640" cy="365760"/>
+          </a:xfrm>
+          <a:prstGeom prst="rect">
+            <a:avLst/>
+          </a:prstGeom>
+          <a:noFill/>
+        </p:spPr>
+        <p:txBody>
+          <a:bodyPr wrap="square">
+            <a:spAutoFit/>
+          </a:bodyPr>
+          <a:lstStyle/>
+          <a:p>
+            <a:pPr algn="l"/>
+            <a:r>
+              <a:rPr sz="1300" b="1" i="0">
+                <a:solidFill>
+                  <a:srgbClr val="122649"/>
+                </a:solidFill>
+                <a:latin typeface="Calibri"/>
+              </a:rPr>
+              <a:t>Offer Letter &amp; Contract</a:t>
+            </a:r>
+          </a:p>
+        </p:txBody>
+      </p:sp>
+      <p:sp>
+        <p:nvSpPr>
+          <p:cNvPr id="30" name="TextBox 29"/>
+          <p:cNvSpPr txBox="1"/>
+          <p:nvPr/>
+        </p:nvSpPr>
+        <p:spPr>
+          <a:xfrm>
+            <a:off x="576072" y="3977639"/>
+            <a:ext cx="3474720" cy="777240"/>
+          </a:xfrm>
+          <a:prstGeom prst="rect">
+            <a:avLst/>
+          </a:prstGeom>
+          <a:noFill/>
+        </p:spPr>
+        <p:txBody>
+          <a:bodyPr wrap="square">
+            <a:spAutoFit/>
+          </a:bodyPr>
+          <a:lstStyle/>
+          <a:p>
+            <a:pPr algn="l"/>
+            <a:r>
+              <a:rPr sz="1050" b="0" i="0">
+                <a:solidFill>
+                  <a:srgbClr val="6B7280"/>
+                </a:solidFill>
+                <a:latin typeface="Calibri"/>
+              </a:rPr>
+              <a:t>Securely view your signed offer letter, employment contract, and any amendments — all in one place.</a:t>
+            </a:r>
+          </a:p>
+        </p:txBody>
+      </p:sp>
+      <p:sp>
+        <p:nvSpPr>
+          <p:cNvPr id="31" name="Rounded Rectangle 30"/>
+          <p:cNvSpPr/>
+          <p:nvPr/>
+        </p:nvSpPr>
+        <p:spPr>
+          <a:xfrm>
+            <a:off x="4343400" y="3200400"/>
+            <a:ext cx="3703320" cy="1554480"/>
+          </a:xfrm>
+          <a:prstGeom prst="roundRect">
+            <a:avLst>
+              <a:gd name="adj" fmla="val 5000"/>
+            </a:avLst>
+          </a:prstGeom>
+          <a:solidFill>
+            <a:srgbClr val="FFFFFF"/>
+          </a:solidFill>
+          <a:ln w="6350">
+            <a:solidFill>
+              <a:srgbClr val="E5E7EB"/>
+            </a:solidFill>
+          </a:ln>
+        </p:spPr>
+        <p:style>
+          <a:lnRef idx="1">
+            <a:schemeClr val="accent1"/>
+          </a:lnRef>
+          <a:fillRef idx="3">
+            <a:schemeClr val="accent1"/>
+          </a:fillRef>
+          <a:effectRef idx="2">
+            <a:schemeClr val="accent1"/>
+          </a:effectRef>
+          <a:fontRef idx="minor">
+            <a:schemeClr val="lt1"/>
+          </a:fontRef>
+        </p:style>
+        <p:txBody>
+          <a:bodyPr rtlCol="0" anchor="ctr"/>
+          <a:lstStyle/>
+          <a:p>
+            <a:pPr algn="ctr"/>
+          </a:p>
+        </p:txBody>
+      </p:sp>
+      <p:sp>
+        <p:nvSpPr>
+          <p:cNvPr id="32" name="Rectangle 31"/>
+          <p:cNvSpPr/>
+          <p:nvPr/>
+        </p:nvSpPr>
+        <p:spPr>
+          <a:xfrm>
+            <a:off x="4343400" y="3200400"/>
+            <a:ext cx="3703320" cy="91440"/>
+          </a:xfrm>
+          <a:prstGeom prst="rect">
+            <a:avLst/>
+          </a:prstGeom>
+          <a:solidFill>
+            <a:srgbClr val="3B82F6"/>
+          </a:solidFill>
+          <a:ln>
+            <a:noFill/>
+          </a:ln>
+        </p:spPr>
+        <p:style>
+          <a:lnRef idx="1">
+            <a:schemeClr val="accent1"/>
+          </a:lnRef>
+          <a:fillRef idx="3">
+            <a:schemeClr val="accent1"/>
+          </a:fillRef>
+          <a:effectRef idx="2">
+            <a:schemeClr val="accent1"/>
+          </a:effectRef>
+          <a:fontRef idx="minor">
+            <a:schemeClr val="lt1"/>
+          </a:fontRef>
+        </p:style>
+        <p:txBody>
+          <a:bodyPr rtlCol="0" anchor="ctr"/>
+          <a:lstStyle/>
+          <a:p>
+            <a:pPr algn="ctr"/>
+          </a:p>
+        </p:txBody>
+      </p:sp>
+      <p:sp>
+        <p:nvSpPr>
+          <p:cNvPr id="33" name="Oval 32"/>
+          <p:cNvSpPr/>
+          <p:nvPr/>
+        </p:nvSpPr>
+        <p:spPr>
+          <a:xfrm>
+            <a:off x="4507992" y="3401568"/>
+            <a:ext cx="502920" cy="502920"/>
+          </a:xfrm>
+          <a:prstGeom prst="ellipse">
+            <a:avLst/>
+          </a:prstGeom>
+          <a:solidFill>
+            <a:srgbClr val="3B82F6"/>
+          </a:solidFill>
+          <a:ln>
+            <a:noFill/>
+          </a:ln>
+        </p:spPr>
+        <p:style>
+          <a:lnRef idx="1">
+            <a:schemeClr val="accent1"/>
+          </a:lnRef>
+          <a:fillRef idx="3">
+            <a:schemeClr val="accent1"/>
+          </a:fillRef>
+          <a:effectRef idx="2">
+            <a:schemeClr val="accent1"/>
+          </a:effectRef>
+          <a:fontRef idx="minor">
+            <a:schemeClr val="lt1"/>
+          </a:fontRef>
+        </p:style>
+        <p:txBody>
+          <a:bodyPr rtlCol="0" anchor="ctr"/>
+          <a:lstStyle/>
+          <a:p>
+            <a:pPr algn="ctr"/>
+          </a:p>
+        </p:txBody>
+      </p:sp>
+      <p:sp>
+        <p:nvSpPr>
+          <p:cNvPr id="34" name="TextBox 33"/>
+          <p:cNvSpPr txBox="1"/>
+          <p:nvPr/>
+        </p:nvSpPr>
+        <p:spPr>
+          <a:xfrm>
+            <a:off x="4507992" y="3474720"/>
+            <a:ext cx="502920" cy="365760"/>
+          </a:xfrm>
+          <a:prstGeom prst="rect">
+            <a:avLst/>
+          </a:prstGeom>
+          <a:noFill/>
+        </p:spPr>
+        <p:txBody>
+          <a:bodyPr wrap="square">
+            <a:spAutoFit/>
+          </a:bodyPr>
+          <a:lstStyle/>
+          <a:p>
+            <a:pPr algn="ctr"/>
+            <a:r>
+              <a:rPr sz="1500" b="1" i="0">
+                <a:solidFill>
+                  <a:srgbClr val="FFFFFF"/>
+                </a:solidFill>
+                <a:latin typeface="Calibri"/>
+              </a:rPr>
+              <a:t>5</a:t>
+            </a:r>
+          </a:p>
+        </p:txBody>
+      </p:sp>
+      <p:sp>
+        <p:nvSpPr>
+          <p:cNvPr id="35" name="TextBox 34"/>
+          <p:cNvSpPr txBox="1"/>
+          <p:nvPr/>
+        </p:nvSpPr>
+        <p:spPr>
+          <a:xfrm>
+            <a:off x="5120640" y="3456432"/>
+            <a:ext cx="2834640" cy="365760"/>
+          </a:xfrm>
+          <a:prstGeom prst="rect">
+            <a:avLst/>
+          </a:prstGeom>
+          <a:noFill/>
+        </p:spPr>
+        <p:txBody>
+          <a:bodyPr wrap="square">
+            <a:spAutoFit/>
+          </a:bodyPr>
+          <a:lstStyle/>
+          <a:p>
+            <a:pPr algn="l"/>
+            <a:r>
+              <a:rPr sz="1300" b="1" i="0">
+                <a:solidFill>
+                  <a:srgbClr val="122649"/>
+                </a:solidFill>
+                <a:latin typeface="Calibri"/>
+              </a:rPr>
+              <a:t>Salary Certificate</a:t>
+            </a:r>
+          </a:p>
+        </p:txBody>
+      </p:sp>
+      <p:sp>
+        <p:nvSpPr>
+          <p:cNvPr id="36" name="TextBox 35"/>
+          <p:cNvSpPr txBox="1"/>
+          <p:nvPr/>
+        </p:nvSpPr>
+        <p:spPr>
+          <a:xfrm>
+            <a:off x="4507992" y="3977639"/>
+            <a:ext cx="3474720" cy="777240"/>
+          </a:xfrm>
+          <a:prstGeom prst="rect">
+            <a:avLst/>
+          </a:prstGeom>
+          <a:noFill/>
+        </p:spPr>
+        <p:txBody>
+          <a:bodyPr wrap="square">
+            <a:spAutoFit/>
+          </a:bodyPr>
+          <a:lstStyle/>
+          <a:p>
+            <a:pPr algn="l"/>
+            <a:r>
+              <a:rPr sz="1050" b="0" i="0">
+                <a:solidFill>
+                  <a:srgbClr val="6B7280"/>
+                </a:solidFill>
+                <a:latin typeface="Calibri"/>
+              </a:rPr>
+              <a:t>Request salary / employment certificates for visa, bank loans, or rental — issued digitally by HR.</a:t>
+            </a:r>
+          </a:p>
+        </p:txBody>
+      </p:sp>
+      <p:sp>
+        <p:nvSpPr>
+          <p:cNvPr id="37" name="Rounded Rectangle 36"/>
+          <p:cNvSpPr/>
+          <p:nvPr/>
+        </p:nvSpPr>
+        <p:spPr>
+          <a:xfrm>
+            <a:off x="8275319" y="3200400"/>
+            <a:ext cx="3703320" cy="1554480"/>
+          </a:xfrm>
+          <a:prstGeom prst="roundRect">
+            <a:avLst>
+              <a:gd name="adj" fmla="val 5000"/>
+            </a:avLst>
+          </a:prstGeom>
+          <a:solidFill>
+            <a:srgbClr val="FFFFFF"/>
+          </a:solidFill>
+          <a:ln w="6350">
+            <a:solidFill>
+              <a:srgbClr val="E5E7EB"/>
+            </a:solidFill>
+          </a:ln>
+        </p:spPr>
+        <p:style>
+          <a:lnRef idx="1">
+            <a:schemeClr val="accent1"/>
+          </a:lnRef>
+          <a:fillRef idx="3">
+            <a:schemeClr val="accent1"/>
+          </a:fillRef>
+          <a:effectRef idx="2">
+            <a:schemeClr val="accent1"/>
+          </a:effectRef>
+          <a:fontRef idx="minor">
+            <a:schemeClr val="lt1"/>
+          </a:fontRef>
+        </p:style>
+        <p:txBody>
+          <a:bodyPr rtlCol="0" anchor="ctr"/>
+          <a:lstStyle/>
+          <a:p>
+            <a:pPr algn="ctr"/>
+          </a:p>
+        </p:txBody>
+      </p:sp>
+      <p:sp>
+        <p:nvSpPr>
+          <p:cNvPr id="38" name="Rectangle 37"/>
+          <p:cNvSpPr/>
+          <p:nvPr/>
+        </p:nvSpPr>
+        <p:spPr>
+          <a:xfrm>
+            <a:off x="8275319" y="3200400"/>
+            <a:ext cx="3703320" cy="91440"/>
+          </a:xfrm>
+          <a:prstGeom prst="rect">
+            <a:avLst/>
+          </a:prstGeom>
+          <a:solidFill>
+            <a:srgbClr val="EF4444"/>
+          </a:solidFill>
+          <a:ln>
+            <a:noFill/>
+          </a:ln>
+        </p:spPr>
+        <p:style>
+          <a:lnRef idx="1">
+            <a:schemeClr val="accent1"/>
+          </a:lnRef>
+          <a:fillRef idx="3">
+            <a:schemeClr val="accent1"/>
+          </a:fillRef>
+          <a:effectRef idx="2">
+            <a:schemeClr val="accent1"/>
+          </a:effectRef>
+          <a:fontRef idx="minor">
+            <a:schemeClr val="lt1"/>
+          </a:fontRef>
+        </p:style>
+        <p:txBody>
+          <a:bodyPr rtlCol="0" anchor="ctr"/>
+          <a:lstStyle/>
+          <a:p>
+            <a:pPr algn="ctr"/>
+          </a:p>
+        </p:txBody>
+      </p:sp>
+      <p:sp>
+        <p:nvSpPr>
+          <p:cNvPr id="39" name="Oval 38"/>
+          <p:cNvSpPr/>
+          <p:nvPr/>
+        </p:nvSpPr>
+        <p:spPr>
+          <a:xfrm>
+            <a:off x="8439911" y="3401568"/>
+            <a:ext cx="502920" cy="502920"/>
+          </a:xfrm>
+          <a:prstGeom prst="ellipse">
+            <a:avLst/>
+          </a:prstGeom>
+          <a:solidFill>
+            <a:srgbClr val="EF4444"/>
+          </a:solidFill>
+          <a:ln>
+            <a:noFill/>
+          </a:ln>
+        </p:spPr>
+        <p:style>
+          <a:lnRef idx="1">
+            <a:schemeClr val="accent1"/>
+          </a:lnRef>
+          <a:fillRef idx="3">
+            <a:schemeClr val="accent1"/>
+          </a:fillRef>
+          <a:effectRef idx="2">
+            <a:schemeClr val="accent1"/>
+          </a:effectRef>
+          <a:fontRef idx="minor">
+            <a:schemeClr val="lt1"/>
+          </a:fontRef>
+        </p:style>
+        <p:txBody>
+          <a:bodyPr rtlCol="0" anchor="ctr"/>
+          <a:lstStyle/>
+          <a:p>
+            <a:pPr algn="ctr"/>
+          </a:p>
+        </p:txBody>
+      </p:sp>
+      <p:sp>
+        <p:nvSpPr>
+          <p:cNvPr id="40" name="TextBox 39"/>
+          <p:cNvSpPr txBox="1"/>
+          <p:nvPr/>
+        </p:nvSpPr>
+        <p:spPr>
+          <a:xfrm>
+            <a:off x="8439911" y="3474720"/>
+            <a:ext cx="502920" cy="365760"/>
+          </a:xfrm>
+          <a:prstGeom prst="rect">
+            <a:avLst/>
+          </a:prstGeom>
+          <a:noFill/>
+        </p:spPr>
+        <p:txBody>
+          <a:bodyPr wrap="square">
+            <a:spAutoFit/>
+          </a:bodyPr>
+          <a:lstStyle/>
+          <a:p>
+            <a:pPr algn="ctr"/>
+            <a:r>
+              <a:rPr sz="1500" b="1" i="0">
+                <a:solidFill>
+                  <a:srgbClr val="FFFFFF"/>
+                </a:solidFill>
+                <a:latin typeface="Calibri"/>
+              </a:rPr>
+              <a:t>6</a:t>
+            </a:r>
+          </a:p>
+        </p:txBody>
+      </p:sp>
+      <p:sp>
+        <p:nvSpPr>
+          <p:cNvPr id="41" name="TextBox 40"/>
+          <p:cNvSpPr txBox="1"/>
+          <p:nvPr/>
+        </p:nvSpPr>
+        <p:spPr>
+          <a:xfrm>
+            <a:off x="9052559" y="3456432"/>
+            <a:ext cx="2834640" cy="365760"/>
+          </a:xfrm>
+          <a:prstGeom prst="rect">
+            <a:avLst/>
+          </a:prstGeom>
+          <a:noFill/>
+        </p:spPr>
+        <p:txBody>
+          <a:bodyPr wrap="square">
+            <a:spAutoFit/>
+          </a:bodyPr>
+          <a:lstStyle/>
+          <a:p>
+            <a:pPr algn="l"/>
+            <a:r>
+              <a:rPr sz="1300" b="1" i="0">
+                <a:solidFill>
+                  <a:srgbClr val="122649"/>
+                </a:solidFill>
+                <a:latin typeface="Calibri"/>
+              </a:rPr>
+              <a:t>Complaints &amp; Grievances</a:t>
+            </a:r>
+          </a:p>
+        </p:txBody>
+      </p:sp>
+      <p:sp>
+        <p:nvSpPr>
+          <p:cNvPr id="42" name="TextBox 41"/>
+          <p:cNvSpPr txBox="1"/>
+          <p:nvPr/>
+        </p:nvSpPr>
+        <p:spPr>
+          <a:xfrm>
+            <a:off x="8439911" y="3977639"/>
+            <a:ext cx="3474720" cy="777240"/>
+          </a:xfrm>
+          <a:prstGeom prst="rect">
+            <a:avLst/>
+          </a:prstGeom>
+          <a:noFill/>
+        </p:spPr>
+        <p:txBody>
+          <a:bodyPr wrap="square">
+            <a:spAutoFit/>
+          </a:bodyPr>
+          <a:lstStyle/>
+          <a:p>
+            <a:pPr algn="l"/>
+            <a:r>
+              <a:rPr sz="1050" b="0" i="0">
+                <a:solidFill>
+                  <a:srgbClr val="6B7280"/>
+                </a:solidFill>
+                <a:latin typeface="Calibri"/>
+              </a:rPr>
+              <a:t>Submit confidential complaints to HR with categories, attach evidence, and track resolution status.</a:t>
+            </a:r>
+          </a:p>
+        </p:txBody>
+      </p:sp>
+      <p:sp>
+        <p:nvSpPr>
+          <p:cNvPr id="43" name="Rounded Rectangle 42"/>
+          <p:cNvSpPr/>
+          <p:nvPr/>
+        </p:nvSpPr>
+        <p:spPr>
+          <a:xfrm>
+            <a:off x="411480" y="4892040"/>
+            <a:ext cx="3703320" cy="1554480"/>
+          </a:xfrm>
+          <a:prstGeom prst="roundRect">
+            <a:avLst>
+              <a:gd name="adj" fmla="val 5000"/>
+            </a:avLst>
+          </a:prstGeom>
+          <a:solidFill>
+            <a:srgbClr val="FFFFFF"/>
+          </a:solidFill>
+          <a:ln w="6350">
+            <a:solidFill>
+              <a:srgbClr val="E5E7EB"/>
+            </a:solidFill>
+          </a:ln>
+        </p:spPr>
+        <p:style>
+          <a:lnRef idx="1">
+            <a:schemeClr val="accent1"/>
+          </a:lnRef>
+          <a:fillRef idx="3">
+            <a:schemeClr val="accent1"/>
+          </a:fillRef>
+          <a:effectRef idx="2">
+            <a:schemeClr val="accent1"/>
+          </a:effectRef>
+          <a:fontRef idx="minor">
+            <a:schemeClr val="lt1"/>
+          </a:fontRef>
+        </p:style>
+        <p:txBody>
+          <a:bodyPr rtlCol="0" anchor="ctr"/>
+          <a:lstStyle/>
+          <a:p>
+            <a:pPr algn="ctr"/>
+          </a:p>
+        </p:txBody>
+      </p:sp>
+      <p:sp>
+        <p:nvSpPr>
+          <p:cNvPr id="44" name="Rectangle 43"/>
+          <p:cNvSpPr/>
+          <p:nvPr/>
+        </p:nvSpPr>
+        <p:spPr>
+          <a:xfrm>
+            <a:off x="411480" y="4892040"/>
+            <a:ext cx="3703320" cy="91440"/>
+          </a:xfrm>
+          <a:prstGeom prst="rect">
+            <a:avLst/>
+          </a:prstGeom>
+          <a:solidFill>
+            <a:srgbClr val="14B8A6"/>
+          </a:solidFill>
+          <a:ln>
+            <a:noFill/>
+          </a:ln>
+        </p:spPr>
+        <p:style>
+          <a:lnRef idx="1">
+            <a:schemeClr val="accent1"/>
+          </a:lnRef>
+          <a:fillRef idx="3">
+            <a:schemeClr val="accent1"/>
+          </a:fillRef>
+          <a:effectRef idx="2">
+            <a:schemeClr val="accent1"/>
+          </a:effectRef>
+          <a:fontRef idx="minor">
+            <a:schemeClr val="lt1"/>
+          </a:fontRef>
+        </p:style>
+        <p:txBody>
+          <a:bodyPr rtlCol="0" anchor="ctr"/>
+          <a:lstStyle/>
+          <a:p>
+            <a:pPr algn="ctr"/>
+          </a:p>
+        </p:txBody>
+      </p:sp>
+      <p:sp>
+        <p:nvSpPr>
+          <p:cNvPr id="45" name="Oval 44"/>
+          <p:cNvSpPr/>
+          <p:nvPr/>
+        </p:nvSpPr>
+        <p:spPr>
+          <a:xfrm>
+            <a:off x="576072" y="5093207"/>
+            <a:ext cx="502920" cy="502920"/>
+          </a:xfrm>
+          <a:prstGeom prst="ellipse">
+            <a:avLst/>
+          </a:prstGeom>
+          <a:solidFill>
+            <a:srgbClr val="14B8A6"/>
+          </a:solidFill>
+          <a:ln>
+            <a:noFill/>
+          </a:ln>
+        </p:spPr>
+        <p:style>
+          <a:lnRef idx="1">
+            <a:schemeClr val="accent1"/>
+          </a:lnRef>
+          <a:fillRef idx="3">
+            <a:schemeClr val="accent1"/>
+          </a:fillRef>
+          <a:effectRef idx="2">
+            <a:schemeClr val="accent1"/>
+          </a:effectRef>
+          <a:fontRef idx="minor">
+            <a:schemeClr val="lt1"/>
+          </a:fontRef>
+        </p:style>
+        <p:txBody>
+          <a:bodyPr rtlCol="0" anchor="ctr"/>
+          <a:lstStyle/>
+          <a:p>
+            <a:pPr algn="ctr"/>
+          </a:p>
+        </p:txBody>
+      </p:sp>
+      <p:sp>
+        <p:nvSpPr>
+          <p:cNvPr id="46" name="TextBox 45"/>
+          <p:cNvSpPr txBox="1"/>
+          <p:nvPr/>
+        </p:nvSpPr>
+        <p:spPr>
+          <a:xfrm>
+            <a:off x="576072" y="5166359"/>
+            <a:ext cx="502920" cy="365760"/>
+          </a:xfrm>
+          <a:prstGeom prst="rect">
+            <a:avLst/>
+          </a:prstGeom>
+          <a:noFill/>
+        </p:spPr>
+        <p:txBody>
+          <a:bodyPr wrap="square">
+            <a:spAutoFit/>
+          </a:bodyPr>
+          <a:lstStyle/>
+          <a:p>
+            <a:pPr algn="ctr"/>
+            <a:r>
+              <a:rPr sz="1500" b="1" i="0">
+                <a:solidFill>
+                  <a:srgbClr val="FFFFFF"/>
+                </a:solidFill>
+                <a:latin typeface="Calibri"/>
+              </a:rPr>
+              <a:t>7</a:t>
+            </a:r>
+          </a:p>
+        </p:txBody>
+      </p:sp>
+      <p:sp>
+        <p:nvSpPr>
+          <p:cNvPr id="47" name="TextBox 46"/>
+          <p:cNvSpPr txBox="1"/>
+          <p:nvPr/>
+        </p:nvSpPr>
+        <p:spPr>
+          <a:xfrm>
+            <a:off x="1188720" y="5148072"/>
+            <a:ext cx="2834640" cy="365760"/>
+          </a:xfrm>
+          <a:prstGeom prst="rect">
+            <a:avLst/>
+          </a:prstGeom>
+          <a:noFill/>
+        </p:spPr>
+        <p:txBody>
+          <a:bodyPr wrap="square">
+            <a:spAutoFit/>
+          </a:bodyPr>
+          <a:lstStyle/>
+          <a:p>
+            <a:pPr algn="l"/>
+            <a:r>
+              <a:rPr sz="1300" b="1" i="0">
+                <a:solidFill>
+                  <a:srgbClr val="122649"/>
+                </a:solidFill>
+                <a:latin typeface="Calibri"/>
+              </a:rPr>
+              <a:t>HR Forms Library</a:t>
+            </a:r>
+          </a:p>
+        </p:txBody>
+      </p:sp>
+      <p:sp>
+        <p:nvSpPr>
+          <p:cNvPr id="48" name="TextBox 47"/>
+          <p:cNvSpPr txBox="1"/>
+          <p:nvPr/>
+        </p:nvSpPr>
+        <p:spPr>
+          <a:xfrm>
+            <a:off x="576072" y="5669279"/>
+            <a:ext cx="3474720" cy="777240"/>
+          </a:xfrm>
+          <a:prstGeom prst="rect">
+            <a:avLst/>
+          </a:prstGeom>
+          <a:noFill/>
+        </p:spPr>
+        <p:txBody>
+          <a:bodyPr wrap="square">
+            <a:spAutoFit/>
+          </a:bodyPr>
+          <a:lstStyle/>
+          <a:p>
+            <a:pPr algn="l"/>
+            <a:r>
+              <a:rPr sz="1050" b="0" i="0">
+                <a:solidFill>
+                  <a:srgbClr val="6B7280"/>
+                </a:solidFill>
+                <a:latin typeface="Calibri"/>
+              </a:rPr>
+              <a:t>Access all official forms: leave, reimbursement, training, transfer requests, family addition, NOC, and more.</a:t>
+            </a:r>
+          </a:p>
+        </p:txBody>
+      </p:sp>
+      <p:sp>
+        <p:nvSpPr>
+          <p:cNvPr id="49" name="Rounded Rectangle 48"/>
+          <p:cNvSpPr/>
+          <p:nvPr/>
+        </p:nvSpPr>
+        <p:spPr>
+          <a:xfrm>
+            <a:off x="4343400" y="4892040"/>
+            <a:ext cx="3703320" cy="1554480"/>
+          </a:xfrm>
+          <a:prstGeom prst="roundRect">
+            <a:avLst>
+              <a:gd name="adj" fmla="val 5000"/>
+            </a:avLst>
+          </a:prstGeom>
+          <a:solidFill>
+            <a:srgbClr val="FFFFFF"/>
+          </a:solidFill>
+          <a:ln w="6350">
+            <a:solidFill>
+              <a:srgbClr val="E5E7EB"/>
+            </a:solidFill>
+          </a:ln>
+        </p:spPr>
+        <p:style>
+          <a:lnRef idx="1">
+            <a:schemeClr val="accent1"/>
+          </a:lnRef>
+          <a:fillRef idx="3">
+            <a:schemeClr val="accent1"/>
+          </a:fillRef>
+          <a:effectRef idx="2">
+            <a:schemeClr val="accent1"/>
+          </a:effectRef>
+          <a:fontRef idx="minor">
+            <a:schemeClr val="lt1"/>
+          </a:fontRef>
+        </p:style>
+        <p:txBody>
+          <a:bodyPr rtlCol="0" anchor="ctr"/>
+          <a:lstStyle/>
+          <a:p>
+            <a:pPr algn="ctr"/>
+          </a:p>
+        </p:txBody>
+      </p:sp>
+      <p:sp>
+        <p:nvSpPr>
+          <p:cNvPr id="50" name="Rectangle 49"/>
+          <p:cNvSpPr/>
+          <p:nvPr/>
+        </p:nvSpPr>
+        <p:spPr>
+          <a:xfrm>
+            <a:off x="4343400" y="4892040"/>
+            <a:ext cx="3703320" cy="91440"/>
+          </a:xfrm>
+          <a:prstGeom prst="rect">
+            <a:avLst/>
+          </a:prstGeom>
+          <a:solidFill>
+            <a:srgbClr val="F59E0B"/>
+          </a:solidFill>
+          <a:ln>
+            <a:noFill/>
+          </a:ln>
+        </p:spPr>
+        <p:style>
+          <a:lnRef idx="1">
+            <a:schemeClr val="accent1"/>
+          </a:lnRef>
+          <a:fillRef idx="3">
+            <a:schemeClr val="accent1"/>
+          </a:fillRef>
+          <a:effectRef idx="2">
+            <a:schemeClr val="accent1"/>
+          </a:effectRef>
+          <a:fontRef idx="minor">
+            <a:schemeClr val="lt1"/>
+          </a:fontRef>
+        </p:style>
+        <p:txBody>
+          <a:bodyPr rtlCol="0" anchor="ctr"/>
+          <a:lstStyle/>
+          <a:p>
+            <a:pPr algn="ctr"/>
+          </a:p>
+        </p:txBody>
+      </p:sp>
+      <p:sp>
+        <p:nvSpPr>
+          <p:cNvPr id="51" name="Oval 50"/>
+          <p:cNvSpPr/>
+          <p:nvPr/>
+        </p:nvSpPr>
+        <p:spPr>
+          <a:xfrm>
+            <a:off x="4507992" y="5093207"/>
+            <a:ext cx="502920" cy="502920"/>
+          </a:xfrm>
+          <a:prstGeom prst="ellipse">
+            <a:avLst/>
+          </a:prstGeom>
+          <a:solidFill>
+            <a:srgbClr val="F59E0B"/>
+          </a:solidFill>
+          <a:ln>
+            <a:noFill/>
+          </a:ln>
+        </p:spPr>
+        <p:style>
+          <a:lnRef idx="1">
+            <a:schemeClr val="accent1"/>
+          </a:lnRef>
+          <a:fillRef idx="3">
+            <a:schemeClr val="accent1"/>
+          </a:fillRef>
+          <a:effectRef idx="2">
+            <a:schemeClr val="accent1"/>
+          </a:effectRef>
+          <a:fontRef idx="minor">
+            <a:schemeClr val="lt1"/>
+          </a:fontRef>
+        </p:style>
+        <p:txBody>
+          <a:bodyPr rtlCol="0" anchor="ctr"/>
+          <a:lstStyle/>
+          <a:p>
+            <a:pPr algn="ctr"/>
+          </a:p>
+        </p:txBody>
+      </p:sp>
+      <p:sp>
+        <p:nvSpPr>
+          <p:cNvPr id="52" name="TextBox 51"/>
+          <p:cNvSpPr txBox="1"/>
+          <p:nvPr/>
+        </p:nvSpPr>
+        <p:spPr>
+          <a:xfrm>
+            <a:off x="4507992" y="5166359"/>
+            <a:ext cx="502920" cy="365760"/>
+          </a:xfrm>
+          <a:prstGeom prst="rect">
+            <a:avLst/>
+          </a:prstGeom>
+          <a:noFill/>
+        </p:spPr>
+        <p:txBody>
+          <a:bodyPr wrap="square">
+            <a:spAutoFit/>
+          </a:bodyPr>
+          <a:lstStyle/>
+          <a:p>
+            <a:pPr algn="ctr"/>
+            <a:r>
+              <a:rPr sz="1500" b="1" i="0">
+                <a:solidFill>
+                  <a:srgbClr val="FFFFFF"/>
+                </a:solidFill>
+                <a:latin typeface="Calibri"/>
+              </a:rPr>
+              <a:t>8</a:t>
+            </a:r>
+          </a:p>
+        </p:txBody>
+      </p:sp>
+      <p:sp>
+        <p:nvSpPr>
+          <p:cNvPr id="53" name="TextBox 52"/>
+          <p:cNvSpPr txBox="1"/>
+          <p:nvPr/>
+        </p:nvSpPr>
+        <p:spPr>
+          <a:xfrm>
+            <a:off x="5120640" y="5148072"/>
+            <a:ext cx="2834640" cy="365760"/>
+          </a:xfrm>
+          <a:prstGeom prst="rect">
+            <a:avLst/>
+          </a:prstGeom>
+          <a:noFill/>
+        </p:spPr>
+        <p:txBody>
+          <a:bodyPr wrap="square">
+            <a:spAutoFit/>
+          </a:bodyPr>
+          <a:lstStyle/>
+          <a:p>
+            <a:pPr algn="l"/>
+            <a:r>
+              <a:rPr sz="1300" b="1" i="0">
+                <a:solidFill>
+                  <a:srgbClr val="122649"/>
+                </a:solidFill>
+                <a:latin typeface="Calibri"/>
+              </a:rPr>
+              <a:t>Leave History</a:t>
+            </a:r>
+          </a:p>
+        </p:txBody>
+      </p:sp>
+      <p:sp>
+        <p:nvSpPr>
+          <p:cNvPr id="54" name="TextBox 53"/>
+          <p:cNvSpPr txBox="1"/>
+          <p:nvPr/>
+        </p:nvSpPr>
+        <p:spPr>
+          <a:xfrm>
+            <a:off x="4507992" y="5669279"/>
+            <a:ext cx="3474720" cy="777240"/>
+          </a:xfrm>
+          <a:prstGeom prst="rect">
+            <a:avLst/>
+          </a:prstGeom>
+          <a:noFill/>
+        </p:spPr>
+        <p:txBody>
+          <a:bodyPr wrap="square">
+            <a:spAutoFit/>
+          </a:bodyPr>
+          <a:lstStyle/>
+          <a:p>
+            <a:pPr algn="l"/>
+            <a:r>
+              <a:rPr sz="1050" b="0" i="0">
+                <a:solidFill>
+                  <a:srgbClr val="6B7280"/>
+                </a:solidFill>
+                <a:latin typeface="Calibri"/>
+              </a:rPr>
+              <a:t>Full audit trail of past leaves — dates, type, approval chain, and remarks. Filter by year or category.</a:t>
+            </a:r>
+          </a:p>
+        </p:txBody>
+      </p:sp>
+      <p:sp>
+        <p:nvSpPr>
+          <p:cNvPr id="55" name="Rounded Rectangle 54"/>
+          <p:cNvSpPr/>
+          <p:nvPr/>
+        </p:nvSpPr>
+        <p:spPr>
+          <a:xfrm>
+            <a:off x="8275319" y="4892040"/>
+            <a:ext cx="3703320" cy="1554480"/>
+          </a:xfrm>
+          <a:prstGeom prst="roundRect">
+            <a:avLst>
+              <a:gd name="adj" fmla="val 5000"/>
+            </a:avLst>
+          </a:prstGeom>
+          <a:solidFill>
+            <a:srgbClr val="FFFFFF"/>
+          </a:solidFill>
+          <a:ln w="6350">
+            <a:solidFill>
+              <a:srgbClr val="E5E7EB"/>
+            </a:solidFill>
+          </a:ln>
+        </p:spPr>
+        <p:style>
+          <a:lnRef idx="1">
+            <a:schemeClr val="accent1"/>
+          </a:lnRef>
+          <a:fillRef idx="3">
+            <a:schemeClr val="accent1"/>
+          </a:fillRef>
+          <a:effectRef idx="2">
+            <a:schemeClr val="accent1"/>
+          </a:effectRef>
+          <a:fontRef idx="minor">
+            <a:schemeClr val="lt1"/>
+          </a:fontRef>
+        </p:style>
+        <p:txBody>
+          <a:bodyPr rtlCol="0" anchor="ctr"/>
+          <a:lstStyle/>
+          <a:p>
+            <a:pPr algn="ctr"/>
+          </a:p>
+        </p:txBody>
+      </p:sp>
+      <p:sp>
+        <p:nvSpPr>
+          <p:cNvPr id="56" name="Rectangle 55"/>
+          <p:cNvSpPr/>
+          <p:nvPr/>
+        </p:nvSpPr>
+        <p:spPr>
+          <a:xfrm>
+            <a:off x="8275319" y="4892040"/>
+            <a:ext cx="3703320" cy="91440"/>
+          </a:xfrm>
+          <a:prstGeom prst="rect">
+            <a:avLst/>
+          </a:prstGeom>
+          <a:solidFill>
+            <a:srgbClr val="2A5298"/>
+          </a:solidFill>
+          <a:ln>
+            <a:noFill/>
+          </a:ln>
+        </p:spPr>
+        <p:style>
+          <a:lnRef idx="1">
+            <a:schemeClr val="accent1"/>
+          </a:lnRef>
+          <a:fillRef idx="3">
+            <a:schemeClr val="accent1"/>
+          </a:fillRef>
+          <a:effectRef idx="2">
+            <a:schemeClr val="accent1"/>
+          </a:effectRef>
+          <a:fontRef idx="minor">
+            <a:schemeClr val="lt1"/>
+          </a:fontRef>
+        </p:style>
+        <p:txBody>
+          <a:bodyPr rtlCol="0" anchor="ctr"/>
+          <a:lstStyle/>
+          <a:p>
+            <a:pPr algn="ctr"/>
+          </a:p>
+        </p:txBody>
+      </p:sp>
+      <p:sp>
+        <p:nvSpPr>
+          <p:cNvPr id="57" name="Oval 56"/>
+          <p:cNvSpPr/>
+          <p:nvPr/>
+        </p:nvSpPr>
+        <p:spPr>
+          <a:xfrm>
+            <a:off x="8439911" y="5093207"/>
+            <a:ext cx="502920" cy="502920"/>
+          </a:xfrm>
+          <a:prstGeom prst="ellipse">
+            <a:avLst/>
+          </a:prstGeom>
+          <a:solidFill>
+            <a:srgbClr val="2A5298"/>
+          </a:solidFill>
+          <a:ln>
+            <a:noFill/>
+          </a:ln>
+        </p:spPr>
+        <p:style>
+          <a:lnRef idx="1">
+            <a:schemeClr val="accent1"/>
+          </a:lnRef>
+          <a:fillRef idx="3">
+            <a:schemeClr val="accent1"/>
+          </a:fillRef>
+          <a:effectRef idx="2">
+            <a:schemeClr val="accent1"/>
+          </a:effectRef>
+          <a:fontRef idx="minor">
+            <a:schemeClr val="lt1"/>
+          </a:fontRef>
+        </p:style>
+        <p:txBody>
+          <a:bodyPr rtlCol="0" anchor="ctr"/>
+          <a:lstStyle/>
+          <a:p>
+            <a:pPr algn="ctr"/>
+          </a:p>
+        </p:txBody>
+      </p:sp>
+      <p:sp>
+        <p:nvSpPr>
+          <p:cNvPr id="58" name="TextBox 57"/>
+          <p:cNvSpPr txBox="1"/>
+          <p:nvPr/>
+        </p:nvSpPr>
+        <p:spPr>
+          <a:xfrm>
+            <a:off x="8439911" y="5166359"/>
+            <a:ext cx="502920" cy="365760"/>
+          </a:xfrm>
+          <a:prstGeom prst="rect">
+            <a:avLst/>
+          </a:prstGeom>
+          <a:noFill/>
+        </p:spPr>
+        <p:txBody>
+          <a:bodyPr wrap="square">
+            <a:spAutoFit/>
+          </a:bodyPr>
+          <a:lstStyle/>
+          <a:p>
+            <a:pPr algn="ctr"/>
+            <a:r>
+              <a:rPr sz="1500" b="1" i="0">
+                <a:solidFill>
+                  <a:srgbClr val="FFFFFF"/>
+                </a:solidFill>
+                <a:latin typeface="Calibri"/>
+              </a:rPr>
+              <a:t>9</a:t>
+            </a:r>
+          </a:p>
+        </p:txBody>
+      </p:sp>
+      <p:sp>
+        <p:nvSpPr>
+          <p:cNvPr id="59" name="TextBox 58"/>
+          <p:cNvSpPr txBox="1"/>
+          <p:nvPr/>
+        </p:nvSpPr>
+        <p:spPr>
+          <a:xfrm>
+            <a:off x="9052559" y="5148072"/>
+            <a:ext cx="2834640" cy="365760"/>
+          </a:xfrm>
+          <a:prstGeom prst="rect">
+            <a:avLst/>
+          </a:prstGeom>
+          <a:noFill/>
+        </p:spPr>
+        <p:txBody>
+          <a:bodyPr wrap="square">
+            <a:spAutoFit/>
+          </a:bodyPr>
+          <a:lstStyle/>
+          <a:p>
+            <a:pPr algn="l"/>
+            <a:r>
+              <a:rPr sz="1300" b="1" i="0">
+                <a:solidFill>
+                  <a:srgbClr val="122649"/>
+                </a:solidFill>
+                <a:latin typeface="Calibri"/>
+              </a:rPr>
+              <a:t>HR Notifications</a:t>
+            </a:r>
+          </a:p>
+        </p:txBody>
+      </p:sp>
+      <p:sp>
+        <p:nvSpPr>
+          <p:cNvPr id="60" name="TextBox 59"/>
+          <p:cNvSpPr txBox="1"/>
+          <p:nvPr/>
+        </p:nvSpPr>
+        <p:spPr>
+          <a:xfrm>
+            <a:off x="8439911" y="5669279"/>
+            <a:ext cx="3474720" cy="777240"/>
+          </a:xfrm>
+          <a:prstGeom prst="rect">
+            <a:avLst/>
+          </a:prstGeom>
+          <a:noFill/>
+        </p:spPr>
+        <p:txBody>
+          <a:bodyPr wrap="square">
+            <a:spAutoFit/>
+          </a:bodyPr>
+          <a:lstStyle/>
+          <a:p>
+            <a:pPr algn="l"/>
+            <a:r>
+              <a:rPr sz="1050" b="0" i="0">
+                <a:solidFill>
+                  <a:srgbClr val="6B7280"/>
+                </a:solidFill>
+                <a:latin typeface="Calibri"/>
+              </a:rPr>
+              <a:t>Push alerts for approvals, payslip availability, policy updates, and HR announcements.</a:t>
+            </a:r>
+          </a:p>
+        </p:txBody>
+      </p:sp>
+    </p:spTree>
+  </p:cSld>
+  <p:clrMapOvr>
+    <a:masterClrMapping/>
+  </p:clrMapOvr>
+</p:sld>
+</file>
+
+<file path=ppt/slides/slide17.xml><?xml version="1.0" encoding="utf-8"?>
+<p:sld xmlns:a="http://schemas.openxmlformats.org/drawingml/2006/main" xmlns:p="http://schemas.openxmlformats.org/presentationml/2006/main" xmlns:r="http://schemas.openxmlformats.org/officeDocument/2006/relationships">
+  <p:cSld>
+    <p:spTree>
+      <p:nvGrpSpPr>
+        <p:cNvPr id="1" name=""/>
+        <p:cNvGrpSpPr/>
+        <p:nvPr/>
+      </p:nvGrpSpPr>
+      <p:grpSpPr/>
+      <p:sp>
+        <p:nvSpPr>
+          <p:cNvPr id="2" name="Rectangle 1"/>
+          <p:cNvSpPr/>
+          <p:nvPr/>
+        </p:nvSpPr>
+        <p:spPr>
+          <a:xfrm>
+            <a:off x="0" y="0"/>
+            <a:ext cx="12188952" cy="6858000"/>
+          </a:xfrm>
+          <a:prstGeom prst="rect">
+            <a:avLst/>
+          </a:prstGeom>
+          <a:solidFill>
+            <a:srgbClr val="F5F6FA"/>
+          </a:solidFill>
+          <a:ln>
+            <a:noFill/>
+          </a:ln>
+        </p:spPr>
+        <p:style>
+          <a:lnRef idx="1">
+            <a:schemeClr val="accent1"/>
+          </a:lnRef>
+          <a:fillRef idx="3">
+            <a:schemeClr val="accent1"/>
+          </a:fillRef>
+          <a:effectRef idx="2">
+            <a:schemeClr val="accent1"/>
+          </a:effectRef>
+          <a:fontRef idx="minor">
+            <a:schemeClr val="lt1"/>
+          </a:fontRef>
+        </p:style>
+        <p:txBody>
+          <a:bodyPr rtlCol="0" anchor="ctr"/>
+          <a:lstStyle/>
+          <a:p>
+            <a:pPr algn="ctr"/>
+          </a:p>
+        </p:txBody>
+      </p:sp>
+      <p:sp>
+        <p:nvSpPr>
+          <p:cNvPr id="3" name="Rectangle 2"/>
+          <p:cNvSpPr/>
+          <p:nvPr/>
+        </p:nvSpPr>
+        <p:spPr>
+          <a:xfrm>
+            <a:off x="0" y="0"/>
+            <a:ext cx="12188952" cy="1325880"/>
+          </a:xfrm>
+          <a:prstGeom prst="rect">
+            <a:avLst/>
+          </a:prstGeom>
+          <a:solidFill>
+            <a:srgbClr val="122649"/>
+          </a:solidFill>
+          <a:ln>
+            <a:noFill/>
+          </a:ln>
+        </p:spPr>
+        <p:style>
+          <a:lnRef idx="1">
+            <a:schemeClr val="accent1"/>
+          </a:lnRef>
+          <a:fillRef idx="3">
+            <a:schemeClr val="accent1"/>
+          </a:fillRef>
+          <a:effectRef idx="2">
+            <a:schemeClr val="accent1"/>
+          </a:effectRef>
+          <a:fontRef idx="minor">
+            <a:schemeClr val="lt1"/>
+          </a:fontRef>
+        </p:style>
+        <p:txBody>
+          <a:bodyPr rtlCol="0" anchor="ctr"/>
+          <a:lstStyle/>
+          <a:p>
+            <a:pPr algn="ctr"/>
+          </a:p>
+        </p:txBody>
+      </p:sp>
+      <p:sp>
+        <p:nvSpPr>
+          <p:cNvPr id="4" name="Rectangle 3"/>
+          <p:cNvSpPr/>
+          <p:nvPr/>
+        </p:nvSpPr>
+        <p:spPr>
+          <a:xfrm>
+            <a:off x="0" y="0"/>
+            <a:ext cx="164592" cy="6858000"/>
+          </a:xfrm>
+          <a:prstGeom prst="rect">
+            <a:avLst/>
+          </a:prstGeom>
+          <a:solidFill>
+            <a:srgbClr val="C9A84C"/>
+          </a:solidFill>
+          <a:ln>
+            <a:noFill/>
+          </a:ln>
+        </p:spPr>
+        <p:style>
+          <a:lnRef idx="1">
+            <a:schemeClr val="accent1"/>
+          </a:lnRef>
+          <a:fillRef idx="3">
+            <a:schemeClr val="accent1"/>
+          </a:fillRef>
+          <a:effectRef idx="2">
+            <a:schemeClr val="accent1"/>
+          </a:effectRef>
+          <a:fontRef idx="minor">
+            <a:schemeClr val="lt1"/>
+          </a:fontRef>
+        </p:style>
+        <p:txBody>
+          <a:bodyPr rtlCol="0" anchor="ctr"/>
+          <a:lstStyle/>
+          <a:p>
+            <a:pPr algn="ctr"/>
+          </a:p>
+        </p:txBody>
+      </p:sp>
+      <p:sp>
+        <p:nvSpPr>
+          <p:cNvPr id="5" name="TextBox 4"/>
+          <p:cNvSpPr txBox="1"/>
+          <p:nvPr/>
+        </p:nvSpPr>
+        <p:spPr>
+          <a:xfrm>
+            <a:off x="411480" y="109728"/>
+            <a:ext cx="7315200" cy="292608"/>
+          </a:xfrm>
+          <a:prstGeom prst="rect">
+            <a:avLst/>
+          </a:prstGeom>
+          <a:noFill/>
+        </p:spPr>
+        <p:txBody>
+          <a:bodyPr wrap="square">
+            <a:spAutoFit/>
+          </a:bodyPr>
+          <a:lstStyle/>
+          <a:p>
+            <a:pPr algn="l"/>
+            <a:r>
+              <a:rPr sz="1000" b="1" i="0">
+                <a:solidFill>
+                  <a:srgbClr val="C9A84C"/>
+                </a:solidFill>
+                <a:latin typeface="Calibri"/>
+              </a:rPr>
+              <a:t>LEAVE APPROVAL FLOW</a:t>
+            </a:r>
+          </a:p>
+        </p:txBody>
+      </p:sp>
+      <p:sp>
+        <p:nvSpPr>
+          <p:cNvPr id="6" name="TextBox 5"/>
+          <p:cNvSpPr txBox="1"/>
+          <p:nvPr/>
+        </p:nvSpPr>
+        <p:spPr>
+          <a:xfrm>
+            <a:off x="411480" y="384048"/>
+            <a:ext cx="10058400" cy="640080"/>
+          </a:xfrm>
+          <a:prstGeom prst="rect">
+            <a:avLst/>
+          </a:prstGeom>
+          <a:noFill/>
+        </p:spPr>
+        <p:txBody>
+          <a:bodyPr wrap="square">
+            <a:spAutoFit/>
+          </a:bodyPr>
+          <a:lstStyle/>
+          <a:p>
+            <a:pPr algn="l"/>
+            <a:r>
+              <a:rPr sz="2800" b="1" i="0">
+                <a:solidFill>
+                  <a:srgbClr val="FFFFFF"/>
+                </a:solidFill>
+                <a:latin typeface="Calibri"/>
+              </a:rPr>
+              <a:t>From Request to Approval — End-to-End</a:t>
+            </a:r>
+          </a:p>
+        </p:txBody>
+      </p:sp>
+      <p:sp>
+        <p:nvSpPr>
+          <p:cNvPr id="7" name="Rounded Rectangle 6"/>
+          <p:cNvSpPr/>
+          <p:nvPr/>
+        </p:nvSpPr>
+        <p:spPr>
+          <a:xfrm>
+            <a:off x="411480" y="1508760"/>
+            <a:ext cx="3383280" cy="5074920"/>
+          </a:xfrm>
+          <a:prstGeom prst="roundRect">
+            <a:avLst>
+              <a:gd name="adj" fmla="val 5000"/>
+            </a:avLst>
+          </a:prstGeom>
+          <a:solidFill>
+            <a:srgbClr val="FFFFFF"/>
+          </a:solidFill>
+          <a:ln w="6350">
+            <a:solidFill>
+              <a:srgbClr val="E5E7EB"/>
+            </a:solidFill>
+          </a:ln>
+        </p:spPr>
+        <p:style>
+          <a:lnRef idx="1">
+            <a:schemeClr val="accent1"/>
+          </a:lnRef>
+          <a:fillRef idx="3">
+            <a:schemeClr val="accent1"/>
+          </a:fillRef>
+          <a:effectRef idx="2">
+            <a:schemeClr val="accent1"/>
+          </a:effectRef>
+          <a:fontRef idx="minor">
+            <a:schemeClr val="lt1"/>
+          </a:fontRef>
+        </p:style>
+        <p:txBody>
+          <a:bodyPr rtlCol="0" anchor="ctr"/>
+          <a:lstStyle/>
+          <a:p>
+            <a:pPr algn="ctr"/>
+          </a:p>
+        </p:txBody>
+      </p:sp>
+      <p:sp>
+        <p:nvSpPr>
+          <p:cNvPr id="8" name="Rectangle 7"/>
+          <p:cNvSpPr/>
+          <p:nvPr/>
+        </p:nvSpPr>
+        <p:spPr>
+          <a:xfrm>
+            <a:off x="411480" y="1508760"/>
+            <a:ext cx="3383280" cy="457200"/>
+          </a:xfrm>
+          <a:prstGeom prst="rect">
+            <a:avLst/>
+          </a:prstGeom>
+          <a:solidFill>
+            <a:srgbClr val="1B3A6B"/>
+          </a:solidFill>
+          <a:ln>
+            <a:noFill/>
+          </a:ln>
+        </p:spPr>
+        <p:style>
+          <a:lnRef idx="1">
+            <a:schemeClr val="accent1"/>
+          </a:lnRef>
+          <a:fillRef idx="3">
+            <a:schemeClr val="accent1"/>
+          </a:fillRef>
+          <a:effectRef idx="2">
+            <a:schemeClr val="accent1"/>
+          </a:effectRef>
+          <a:fontRef idx="minor">
+            <a:schemeClr val="lt1"/>
+          </a:fontRef>
+        </p:style>
+        <p:txBody>
+          <a:bodyPr rtlCol="0" anchor="ctr"/>
+          <a:lstStyle/>
+          <a:p>
+            <a:pPr algn="ctr"/>
+          </a:p>
+        </p:txBody>
+      </p:sp>
+      <p:sp>
+        <p:nvSpPr>
+          <p:cNvPr id="9" name="TextBox 8"/>
+          <p:cNvSpPr txBox="1"/>
+          <p:nvPr/>
+        </p:nvSpPr>
+        <p:spPr>
+          <a:xfrm>
+            <a:off x="548640" y="1591056"/>
+            <a:ext cx="3200400" cy="320040"/>
+          </a:xfrm>
+          <a:prstGeom prst="rect">
+            <a:avLst/>
+          </a:prstGeom>
+          <a:noFill/>
+        </p:spPr>
+        <p:txBody>
+          <a:bodyPr wrap="square">
+            <a:spAutoFit/>
+          </a:bodyPr>
+          <a:lstStyle/>
+          <a:p>
+            <a:pPr algn="l"/>
+            <a:r>
+              <a:rPr sz="1100" b="1" i="0">
+                <a:solidFill>
+                  <a:srgbClr val="E8C96A"/>
+                </a:solidFill>
+                <a:latin typeface="Calibri"/>
+              </a:rPr>
+              <a:t>MY LEAVE BALANCE</a:t>
+            </a:r>
+          </a:p>
+        </p:txBody>
+      </p:sp>
+      <p:sp>
+        <p:nvSpPr>
+          <p:cNvPr id="10" name="TextBox 9"/>
+          <p:cNvSpPr txBox="1"/>
+          <p:nvPr/>
+        </p:nvSpPr>
+        <p:spPr>
+          <a:xfrm>
+            <a:off x="594360" y="2121408"/>
+            <a:ext cx="3108960" cy="274320"/>
+          </a:xfrm>
+          <a:prstGeom prst="rect">
+            <a:avLst/>
+          </a:prstGeom>
+          <a:noFill/>
+        </p:spPr>
+        <p:txBody>
+          <a:bodyPr wrap="square">
+            <a:spAutoFit/>
+          </a:bodyPr>
+          <a:lstStyle/>
+          <a:p>
+            <a:pPr algn="l"/>
+            <a:r>
+              <a:rPr sz="1100" b="1" i="0">
+                <a:solidFill>
+                  <a:srgbClr val="122649"/>
+                </a:solidFill>
+                <a:latin typeface="Calibri"/>
+              </a:rPr>
+              <a:t>Annual Leave</a:t>
+            </a:r>
+          </a:p>
+        </p:txBody>
+      </p:sp>
+      <p:sp>
+        <p:nvSpPr>
+          <p:cNvPr id="11" name="TextBox 10"/>
+          <p:cNvSpPr txBox="1"/>
+          <p:nvPr/>
+        </p:nvSpPr>
+        <p:spPr>
+          <a:xfrm>
+            <a:off x="594360" y="2395727"/>
+            <a:ext cx="3108960" cy="274320"/>
+          </a:xfrm>
+          <a:prstGeom prst="rect">
+            <a:avLst/>
+          </a:prstGeom>
+          <a:noFill/>
+        </p:spPr>
+        <p:txBody>
+          <a:bodyPr wrap="square">
+            <a:spAutoFit/>
+          </a:bodyPr>
+          <a:lstStyle/>
+          <a:p>
+            <a:pPr algn="l"/>
+            <a:r>
+              <a:rPr sz="1000" b="0" i="0">
+                <a:solidFill>
+                  <a:srgbClr val="6B7280"/>
+                </a:solidFill>
+                <a:latin typeface="Calibri"/>
+              </a:rPr>
+              <a:t>12 days remaining</a:t>
+            </a:r>
+          </a:p>
+        </p:txBody>
+      </p:sp>
+      <p:sp>
+        <p:nvSpPr>
+          <p:cNvPr id="12" name="Rectangle 11"/>
+          <p:cNvSpPr/>
+          <p:nvPr/>
+        </p:nvSpPr>
+        <p:spPr>
+          <a:xfrm>
+            <a:off x="594360" y="2715768"/>
+            <a:ext cx="3108960" cy="164592"/>
+          </a:xfrm>
+          <a:prstGeom prst="rect">
+            <a:avLst/>
+          </a:prstGeom>
+          <a:solidFill>
+            <a:srgbClr val="E5E7EB"/>
+          </a:solidFill>
+          <a:ln>
+            <a:noFill/>
+          </a:ln>
+        </p:spPr>
+        <p:style>
+          <a:lnRef idx="1">
+            <a:schemeClr val="accent1"/>
+          </a:lnRef>
+          <a:fillRef idx="3">
+            <a:schemeClr val="accent1"/>
+          </a:fillRef>
+          <a:effectRef idx="2">
+            <a:schemeClr val="accent1"/>
+          </a:effectRef>
+          <a:fontRef idx="minor">
+            <a:schemeClr val="lt1"/>
+          </a:fontRef>
+        </p:style>
+        <p:txBody>
+          <a:bodyPr rtlCol="0" anchor="ctr"/>
+          <a:lstStyle/>
+          <a:p>
+            <a:pPr algn="ctr"/>
+          </a:p>
+        </p:txBody>
+      </p:sp>
+      <p:sp>
+        <p:nvSpPr>
+          <p:cNvPr id="13" name="Rectangle 12"/>
+          <p:cNvSpPr/>
+          <p:nvPr/>
+        </p:nvSpPr>
+        <p:spPr>
+          <a:xfrm>
+            <a:off x="594360" y="2715768"/>
+            <a:ext cx="1865376" cy="164592"/>
+          </a:xfrm>
+          <a:prstGeom prst="rect">
+            <a:avLst/>
+          </a:prstGeom>
+          <a:solidFill>
+            <a:srgbClr val="10B981"/>
+          </a:solidFill>
+          <a:ln>
+            <a:noFill/>
+          </a:ln>
+        </p:spPr>
+        <p:style>
+          <a:lnRef idx="1">
+            <a:schemeClr val="accent1"/>
+          </a:lnRef>
+          <a:fillRef idx="3">
+            <a:schemeClr val="accent1"/>
+          </a:fillRef>
+          <a:effectRef idx="2">
+            <a:schemeClr val="accent1"/>
+          </a:effectRef>
+          <a:fontRef idx="minor">
+            <a:schemeClr val="lt1"/>
+          </a:fontRef>
+        </p:style>
+        <p:txBody>
+          <a:bodyPr rtlCol="0" anchor="ctr"/>
+          <a:lstStyle/>
+          <a:p>
+            <a:pPr algn="ctr"/>
+          </a:p>
+        </p:txBody>
+      </p:sp>
+      <p:sp>
+        <p:nvSpPr>
+          <p:cNvPr id="14" name="TextBox 13"/>
+          <p:cNvSpPr txBox="1"/>
+          <p:nvPr/>
+        </p:nvSpPr>
+        <p:spPr>
+          <a:xfrm>
+            <a:off x="594360" y="2907791"/>
+            <a:ext cx="3108960" cy="228600"/>
+          </a:xfrm>
+          <a:prstGeom prst="rect">
+            <a:avLst/>
+          </a:prstGeom>
+          <a:noFill/>
+        </p:spPr>
+        <p:txBody>
+          <a:bodyPr wrap="square">
+            <a:spAutoFit/>
+          </a:bodyPr>
+          <a:lstStyle/>
+          <a:p>
+            <a:pPr algn="r"/>
+            <a:r>
+              <a:rPr sz="900" b="0" i="0">
+                <a:solidFill>
+                  <a:srgbClr val="9CA3AF"/>
+                </a:solidFill>
+                <a:latin typeface="Calibri"/>
+              </a:rPr>
+              <a:t>Used 18 of 30</a:t>
+            </a:r>
+          </a:p>
+        </p:txBody>
+      </p:sp>
+      <p:sp>
+        <p:nvSpPr>
+          <p:cNvPr id="15" name="TextBox 14"/>
+          <p:cNvSpPr txBox="1"/>
+          <p:nvPr/>
+        </p:nvSpPr>
+        <p:spPr>
+          <a:xfrm>
+            <a:off x="594360" y="3200400"/>
+            <a:ext cx="3108960" cy="274320"/>
+          </a:xfrm>
+          <a:prstGeom prst="rect">
+            <a:avLst/>
+          </a:prstGeom>
+          <a:noFill/>
+        </p:spPr>
+        <p:txBody>
+          <a:bodyPr wrap="square">
+            <a:spAutoFit/>
+          </a:bodyPr>
+          <a:lstStyle/>
+          <a:p>
+            <a:pPr algn="l"/>
+            <a:r>
+              <a:rPr sz="1100" b="1" i="0">
+                <a:solidFill>
+                  <a:srgbClr val="122649"/>
+                </a:solidFill>
+                <a:latin typeface="Calibri"/>
+              </a:rPr>
+              <a:t>Sick Leave</a:t>
+            </a:r>
+          </a:p>
+        </p:txBody>
+      </p:sp>
+      <p:sp>
+        <p:nvSpPr>
+          <p:cNvPr id="16" name="TextBox 15"/>
+          <p:cNvSpPr txBox="1"/>
+          <p:nvPr/>
+        </p:nvSpPr>
+        <p:spPr>
+          <a:xfrm>
+            <a:off x="594360" y="3474720"/>
+            <a:ext cx="3108960" cy="274320"/>
+          </a:xfrm>
+          <a:prstGeom prst="rect">
+            <a:avLst/>
+          </a:prstGeom>
+          <a:noFill/>
+        </p:spPr>
+        <p:txBody>
+          <a:bodyPr wrap="square">
+            <a:spAutoFit/>
+          </a:bodyPr>
+          <a:lstStyle/>
+          <a:p>
+            <a:pPr algn="l"/>
+            <a:r>
+              <a:rPr sz="1000" b="0" i="0">
+                <a:solidFill>
+                  <a:srgbClr val="6B7280"/>
+                </a:solidFill>
+                <a:latin typeface="Calibri"/>
+              </a:rPr>
+              <a:t>10 days remaining</a:t>
+            </a:r>
+          </a:p>
+        </p:txBody>
+      </p:sp>
+      <p:sp>
+        <p:nvSpPr>
+          <p:cNvPr id="17" name="Rectangle 16"/>
+          <p:cNvSpPr/>
+          <p:nvPr/>
+        </p:nvSpPr>
+        <p:spPr>
+          <a:xfrm>
+            <a:off x="594360" y="3794760"/>
+            <a:ext cx="3108960" cy="164592"/>
+          </a:xfrm>
+          <a:prstGeom prst="rect">
+            <a:avLst/>
+          </a:prstGeom>
+          <a:solidFill>
+            <a:srgbClr val="E5E7EB"/>
+          </a:solidFill>
+          <a:ln>
+            <a:noFill/>
+          </a:ln>
+        </p:spPr>
+        <p:style>
+          <a:lnRef idx="1">
+            <a:schemeClr val="accent1"/>
+          </a:lnRef>
+          <a:fillRef idx="3">
+            <a:schemeClr val="accent1"/>
+          </a:fillRef>
+          <a:effectRef idx="2">
+            <a:schemeClr val="accent1"/>
+          </a:effectRef>
+          <a:fontRef idx="minor">
+            <a:schemeClr val="lt1"/>
+          </a:fontRef>
+        </p:style>
+        <p:txBody>
+          <a:bodyPr rtlCol="0" anchor="ctr"/>
+          <a:lstStyle/>
+          <a:p>
+            <a:pPr algn="ctr"/>
+          </a:p>
+        </p:txBody>
+      </p:sp>
+      <p:sp>
+        <p:nvSpPr>
+          <p:cNvPr id="18" name="Rectangle 17"/>
+          <p:cNvSpPr/>
+          <p:nvPr/>
+        </p:nvSpPr>
+        <p:spPr>
+          <a:xfrm>
+            <a:off x="594360" y="3794760"/>
+            <a:ext cx="888274" cy="164592"/>
+          </a:xfrm>
+          <a:prstGeom prst="rect">
+            <a:avLst/>
+          </a:prstGeom>
+          <a:solidFill>
+            <a:srgbClr val="3B82F6"/>
+          </a:solidFill>
+          <a:ln>
+            <a:noFill/>
+          </a:ln>
+        </p:spPr>
+        <p:style>
+          <a:lnRef idx="1">
+            <a:schemeClr val="accent1"/>
+          </a:lnRef>
+          <a:fillRef idx="3">
+            <a:schemeClr val="accent1"/>
+          </a:fillRef>
+          <a:effectRef idx="2">
+            <a:schemeClr val="accent1"/>
+          </a:effectRef>
+          <a:fontRef idx="minor">
+            <a:schemeClr val="lt1"/>
+          </a:fontRef>
+        </p:style>
+        <p:txBody>
+          <a:bodyPr rtlCol="0" anchor="ctr"/>
+          <a:lstStyle/>
+          <a:p>
+            <a:pPr algn="ctr"/>
+          </a:p>
+        </p:txBody>
+      </p:sp>
+      <p:sp>
+        <p:nvSpPr>
+          <p:cNvPr id="19" name="TextBox 18"/>
+          <p:cNvSpPr txBox="1"/>
+          <p:nvPr/>
+        </p:nvSpPr>
+        <p:spPr>
+          <a:xfrm>
+            <a:off x="594360" y="3986784"/>
+            <a:ext cx="3108960" cy="228600"/>
+          </a:xfrm>
+          <a:prstGeom prst="rect">
+            <a:avLst/>
+          </a:prstGeom>
+          <a:noFill/>
+        </p:spPr>
+        <p:txBody>
+          <a:bodyPr wrap="square">
+            <a:spAutoFit/>
+          </a:bodyPr>
+          <a:lstStyle/>
+          <a:p>
+            <a:pPr algn="r"/>
+            <a:r>
+              <a:rPr sz="900" b="0" i="0">
+                <a:solidFill>
+                  <a:srgbClr val="9CA3AF"/>
+                </a:solidFill>
+                <a:latin typeface="Calibri"/>
+              </a:rPr>
+              <a:t>Used 4 of 14</a:t>
+            </a:r>
+          </a:p>
+        </p:txBody>
+      </p:sp>
+      <p:sp>
+        <p:nvSpPr>
+          <p:cNvPr id="20" name="TextBox 19"/>
+          <p:cNvSpPr txBox="1"/>
+          <p:nvPr/>
+        </p:nvSpPr>
+        <p:spPr>
+          <a:xfrm>
+            <a:off x="594360" y="4279392"/>
+            <a:ext cx="3108960" cy="274320"/>
+          </a:xfrm>
+          <a:prstGeom prst="rect">
+            <a:avLst/>
+          </a:prstGeom>
+          <a:noFill/>
+        </p:spPr>
+        <p:txBody>
+          <a:bodyPr wrap="square">
+            <a:spAutoFit/>
+          </a:bodyPr>
+          <a:lstStyle/>
+          <a:p>
+            <a:pPr algn="l"/>
+            <a:r>
+              <a:rPr sz="1100" b="1" i="0">
+                <a:solidFill>
+                  <a:srgbClr val="122649"/>
+                </a:solidFill>
+                <a:latin typeface="Calibri"/>
+              </a:rPr>
+              <a:t>Casual Leave</a:t>
+            </a:r>
+          </a:p>
+        </p:txBody>
+      </p:sp>
+      <p:sp>
+        <p:nvSpPr>
+          <p:cNvPr id="21" name="TextBox 20"/>
+          <p:cNvSpPr txBox="1"/>
+          <p:nvPr/>
+        </p:nvSpPr>
+        <p:spPr>
+          <a:xfrm>
+            <a:off x="594360" y="4553712"/>
+            <a:ext cx="3108960" cy="274320"/>
+          </a:xfrm>
+          <a:prstGeom prst="rect">
+            <a:avLst/>
+          </a:prstGeom>
+          <a:noFill/>
+        </p:spPr>
+        <p:txBody>
+          <a:bodyPr wrap="square">
+            <a:spAutoFit/>
+          </a:bodyPr>
+          <a:lstStyle/>
+          <a:p>
+            <a:pPr algn="l"/>
+            <a:r>
+              <a:rPr sz="1000" b="0" i="0">
+                <a:solidFill>
+                  <a:srgbClr val="6B7280"/>
+                </a:solidFill>
+                <a:latin typeface="Calibri"/>
+              </a:rPr>
+              <a:t>5 days remaining</a:t>
+            </a:r>
+          </a:p>
+        </p:txBody>
+      </p:sp>
+      <p:sp>
+        <p:nvSpPr>
+          <p:cNvPr id="22" name="Rectangle 21"/>
+          <p:cNvSpPr/>
+          <p:nvPr/>
+        </p:nvSpPr>
+        <p:spPr>
+          <a:xfrm>
+            <a:off x="594360" y="4873752"/>
+            <a:ext cx="3108960" cy="164592"/>
+          </a:xfrm>
+          <a:prstGeom prst="rect">
+            <a:avLst/>
+          </a:prstGeom>
+          <a:solidFill>
+            <a:srgbClr val="E5E7EB"/>
+          </a:solidFill>
+          <a:ln>
+            <a:noFill/>
+          </a:ln>
+        </p:spPr>
+        <p:style>
+          <a:lnRef idx="1">
+            <a:schemeClr val="accent1"/>
+          </a:lnRef>
+          <a:fillRef idx="3">
+            <a:schemeClr val="accent1"/>
+          </a:fillRef>
+          <a:effectRef idx="2">
+            <a:schemeClr val="accent1"/>
+          </a:effectRef>
+          <a:fontRef idx="minor">
+            <a:schemeClr val="lt1"/>
+          </a:fontRef>
+        </p:style>
+        <p:txBody>
+          <a:bodyPr rtlCol="0" anchor="ctr"/>
+          <a:lstStyle/>
+          <a:p>
+            <a:pPr algn="ctr"/>
+          </a:p>
+        </p:txBody>
+      </p:sp>
+      <p:sp>
+        <p:nvSpPr>
+          <p:cNvPr id="23" name="Rectangle 22"/>
+          <p:cNvSpPr/>
+          <p:nvPr/>
+        </p:nvSpPr>
+        <p:spPr>
+          <a:xfrm>
+            <a:off x="594360" y="4873752"/>
+            <a:ext cx="888274" cy="164592"/>
+          </a:xfrm>
+          <a:prstGeom prst="rect">
+            <a:avLst/>
+          </a:prstGeom>
+          <a:solidFill>
+            <a:srgbClr val="C9A84C"/>
+          </a:solidFill>
+          <a:ln>
+            <a:noFill/>
+          </a:ln>
+        </p:spPr>
+        <p:style>
+          <a:lnRef idx="1">
+            <a:schemeClr val="accent1"/>
+          </a:lnRef>
+          <a:fillRef idx="3">
+            <a:schemeClr val="accent1"/>
+          </a:fillRef>
+          <a:effectRef idx="2">
+            <a:schemeClr val="accent1"/>
+          </a:effectRef>
+          <a:fontRef idx="minor">
+            <a:schemeClr val="lt1"/>
+          </a:fontRef>
+        </p:style>
+        <p:txBody>
+          <a:bodyPr rtlCol="0" anchor="ctr"/>
+          <a:lstStyle/>
+          <a:p>
+            <a:pPr algn="ctr"/>
+          </a:p>
+        </p:txBody>
+      </p:sp>
+      <p:sp>
+        <p:nvSpPr>
+          <p:cNvPr id="24" name="TextBox 23"/>
+          <p:cNvSpPr txBox="1"/>
+          <p:nvPr/>
+        </p:nvSpPr>
+        <p:spPr>
+          <a:xfrm>
+            <a:off x="594360" y="5065776"/>
+            <a:ext cx="3108960" cy="228600"/>
+          </a:xfrm>
+          <a:prstGeom prst="rect">
+            <a:avLst/>
+          </a:prstGeom>
+          <a:noFill/>
+        </p:spPr>
+        <p:txBody>
+          <a:bodyPr wrap="square">
+            <a:spAutoFit/>
+          </a:bodyPr>
+          <a:lstStyle/>
+          <a:p>
+            <a:pPr algn="r"/>
+            <a:r>
+              <a:rPr sz="900" b="0" i="0">
+                <a:solidFill>
+                  <a:srgbClr val="9CA3AF"/>
+                </a:solidFill>
+                <a:latin typeface="Calibri"/>
+              </a:rPr>
+              <a:t>Used 2 of 7</a:t>
+            </a:r>
+          </a:p>
+        </p:txBody>
+      </p:sp>
+      <p:sp>
+        <p:nvSpPr>
+          <p:cNvPr id="25" name="TextBox 24"/>
+          <p:cNvSpPr txBox="1"/>
+          <p:nvPr/>
+        </p:nvSpPr>
+        <p:spPr>
+          <a:xfrm>
+            <a:off x="594360" y="5358383"/>
+            <a:ext cx="3108960" cy="274320"/>
+          </a:xfrm>
+          <a:prstGeom prst="rect">
+            <a:avLst/>
+          </a:prstGeom>
+          <a:noFill/>
+        </p:spPr>
+        <p:txBody>
+          <a:bodyPr wrap="square">
+            <a:spAutoFit/>
+          </a:bodyPr>
+          <a:lstStyle/>
+          <a:p>
+            <a:pPr algn="l"/>
+            <a:r>
+              <a:rPr sz="1100" b="1" i="0">
+                <a:solidFill>
+                  <a:srgbClr val="122649"/>
+                </a:solidFill>
+                <a:latin typeface="Calibri"/>
+              </a:rPr>
+              <a:t>Emergency</a:t>
+            </a:r>
+          </a:p>
+        </p:txBody>
+      </p:sp>
+      <p:sp>
+        <p:nvSpPr>
+          <p:cNvPr id="26" name="TextBox 25"/>
+          <p:cNvSpPr txBox="1"/>
+          <p:nvPr/>
+        </p:nvSpPr>
+        <p:spPr>
+          <a:xfrm>
+            <a:off x="594360" y="5632703"/>
+            <a:ext cx="3108960" cy="274320"/>
+          </a:xfrm>
+          <a:prstGeom prst="rect">
+            <a:avLst/>
+          </a:prstGeom>
+          <a:noFill/>
+        </p:spPr>
+        <p:txBody>
+          <a:bodyPr wrap="square">
+            <a:spAutoFit/>
+          </a:bodyPr>
+          <a:lstStyle/>
+          <a:p>
+            <a:pPr algn="l"/>
+            <a:r>
+              <a:rPr sz="1000" b="0" i="0">
+                <a:solidFill>
+                  <a:srgbClr val="6B7280"/>
+                </a:solidFill>
+                <a:latin typeface="Calibri"/>
+              </a:rPr>
+              <a:t>2 days remaining</a:t>
+            </a:r>
+          </a:p>
+        </p:txBody>
+      </p:sp>
+      <p:sp>
+        <p:nvSpPr>
+          <p:cNvPr id="27" name="Rectangle 26"/>
+          <p:cNvSpPr/>
+          <p:nvPr/>
+        </p:nvSpPr>
+        <p:spPr>
+          <a:xfrm>
+            <a:off x="594360" y="5952744"/>
+            <a:ext cx="3108960" cy="164592"/>
+          </a:xfrm>
+          <a:prstGeom prst="rect">
+            <a:avLst/>
+          </a:prstGeom>
+          <a:solidFill>
+            <a:srgbClr val="E5E7EB"/>
+          </a:solidFill>
+          <a:ln>
+            <a:noFill/>
+          </a:ln>
+        </p:spPr>
+        <p:style>
+          <a:lnRef idx="1">
+            <a:schemeClr val="accent1"/>
+          </a:lnRef>
+          <a:fillRef idx="3">
+            <a:schemeClr val="accent1"/>
+          </a:fillRef>
+          <a:effectRef idx="2">
+            <a:schemeClr val="accent1"/>
+          </a:effectRef>
+          <a:fontRef idx="minor">
+            <a:schemeClr val="lt1"/>
+          </a:fontRef>
+        </p:style>
+        <p:txBody>
+          <a:bodyPr rtlCol="0" anchor="ctr"/>
+          <a:lstStyle/>
+          <a:p>
+            <a:pPr algn="ctr"/>
+          </a:p>
+        </p:txBody>
+      </p:sp>
+      <p:sp>
+        <p:nvSpPr>
+          <p:cNvPr id="28" name="Rectangle 27"/>
+          <p:cNvSpPr/>
+          <p:nvPr/>
+        </p:nvSpPr>
+        <p:spPr>
+          <a:xfrm>
+            <a:off x="594360" y="5952744"/>
+            <a:ext cx="1036320" cy="164592"/>
+          </a:xfrm>
+          <a:prstGeom prst="rect">
+            <a:avLst/>
+          </a:prstGeom>
+          <a:solidFill>
+            <a:srgbClr val="EF4444"/>
+          </a:solidFill>
+          <a:ln>
+            <a:noFill/>
+          </a:ln>
+        </p:spPr>
+        <p:style>
+          <a:lnRef idx="1">
+            <a:schemeClr val="accent1"/>
+          </a:lnRef>
+          <a:fillRef idx="3">
+            <a:schemeClr val="accent1"/>
+          </a:fillRef>
+          <a:effectRef idx="2">
+            <a:schemeClr val="accent1"/>
+          </a:effectRef>
+          <a:fontRef idx="minor">
+            <a:schemeClr val="lt1"/>
+          </a:fontRef>
+        </p:style>
+        <p:txBody>
+          <a:bodyPr rtlCol="0" anchor="ctr"/>
+          <a:lstStyle/>
+          <a:p>
+            <a:pPr algn="ctr"/>
+          </a:p>
+        </p:txBody>
+      </p:sp>
+      <p:sp>
+        <p:nvSpPr>
+          <p:cNvPr id="29" name="TextBox 28"/>
+          <p:cNvSpPr txBox="1"/>
+          <p:nvPr/>
+        </p:nvSpPr>
+        <p:spPr>
+          <a:xfrm>
+            <a:off x="594360" y="6144768"/>
+            <a:ext cx="3108960" cy="228600"/>
+          </a:xfrm>
+          <a:prstGeom prst="rect">
+            <a:avLst/>
+          </a:prstGeom>
+          <a:noFill/>
+        </p:spPr>
+        <p:txBody>
+          <a:bodyPr wrap="square">
+            <a:spAutoFit/>
+          </a:bodyPr>
+          <a:lstStyle/>
+          <a:p>
+            <a:pPr algn="r"/>
+            <a:r>
+              <a:rPr sz="900" b="0" i="0">
+                <a:solidFill>
+                  <a:srgbClr val="9CA3AF"/>
+                </a:solidFill>
+                <a:latin typeface="Calibri"/>
+              </a:rPr>
+              <a:t>Used 1 of 3</a:t>
+            </a:r>
+          </a:p>
+        </p:txBody>
+      </p:sp>
+      <p:sp>
+        <p:nvSpPr>
+          <p:cNvPr id="30" name="Rectangle 29"/>
+          <p:cNvSpPr/>
+          <p:nvPr/>
+        </p:nvSpPr>
+        <p:spPr>
+          <a:xfrm>
+            <a:off x="594360" y="6126480"/>
+            <a:ext cx="3017520" cy="365760"/>
+          </a:xfrm>
+          <a:prstGeom prst="rect">
+            <a:avLst/>
+          </a:prstGeom>
+          <a:solidFill>
+            <a:srgbClr val="C9A84C"/>
+          </a:solidFill>
+          <a:ln>
+            <a:noFill/>
+          </a:ln>
+        </p:spPr>
+        <p:style>
+          <a:lnRef idx="1">
+            <a:schemeClr val="accent1"/>
+          </a:lnRef>
+          <a:fillRef idx="3">
+            <a:schemeClr val="accent1"/>
+          </a:fillRef>
+          <a:effectRef idx="2">
+            <a:schemeClr val="accent1"/>
+          </a:effectRef>
+          <a:fontRef idx="minor">
+            <a:schemeClr val="lt1"/>
+          </a:fontRef>
+        </p:style>
+        <p:txBody>
+          <a:bodyPr rtlCol="0" anchor="ctr"/>
+          <a:lstStyle/>
+          <a:p>
+            <a:pPr algn="ctr"/>
+          </a:p>
+        </p:txBody>
+      </p:sp>
+      <p:sp>
+        <p:nvSpPr>
+          <p:cNvPr id="31" name="TextBox 30"/>
+          <p:cNvSpPr txBox="1"/>
+          <p:nvPr/>
+        </p:nvSpPr>
+        <p:spPr>
+          <a:xfrm>
+            <a:off x="594360" y="6163056"/>
+            <a:ext cx="3017520" cy="292608"/>
+          </a:xfrm>
+          <a:prstGeom prst="rect">
+            <a:avLst/>
+          </a:prstGeom>
+          <a:noFill/>
+        </p:spPr>
+        <p:txBody>
+          <a:bodyPr wrap="square">
+            <a:spAutoFit/>
+          </a:bodyPr>
+          <a:lstStyle/>
+          <a:p>
+            <a:pPr algn="ctr"/>
+            <a:r>
+              <a:rPr sz="1100" b="1" i="0">
+                <a:solidFill>
+                  <a:srgbClr val="122649"/>
+                </a:solidFill>
+                <a:latin typeface="Calibri"/>
+              </a:rPr>
+              <a:t>+ Apply for Leave</a:t>
+            </a:r>
+          </a:p>
+        </p:txBody>
+      </p:sp>
+      <p:sp>
+        <p:nvSpPr>
+          <p:cNvPr id="32" name="Rounded Rectangle 31"/>
+          <p:cNvSpPr/>
+          <p:nvPr/>
+        </p:nvSpPr>
+        <p:spPr>
+          <a:xfrm>
+            <a:off x="3977639" y="1508760"/>
+            <a:ext cx="7863840" cy="896112"/>
+          </a:xfrm>
+          <a:prstGeom prst="roundRect">
+            <a:avLst>
+              <a:gd name="adj" fmla="val 5000"/>
+            </a:avLst>
+          </a:prstGeom>
+          <a:solidFill>
+            <a:srgbClr val="FFFFFF"/>
+          </a:solidFill>
+          <a:ln w="6350">
+            <a:solidFill>
+              <a:srgbClr val="E5E7EB"/>
+            </a:solidFill>
+          </a:ln>
+        </p:spPr>
+        <p:style>
+          <a:lnRef idx="1">
+            <a:schemeClr val="accent1"/>
+          </a:lnRef>
+          <a:fillRef idx="3">
+            <a:schemeClr val="accent1"/>
+          </a:fillRef>
+          <a:effectRef idx="2">
+            <a:schemeClr val="accent1"/>
+          </a:effectRef>
+          <a:fontRef idx="minor">
+            <a:schemeClr val="lt1"/>
+          </a:fontRef>
+        </p:style>
+        <p:txBody>
+          <a:bodyPr rtlCol="0" anchor="ctr"/>
+          <a:lstStyle/>
+          <a:p>
+            <a:pPr algn="ctr"/>
+          </a:p>
+        </p:txBody>
+      </p:sp>
+      <p:sp>
+        <p:nvSpPr>
+          <p:cNvPr id="33" name="Oval 32"/>
+          <p:cNvSpPr/>
+          <p:nvPr/>
+        </p:nvSpPr>
+        <p:spPr>
+          <a:xfrm>
+            <a:off x="4069080" y="1673351"/>
+            <a:ext cx="566928" cy="566928"/>
+          </a:xfrm>
+          <a:prstGeom prst="ellipse">
+            <a:avLst/>
+          </a:prstGeom>
+          <a:solidFill>
+            <a:srgbClr val="1B3A6B"/>
+          </a:solidFill>
+          <a:ln>
+            <a:noFill/>
+          </a:ln>
+        </p:spPr>
+        <p:style>
+          <a:lnRef idx="1">
+            <a:schemeClr val="accent1"/>
+          </a:lnRef>
+          <a:fillRef idx="3">
+            <a:schemeClr val="accent1"/>
+          </a:fillRef>
+          <a:effectRef idx="2">
+            <a:schemeClr val="accent1"/>
+          </a:effectRef>
+          <a:fontRef idx="minor">
+            <a:schemeClr val="lt1"/>
+          </a:fontRef>
+        </p:style>
+        <p:txBody>
+          <a:bodyPr rtlCol="0" anchor="ctr"/>
+          <a:lstStyle/>
+          <a:p>
+            <a:pPr algn="ctr"/>
+          </a:p>
+        </p:txBody>
+      </p:sp>
+      <p:sp>
+        <p:nvSpPr>
+          <p:cNvPr id="34" name="TextBox 33"/>
+          <p:cNvSpPr txBox="1"/>
+          <p:nvPr/>
+        </p:nvSpPr>
+        <p:spPr>
+          <a:xfrm>
+            <a:off x="4069080" y="1764792"/>
+            <a:ext cx="566928" cy="411480"/>
+          </a:xfrm>
+          <a:prstGeom prst="rect">
+            <a:avLst/>
+          </a:prstGeom>
+          <a:noFill/>
+        </p:spPr>
+        <p:txBody>
+          <a:bodyPr wrap="square">
+            <a:spAutoFit/>
+          </a:bodyPr>
+          <a:lstStyle/>
+          <a:p>
+            <a:pPr algn="ctr"/>
+            <a:r>
+              <a:rPr sz="1400" b="1" i="0">
+                <a:solidFill>
+                  <a:srgbClr val="C9A84C"/>
+                </a:solidFill>
+                <a:latin typeface="Calibri"/>
+              </a:rPr>
+              <a:t>01</a:t>
+            </a:r>
+          </a:p>
+        </p:txBody>
+      </p:sp>
+      <p:sp>
+        <p:nvSpPr>
+          <p:cNvPr id="35" name="TextBox 34"/>
+          <p:cNvSpPr txBox="1"/>
+          <p:nvPr/>
+        </p:nvSpPr>
+        <p:spPr>
+          <a:xfrm>
+            <a:off x="4754880" y="1581912"/>
+            <a:ext cx="5029200" cy="347472"/>
+          </a:xfrm>
+          <a:prstGeom prst="rect">
+            <a:avLst/>
+          </a:prstGeom>
+          <a:noFill/>
+        </p:spPr>
+        <p:txBody>
+          <a:bodyPr wrap="square">
+            <a:spAutoFit/>
+          </a:bodyPr>
+          <a:lstStyle/>
+          <a:p>
+            <a:pPr algn="l"/>
+            <a:r>
+              <a:rPr sz="1300" b="1" i="0">
+                <a:solidFill>
+                  <a:srgbClr val="122649"/>
+                </a:solidFill>
+                <a:latin typeface="Calibri"/>
+              </a:rPr>
+              <a:t>Employee Submits Request</a:t>
+            </a:r>
+          </a:p>
+        </p:txBody>
+      </p:sp>
+      <p:sp>
+        <p:nvSpPr>
+          <p:cNvPr id="36" name="TextBox 35"/>
+          <p:cNvSpPr txBox="1"/>
+          <p:nvPr/>
+        </p:nvSpPr>
+        <p:spPr>
+          <a:xfrm>
+            <a:off x="4754880" y="1929384"/>
+            <a:ext cx="6858000" cy="457200"/>
+          </a:xfrm>
+          <a:prstGeom prst="rect">
+            <a:avLst/>
+          </a:prstGeom>
+          <a:noFill/>
+        </p:spPr>
+        <p:txBody>
+          <a:bodyPr wrap="square">
+            <a:spAutoFit/>
+          </a:bodyPr>
+          <a:lstStyle/>
+          <a:p>
+            <a:pPr algn="l"/>
+            <a:r>
+              <a:rPr sz="1000" b="0" i="0">
+                <a:solidFill>
+                  <a:srgbClr val="6B7280"/>
+                </a:solidFill>
+                <a:latin typeface="Calibri"/>
+              </a:rPr>
+              <a:t>Choose leave type, date range, attach reason. App auto-calculates days deducted and warns of overlapping balance.</a:t>
+            </a:r>
+          </a:p>
+        </p:txBody>
+      </p:sp>
+      <p:sp>
+        <p:nvSpPr>
+          <p:cNvPr id="37" name="Rounded Rectangle 36"/>
+          <p:cNvSpPr/>
+          <p:nvPr/>
+        </p:nvSpPr>
+        <p:spPr>
+          <a:xfrm>
+            <a:off x="10469880" y="1801368"/>
+            <a:ext cx="1280160" cy="310896"/>
+          </a:xfrm>
+          <a:prstGeom prst="roundRect">
+            <a:avLst/>
+          </a:prstGeom>
+          <a:solidFill>
+            <a:srgbClr val="10B981"/>
+          </a:solidFill>
+          <a:ln>
+            <a:noFill/>
+          </a:ln>
+        </p:spPr>
+        <p:style>
+          <a:lnRef idx="1">
+            <a:schemeClr val="accent1"/>
+          </a:lnRef>
+          <a:fillRef idx="3">
+            <a:schemeClr val="accent1"/>
+          </a:fillRef>
+          <a:effectRef idx="2">
+            <a:schemeClr val="accent1"/>
+          </a:effectRef>
+          <a:fontRef idx="minor">
+            <a:schemeClr val="lt1"/>
+          </a:fontRef>
+        </p:style>
+        <p:txBody>
+          <a:bodyPr rtlCol="0" anchor="ctr"/>
+          <a:lstStyle/>
+          <a:p>
+            <a:pPr algn="ctr"/>
+          </a:p>
+        </p:txBody>
+      </p:sp>
+      <p:sp>
+        <p:nvSpPr>
+          <p:cNvPr id="38" name="TextBox 37"/>
+          <p:cNvSpPr txBox="1"/>
+          <p:nvPr/>
+        </p:nvSpPr>
+        <p:spPr>
+          <a:xfrm>
+            <a:off x="10469880" y="1819656"/>
+            <a:ext cx="1280160" cy="292608"/>
+          </a:xfrm>
+          <a:prstGeom prst="rect">
+            <a:avLst/>
+          </a:prstGeom>
+          <a:noFill/>
+        </p:spPr>
+        <p:txBody>
+          <a:bodyPr wrap="square">
+            <a:spAutoFit/>
+          </a:bodyPr>
+          <a:lstStyle/>
+          <a:p>
+            <a:pPr algn="ctr"/>
+            <a:r>
+              <a:rPr sz="1000" b="1" i="0">
+                <a:solidFill>
+                  <a:srgbClr val="FFFFFF"/>
+                </a:solidFill>
+                <a:latin typeface="Calibri"/>
+              </a:rPr>
+              <a:t>Submitted</a:t>
+            </a:r>
+          </a:p>
+        </p:txBody>
+      </p:sp>
+      <p:sp>
+        <p:nvSpPr>
+          <p:cNvPr id="39" name="Rectangle 38"/>
+          <p:cNvSpPr/>
+          <p:nvPr/>
+        </p:nvSpPr>
+        <p:spPr>
+          <a:xfrm>
+            <a:off x="4297680" y="2414015"/>
+            <a:ext cx="91440" cy="128016"/>
+          </a:xfrm>
+          <a:prstGeom prst="rect">
+            <a:avLst/>
+          </a:prstGeom>
+          <a:solidFill>
+            <a:srgbClr val="C9A84C"/>
+          </a:solidFill>
+          <a:ln>
+            <a:noFill/>
+          </a:ln>
+        </p:spPr>
+        <p:style>
+          <a:lnRef idx="1">
+            <a:schemeClr val="accent1"/>
+          </a:lnRef>
+          <a:fillRef idx="3">
+            <a:schemeClr val="accent1"/>
+          </a:fillRef>
+          <a:effectRef idx="2">
+            <a:schemeClr val="accent1"/>
+          </a:effectRef>
+          <a:fontRef idx="minor">
+            <a:schemeClr val="lt1"/>
+          </a:fontRef>
+        </p:style>
+        <p:txBody>
+          <a:bodyPr rtlCol="0" anchor="ctr"/>
+          <a:lstStyle/>
+          <a:p>
+            <a:pPr algn="ctr"/>
+          </a:p>
+        </p:txBody>
+      </p:sp>
+      <p:sp>
+        <p:nvSpPr>
+          <p:cNvPr id="40" name="Rounded Rectangle 39"/>
+          <p:cNvSpPr/>
+          <p:nvPr/>
+        </p:nvSpPr>
+        <p:spPr>
+          <a:xfrm>
+            <a:off x="3977639" y="2542032"/>
+            <a:ext cx="7863840" cy="896112"/>
+          </a:xfrm>
+          <a:prstGeom prst="roundRect">
+            <a:avLst>
+              <a:gd name="adj" fmla="val 5000"/>
+            </a:avLst>
+          </a:prstGeom>
+          <a:solidFill>
+            <a:srgbClr val="FFFFFF"/>
+          </a:solidFill>
+          <a:ln w="6350">
+            <a:solidFill>
+              <a:srgbClr val="E5E7EB"/>
+            </a:solidFill>
+          </a:ln>
+        </p:spPr>
+        <p:style>
+          <a:lnRef idx="1">
+            <a:schemeClr val="accent1"/>
+          </a:lnRef>
+          <a:fillRef idx="3">
+            <a:schemeClr val="accent1"/>
+          </a:fillRef>
+          <a:effectRef idx="2">
+            <a:schemeClr val="accent1"/>
+          </a:effectRef>
+          <a:fontRef idx="minor">
+            <a:schemeClr val="lt1"/>
+          </a:fontRef>
+        </p:style>
+        <p:txBody>
+          <a:bodyPr rtlCol="0" anchor="ctr"/>
+          <a:lstStyle/>
+          <a:p>
+            <a:pPr algn="ctr"/>
+          </a:p>
+        </p:txBody>
+      </p:sp>
+      <p:sp>
+        <p:nvSpPr>
+          <p:cNvPr id="41" name="Oval 40"/>
+          <p:cNvSpPr/>
+          <p:nvPr/>
+        </p:nvSpPr>
+        <p:spPr>
+          <a:xfrm>
+            <a:off x="4069080" y="2706624"/>
+            <a:ext cx="566928" cy="566928"/>
+          </a:xfrm>
+          <a:prstGeom prst="ellipse">
+            <a:avLst/>
+          </a:prstGeom>
+          <a:solidFill>
+            <a:srgbClr val="2A5298"/>
+          </a:solidFill>
+          <a:ln>
+            <a:noFill/>
+          </a:ln>
+        </p:spPr>
+        <p:style>
+          <a:lnRef idx="1">
+            <a:schemeClr val="accent1"/>
+          </a:lnRef>
+          <a:fillRef idx="3">
+            <a:schemeClr val="accent1"/>
+          </a:fillRef>
+          <a:effectRef idx="2">
+            <a:schemeClr val="accent1"/>
+          </a:effectRef>
+          <a:fontRef idx="minor">
+            <a:schemeClr val="lt1"/>
+          </a:fontRef>
+        </p:style>
+        <p:txBody>
+          <a:bodyPr rtlCol="0" anchor="ctr"/>
+          <a:lstStyle/>
+          <a:p>
+            <a:pPr algn="ctr"/>
+          </a:p>
+        </p:txBody>
+      </p:sp>
+      <p:sp>
+        <p:nvSpPr>
+          <p:cNvPr id="42" name="TextBox 41"/>
+          <p:cNvSpPr txBox="1"/>
+          <p:nvPr/>
+        </p:nvSpPr>
+        <p:spPr>
+          <a:xfrm>
+            <a:off x="4069080" y="2798063"/>
+            <a:ext cx="566928" cy="411480"/>
+          </a:xfrm>
+          <a:prstGeom prst="rect">
+            <a:avLst/>
+          </a:prstGeom>
+          <a:noFill/>
+        </p:spPr>
+        <p:txBody>
+          <a:bodyPr wrap="square">
+            <a:spAutoFit/>
+          </a:bodyPr>
+          <a:lstStyle/>
+          <a:p>
+            <a:pPr algn="ctr"/>
+            <a:r>
+              <a:rPr sz="1400" b="1" i="0">
+                <a:solidFill>
+                  <a:srgbClr val="C9A84C"/>
+                </a:solidFill>
+                <a:latin typeface="Calibri"/>
+              </a:rPr>
+              <a:t>02</a:t>
+            </a:r>
+          </a:p>
+        </p:txBody>
+      </p:sp>
+      <p:sp>
+        <p:nvSpPr>
+          <p:cNvPr id="43" name="TextBox 42"/>
+          <p:cNvSpPr txBox="1"/>
+          <p:nvPr/>
+        </p:nvSpPr>
+        <p:spPr>
+          <a:xfrm>
+            <a:off x="4754880" y="2615184"/>
+            <a:ext cx="5029200" cy="347472"/>
+          </a:xfrm>
+          <a:prstGeom prst="rect">
+            <a:avLst/>
+          </a:prstGeom>
+          <a:noFill/>
+        </p:spPr>
+        <p:txBody>
+          <a:bodyPr wrap="square">
+            <a:spAutoFit/>
+          </a:bodyPr>
+          <a:lstStyle/>
+          <a:p>
+            <a:pPr algn="l"/>
+            <a:r>
+              <a:rPr sz="1300" b="1" i="0">
+                <a:solidFill>
+                  <a:srgbClr val="122649"/>
+                </a:solidFill>
+                <a:latin typeface="Calibri"/>
+              </a:rPr>
+              <a:t>Direct Manager Review</a:t>
+            </a:r>
+          </a:p>
+        </p:txBody>
+      </p:sp>
+      <p:sp>
+        <p:nvSpPr>
+          <p:cNvPr id="44" name="TextBox 43"/>
+          <p:cNvSpPr txBox="1"/>
+          <p:nvPr/>
+        </p:nvSpPr>
+        <p:spPr>
+          <a:xfrm>
+            <a:off x="4754880" y="2962656"/>
+            <a:ext cx="6858000" cy="457200"/>
+          </a:xfrm>
+          <a:prstGeom prst="rect">
+            <a:avLst/>
+          </a:prstGeom>
+          <a:noFill/>
+        </p:spPr>
+        <p:txBody>
+          <a:bodyPr wrap="square">
+            <a:spAutoFit/>
+          </a:bodyPr>
+          <a:lstStyle/>
+          <a:p>
+            <a:pPr algn="l"/>
+            <a:r>
+              <a:rPr sz="1000" b="0" i="0">
+                <a:solidFill>
+                  <a:srgbClr val="6B7280"/>
+                </a:solidFill>
+                <a:latin typeface="Calibri"/>
+              </a:rPr>
+              <a:t>Real-time push notification to line manager. Manager approves, rejects, or requests clarification — all in-app.</a:t>
+            </a:r>
+          </a:p>
+        </p:txBody>
+      </p:sp>
+      <p:sp>
+        <p:nvSpPr>
+          <p:cNvPr id="45" name="Rounded Rectangle 44"/>
+          <p:cNvSpPr/>
+          <p:nvPr/>
+        </p:nvSpPr>
+        <p:spPr>
+          <a:xfrm>
+            <a:off x="10469880" y="2834639"/>
+            <a:ext cx="1280160" cy="310896"/>
+          </a:xfrm>
+          <a:prstGeom prst="roundRect">
+            <a:avLst/>
+          </a:prstGeom>
+          <a:solidFill>
+            <a:srgbClr val="10B981"/>
+          </a:solidFill>
+          <a:ln>
+            <a:noFill/>
+          </a:ln>
+        </p:spPr>
+        <p:style>
+          <a:lnRef idx="1">
+            <a:schemeClr val="accent1"/>
+          </a:lnRef>
+          <a:fillRef idx="3">
+            <a:schemeClr val="accent1"/>
+          </a:fillRef>
+          <a:effectRef idx="2">
+            <a:schemeClr val="accent1"/>
+          </a:effectRef>
+          <a:fontRef idx="minor">
+            <a:schemeClr val="lt1"/>
+          </a:fontRef>
+        </p:style>
+        <p:txBody>
+          <a:bodyPr rtlCol="0" anchor="ctr"/>
+          <a:lstStyle/>
+          <a:p>
+            <a:pPr algn="ctr"/>
+          </a:p>
+        </p:txBody>
+      </p:sp>
+      <p:sp>
+        <p:nvSpPr>
+          <p:cNvPr id="46" name="TextBox 45"/>
+          <p:cNvSpPr txBox="1"/>
+          <p:nvPr/>
+        </p:nvSpPr>
+        <p:spPr>
+          <a:xfrm>
+            <a:off x="10469880" y="2852927"/>
+            <a:ext cx="1280160" cy="292608"/>
+          </a:xfrm>
+          <a:prstGeom prst="rect">
+            <a:avLst/>
+          </a:prstGeom>
+          <a:noFill/>
+        </p:spPr>
+        <p:txBody>
+          <a:bodyPr wrap="square">
+            <a:spAutoFit/>
+          </a:bodyPr>
+          <a:lstStyle/>
+          <a:p>
+            <a:pPr algn="ctr"/>
+            <a:r>
+              <a:rPr sz="1000" b="1" i="0">
+                <a:solidFill>
+                  <a:srgbClr val="FFFFFF"/>
+                </a:solidFill>
+                <a:latin typeface="Calibri"/>
+              </a:rPr>
+              <a:t>Approved</a:t>
+            </a:r>
+          </a:p>
+        </p:txBody>
+      </p:sp>
+      <p:sp>
+        <p:nvSpPr>
+          <p:cNvPr id="47" name="Rectangle 46"/>
+          <p:cNvSpPr/>
+          <p:nvPr/>
+        </p:nvSpPr>
+        <p:spPr>
+          <a:xfrm>
+            <a:off x="4297680" y="3447287"/>
+            <a:ext cx="91440" cy="128016"/>
+          </a:xfrm>
+          <a:prstGeom prst="rect">
+            <a:avLst/>
+          </a:prstGeom>
+          <a:solidFill>
+            <a:srgbClr val="C9A84C"/>
+          </a:solidFill>
+          <a:ln>
+            <a:noFill/>
+          </a:ln>
+        </p:spPr>
+        <p:style>
+          <a:lnRef idx="1">
+            <a:schemeClr val="accent1"/>
+          </a:lnRef>
+          <a:fillRef idx="3">
+            <a:schemeClr val="accent1"/>
+          </a:fillRef>
+          <a:effectRef idx="2">
+            <a:schemeClr val="accent1"/>
+          </a:effectRef>
+          <a:fontRef idx="minor">
+            <a:schemeClr val="lt1"/>
+          </a:fontRef>
+        </p:style>
+        <p:txBody>
+          <a:bodyPr rtlCol="0" anchor="ctr"/>
+          <a:lstStyle/>
+          <a:p>
+            <a:pPr algn="ctr"/>
+          </a:p>
+        </p:txBody>
+      </p:sp>
+      <p:sp>
+        <p:nvSpPr>
+          <p:cNvPr id="48" name="Rounded Rectangle 47"/>
+          <p:cNvSpPr/>
+          <p:nvPr/>
+        </p:nvSpPr>
+        <p:spPr>
+          <a:xfrm>
+            <a:off x="3977639" y="3575303"/>
+            <a:ext cx="7863840" cy="896112"/>
+          </a:xfrm>
+          <a:prstGeom prst="roundRect">
+            <a:avLst>
+              <a:gd name="adj" fmla="val 5000"/>
+            </a:avLst>
+          </a:prstGeom>
+          <a:solidFill>
+            <a:srgbClr val="FFFFFF"/>
+          </a:solidFill>
+          <a:ln w="6350">
+            <a:solidFill>
+              <a:srgbClr val="E5E7EB"/>
+            </a:solidFill>
+          </a:ln>
+        </p:spPr>
+        <p:style>
+          <a:lnRef idx="1">
+            <a:schemeClr val="accent1"/>
+          </a:lnRef>
+          <a:fillRef idx="3">
+            <a:schemeClr val="accent1"/>
+          </a:fillRef>
+          <a:effectRef idx="2">
+            <a:schemeClr val="accent1"/>
+          </a:effectRef>
+          <a:fontRef idx="minor">
+            <a:schemeClr val="lt1"/>
+          </a:fontRef>
+        </p:style>
+        <p:txBody>
+          <a:bodyPr rtlCol="0" anchor="ctr"/>
+          <a:lstStyle/>
+          <a:p>
+            <a:pPr algn="ctr"/>
+          </a:p>
+        </p:txBody>
+      </p:sp>
+      <p:sp>
+        <p:nvSpPr>
+          <p:cNvPr id="49" name="Oval 48"/>
+          <p:cNvSpPr/>
+          <p:nvPr/>
+        </p:nvSpPr>
+        <p:spPr>
+          <a:xfrm>
+            <a:off x="4069080" y="3739896"/>
+            <a:ext cx="566928" cy="566928"/>
+          </a:xfrm>
+          <a:prstGeom prst="ellipse">
+            <a:avLst/>
+          </a:prstGeom>
+          <a:solidFill>
+            <a:srgbClr val="C9A84C"/>
+          </a:solidFill>
+          <a:ln>
+            <a:noFill/>
+          </a:ln>
+        </p:spPr>
+        <p:style>
+          <a:lnRef idx="1">
+            <a:schemeClr val="accent1"/>
+          </a:lnRef>
+          <a:fillRef idx="3">
+            <a:schemeClr val="accent1"/>
+          </a:fillRef>
+          <a:effectRef idx="2">
+            <a:schemeClr val="accent1"/>
+          </a:effectRef>
+          <a:fontRef idx="minor">
+            <a:schemeClr val="lt1"/>
+          </a:fontRef>
+        </p:style>
+        <p:txBody>
+          <a:bodyPr rtlCol="0" anchor="ctr"/>
+          <a:lstStyle/>
+          <a:p>
+            <a:pPr algn="ctr"/>
+          </a:p>
+        </p:txBody>
+      </p:sp>
+      <p:sp>
+        <p:nvSpPr>
+          <p:cNvPr id="50" name="TextBox 49"/>
+          <p:cNvSpPr txBox="1"/>
+          <p:nvPr/>
+        </p:nvSpPr>
+        <p:spPr>
+          <a:xfrm>
+            <a:off x="4069080" y="3831335"/>
+            <a:ext cx="566928" cy="411480"/>
+          </a:xfrm>
+          <a:prstGeom prst="rect">
+            <a:avLst/>
+          </a:prstGeom>
+          <a:noFill/>
+        </p:spPr>
+        <p:txBody>
+          <a:bodyPr wrap="square">
+            <a:spAutoFit/>
+          </a:bodyPr>
+          <a:lstStyle/>
+          <a:p>
+            <a:pPr algn="ctr"/>
+            <a:r>
+              <a:rPr sz="1400" b="1" i="0">
+                <a:solidFill>
+                  <a:srgbClr val="C9A84C"/>
+                </a:solidFill>
+                <a:latin typeface="Calibri"/>
+              </a:rPr>
+              <a:t>03</a:t>
+            </a:r>
+          </a:p>
+        </p:txBody>
+      </p:sp>
+      <p:sp>
+        <p:nvSpPr>
+          <p:cNvPr id="51" name="TextBox 50"/>
+          <p:cNvSpPr txBox="1"/>
+          <p:nvPr/>
+        </p:nvSpPr>
+        <p:spPr>
+          <a:xfrm>
+            <a:off x="4754880" y="3648456"/>
+            <a:ext cx="5029200" cy="347472"/>
+          </a:xfrm>
+          <a:prstGeom prst="rect">
+            <a:avLst/>
+          </a:prstGeom>
+          <a:noFill/>
+        </p:spPr>
+        <p:txBody>
+          <a:bodyPr wrap="square">
+            <a:spAutoFit/>
+          </a:bodyPr>
+          <a:lstStyle/>
+          <a:p>
+            <a:pPr algn="l"/>
+            <a:r>
+              <a:rPr sz="1300" b="1" i="0">
+                <a:solidFill>
+                  <a:srgbClr val="122649"/>
+                </a:solidFill>
+                <a:latin typeface="Calibri"/>
+              </a:rPr>
+              <a:t>Department Head Approval</a:t>
+            </a:r>
+          </a:p>
+        </p:txBody>
+      </p:sp>
+      <p:sp>
+        <p:nvSpPr>
+          <p:cNvPr id="52" name="TextBox 51"/>
+          <p:cNvSpPr txBox="1"/>
+          <p:nvPr/>
+        </p:nvSpPr>
+        <p:spPr>
+          <a:xfrm>
+            <a:off x="4754880" y="3995928"/>
+            <a:ext cx="6858000" cy="457200"/>
+          </a:xfrm>
+          <a:prstGeom prst="rect">
+            <a:avLst/>
+          </a:prstGeom>
+          <a:noFill/>
+        </p:spPr>
+        <p:txBody>
+          <a:bodyPr wrap="square">
+            <a:spAutoFit/>
+          </a:bodyPr>
+          <a:lstStyle/>
+          <a:p>
+            <a:pPr algn="l"/>
+            <a:r>
+              <a:rPr sz="1000" b="0" i="0">
+                <a:solidFill>
+                  <a:srgbClr val="6B7280"/>
+                </a:solidFill>
+                <a:latin typeface="Calibri"/>
+              </a:rPr>
+              <a:t>For leaves &gt; 5 days, escalated to Department Head with full team-coverage context shown.</a:t>
+            </a:r>
+          </a:p>
+        </p:txBody>
+      </p:sp>
+      <p:sp>
+        <p:nvSpPr>
+          <p:cNvPr id="53" name="Rounded Rectangle 52"/>
+          <p:cNvSpPr/>
+          <p:nvPr/>
+        </p:nvSpPr>
+        <p:spPr>
+          <a:xfrm>
+            <a:off x="10469880" y="3867911"/>
+            <a:ext cx="1280160" cy="310896"/>
+          </a:xfrm>
+          <a:prstGeom prst="roundRect">
+            <a:avLst/>
+          </a:prstGeom>
+          <a:solidFill>
+            <a:srgbClr val="10B981"/>
+          </a:solidFill>
+          <a:ln>
+            <a:noFill/>
+          </a:ln>
+        </p:spPr>
+        <p:style>
+          <a:lnRef idx="1">
+            <a:schemeClr val="accent1"/>
+          </a:lnRef>
+          <a:fillRef idx="3">
+            <a:schemeClr val="accent1"/>
+          </a:fillRef>
+          <a:effectRef idx="2">
+            <a:schemeClr val="accent1"/>
+          </a:effectRef>
+          <a:fontRef idx="minor">
+            <a:schemeClr val="lt1"/>
+          </a:fontRef>
+        </p:style>
+        <p:txBody>
+          <a:bodyPr rtlCol="0" anchor="ctr"/>
+          <a:lstStyle/>
+          <a:p>
+            <a:pPr algn="ctr"/>
+          </a:p>
+        </p:txBody>
+      </p:sp>
+      <p:sp>
+        <p:nvSpPr>
+          <p:cNvPr id="54" name="TextBox 53"/>
+          <p:cNvSpPr txBox="1"/>
+          <p:nvPr/>
+        </p:nvSpPr>
+        <p:spPr>
+          <a:xfrm>
+            <a:off x="10469880" y="3886200"/>
+            <a:ext cx="1280160" cy="292608"/>
+          </a:xfrm>
+          <a:prstGeom prst="rect">
+            <a:avLst/>
+          </a:prstGeom>
+          <a:noFill/>
+        </p:spPr>
+        <p:txBody>
+          <a:bodyPr wrap="square">
+            <a:spAutoFit/>
+          </a:bodyPr>
+          <a:lstStyle/>
+          <a:p>
+            <a:pPr algn="ctr"/>
+            <a:r>
+              <a:rPr sz="1000" b="1" i="0">
+                <a:solidFill>
+                  <a:srgbClr val="FFFFFF"/>
+                </a:solidFill>
+                <a:latin typeface="Calibri"/>
+              </a:rPr>
+              <a:t>Approved</a:t>
+            </a:r>
+          </a:p>
+        </p:txBody>
+      </p:sp>
+      <p:sp>
+        <p:nvSpPr>
+          <p:cNvPr id="55" name="Rectangle 54"/>
+          <p:cNvSpPr/>
+          <p:nvPr/>
+        </p:nvSpPr>
+        <p:spPr>
+          <a:xfrm>
+            <a:off x="4297680" y="4480559"/>
+            <a:ext cx="91440" cy="128016"/>
+          </a:xfrm>
+          <a:prstGeom prst="rect">
+            <a:avLst/>
+          </a:prstGeom>
+          <a:solidFill>
+            <a:srgbClr val="C9A84C"/>
+          </a:solidFill>
+          <a:ln>
+            <a:noFill/>
+          </a:ln>
+        </p:spPr>
+        <p:style>
+          <a:lnRef idx="1">
+            <a:schemeClr val="accent1"/>
+          </a:lnRef>
+          <a:fillRef idx="3">
+            <a:schemeClr val="accent1"/>
+          </a:fillRef>
+          <a:effectRef idx="2">
+            <a:schemeClr val="accent1"/>
+          </a:effectRef>
+          <a:fontRef idx="minor">
+            <a:schemeClr val="lt1"/>
+          </a:fontRef>
+        </p:style>
+        <p:txBody>
+          <a:bodyPr rtlCol="0" anchor="ctr"/>
+          <a:lstStyle/>
+          <a:p>
+            <a:pPr algn="ctr"/>
+          </a:p>
+        </p:txBody>
+      </p:sp>
+      <p:sp>
+        <p:nvSpPr>
+          <p:cNvPr id="56" name="Rounded Rectangle 55"/>
+          <p:cNvSpPr/>
+          <p:nvPr/>
+        </p:nvSpPr>
+        <p:spPr>
+          <a:xfrm>
+            <a:off x="3977639" y="4608575"/>
+            <a:ext cx="7863840" cy="896112"/>
+          </a:xfrm>
+          <a:prstGeom prst="roundRect">
+            <a:avLst>
+              <a:gd name="adj" fmla="val 5000"/>
+            </a:avLst>
+          </a:prstGeom>
+          <a:solidFill>
+            <a:srgbClr val="FFFFFF"/>
+          </a:solidFill>
+          <a:ln w="6350">
+            <a:solidFill>
+              <a:srgbClr val="E5E7EB"/>
+            </a:solidFill>
+          </a:ln>
+        </p:spPr>
+        <p:style>
+          <a:lnRef idx="1">
+            <a:schemeClr val="accent1"/>
+          </a:lnRef>
+          <a:fillRef idx="3">
+            <a:schemeClr val="accent1"/>
+          </a:fillRef>
+          <a:effectRef idx="2">
+            <a:schemeClr val="accent1"/>
+          </a:effectRef>
+          <a:fontRef idx="minor">
+            <a:schemeClr val="lt1"/>
+          </a:fontRef>
+        </p:style>
+        <p:txBody>
+          <a:bodyPr rtlCol="0" anchor="ctr"/>
+          <a:lstStyle/>
+          <a:p>
+            <a:pPr algn="ctr"/>
+          </a:p>
+        </p:txBody>
+      </p:sp>
+      <p:sp>
+        <p:nvSpPr>
+          <p:cNvPr id="57" name="Oval 56"/>
+          <p:cNvSpPr/>
+          <p:nvPr/>
+        </p:nvSpPr>
+        <p:spPr>
+          <a:xfrm>
+            <a:off x="4069080" y="4773167"/>
+            <a:ext cx="566928" cy="566928"/>
+          </a:xfrm>
+          <a:prstGeom prst="ellipse">
+            <a:avLst/>
+          </a:prstGeom>
+          <a:solidFill>
+            <a:srgbClr val="1B3A6B"/>
+          </a:solidFill>
+          <a:ln>
+            <a:noFill/>
+          </a:ln>
+        </p:spPr>
+        <p:style>
+          <a:lnRef idx="1">
+            <a:schemeClr val="accent1"/>
+          </a:lnRef>
+          <a:fillRef idx="3">
+            <a:schemeClr val="accent1"/>
+          </a:fillRef>
+          <a:effectRef idx="2">
+            <a:schemeClr val="accent1"/>
+          </a:effectRef>
+          <a:fontRef idx="minor">
+            <a:schemeClr val="lt1"/>
+          </a:fontRef>
+        </p:style>
+        <p:txBody>
+          <a:bodyPr rtlCol="0" anchor="ctr"/>
+          <a:lstStyle/>
+          <a:p>
+            <a:pPr algn="ctr"/>
+          </a:p>
+        </p:txBody>
+      </p:sp>
+      <p:sp>
+        <p:nvSpPr>
+          <p:cNvPr id="58" name="TextBox 57"/>
+          <p:cNvSpPr txBox="1"/>
+          <p:nvPr/>
+        </p:nvSpPr>
+        <p:spPr>
+          <a:xfrm>
+            <a:off x="4069080" y="4864607"/>
+            <a:ext cx="566928" cy="411480"/>
+          </a:xfrm>
+          <a:prstGeom prst="rect">
+            <a:avLst/>
+          </a:prstGeom>
+          <a:noFill/>
+        </p:spPr>
+        <p:txBody>
+          <a:bodyPr wrap="square">
+            <a:spAutoFit/>
+          </a:bodyPr>
+          <a:lstStyle/>
+          <a:p>
+            <a:pPr algn="ctr"/>
+            <a:r>
+              <a:rPr sz="1400" b="1" i="0">
+                <a:solidFill>
+                  <a:srgbClr val="C9A84C"/>
+                </a:solidFill>
+                <a:latin typeface="Calibri"/>
+              </a:rPr>
+              <a:t>04</a:t>
+            </a:r>
+          </a:p>
+        </p:txBody>
+      </p:sp>
+      <p:sp>
+        <p:nvSpPr>
+          <p:cNvPr id="59" name="TextBox 58"/>
+          <p:cNvSpPr txBox="1"/>
+          <p:nvPr/>
+        </p:nvSpPr>
+        <p:spPr>
+          <a:xfrm>
+            <a:off x="4754880" y="4681727"/>
+            <a:ext cx="5029200" cy="347472"/>
+          </a:xfrm>
+          <a:prstGeom prst="rect">
+            <a:avLst/>
+          </a:prstGeom>
+          <a:noFill/>
+        </p:spPr>
+        <p:txBody>
+          <a:bodyPr wrap="square">
+            <a:spAutoFit/>
+          </a:bodyPr>
+          <a:lstStyle/>
+          <a:p>
+            <a:pPr algn="l"/>
+            <a:r>
+              <a:rPr sz="1300" b="1" i="0">
+                <a:solidFill>
+                  <a:srgbClr val="122649"/>
+                </a:solidFill>
+                <a:latin typeface="Calibri"/>
+              </a:rPr>
+              <a:t>HR Final Sign-Off</a:t>
+            </a:r>
+          </a:p>
+        </p:txBody>
+      </p:sp>
+      <p:sp>
+        <p:nvSpPr>
+          <p:cNvPr id="60" name="TextBox 59"/>
+          <p:cNvSpPr txBox="1"/>
+          <p:nvPr/>
+        </p:nvSpPr>
+        <p:spPr>
+          <a:xfrm>
+            <a:off x="4754880" y="5029199"/>
+            <a:ext cx="6858000" cy="457200"/>
+          </a:xfrm>
+          <a:prstGeom prst="rect">
+            <a:avLst/>
+          </a:prstGeom>
+          <a:noFill/>
+        </p:spPr>
+        <p:txBody>
+          <a:bodyPr wrap="square">
+            <a:spAutoFit/>
+          </a:bodyPr>
+          <a:lstStyle/>
+          <a:p>
+            <a:pPr algn="l"/>
+            <a:r>
+              <a:rPr sz="1000" b="0" i="0">
+                <a:solidFill>
+                  <a:srgbClr val="6B7280"/>
+                </a:solidFill>
+                <a:latin typeface="Calibri"/>
+              </a:rPr>
+              <a:t>HR validates balance, updates leave records, and triggers calendar block. Confirmation sent to employee.</a:t>
+            </a:r>
+          </a:p>
+        </p:txBody>
+      </p:sp>
+      <p:sp>
+        <p:nvSpPr>
+          <p:cNvPr id="61" name="Rounded Rectangle 60"/>
+          <p:cNvSpPr/>
+          <p:nvPr/>
+        </p:nvSpPr>
+        <p:spPr>
+          <a:xfrm>
+            <a:off x="10469880" y="4901183"/>
+            <a:ext cx="1280160" cy="310896"/>
+          </a:xfrm>
+          <a:prstGeom prst="roundRect">
+            <a:avLst/>
+          </a:prstGeom>
+          <a:solidFill>
+            <a:srgbClr val="C9A84C"/>
+          </a:solidFill>
+          <a:ln>
+            <a:noFill/>
+          </a:ln>
+        </p:spPr>
+        <p:style>
+          <a:lnRef idx="1">
+            <a:schemeClr val="accent1"/>
+          </a:lnRef>
+          <a:fillRef idx="3">
+            <a:schemeClr val="accent1"/>
+          </a:fillRef>
+          <a:effectRef idx="2">
+            <a:schemeClr val="accent1"/>
+          </a:effectRef>
+          <a:fontRef idx="minor">
+            <a:schemeClr val="lt1"/>
+          </a:fontRef>
+        </p:style>
+        <p:txBody>
+          <a:bodyPr rtlCol="0" anchor="ctr"/>
+          <a:lstStyle/>
+          <a:p>
+            <a:pPr algn="ctr"/>
+          </a:p>
+        </p:txBody>
+      </p:sp>
+      <p:sp>
+        <p:nvSpPr>
+          <p:cNvPr id="62" name="TextBox 61"/>
+          <p:cNvSpPr txBox="1"/>
+          <p:nvPr/>
+        </p:nvSpPr>
+        <p:spPr>
+          <a:xfrm>
+            <a:off x="10469880" y="4919471"/>
+            <a:ext cx="1280160" cy="292608"/>
+          </a:xfrm>
+          <a:prstGeom prst="rect">
+            <a:avLst/>
+          </a:prstGeom>
+          <a:noFill/>
+        </p:spPr>
+        <p:txBody>
+          <a:bodyPr wrap="square">
+            <a:spAutoFit/>
+          </a:bodyPr>
+          <a:lstStyle/>
+          <a:p>
+            <a:pPr algn="ctr"/>
+            <a:r>
+              <a:rPr sz="1000" b="1" i="0">
+                <a:solidFill>
+                  <a:srgbClr val="FFFFFF"/>
+                </a:solidFill>
+                <a:latin typeface="Calibri"/>
+              </a:rPr>
+              <a:t>Pending</a:t>
+            </a:r>
+          </a:p>
+        </p:txBody>
+      </p:sp>
+      <p:sp>
+        <p:nvSpPr>
+          <p:cNvPr id="63" name="Rectangle 62"/>
+          <p:cNvSpPr/>
+          <p:nvPr/>
+        </p:nvSpPr>
+        <p:spPr>
+          <a:xfrm>
+            <a:off x="4297680" y="5513831"/>
+            <a:ext cx="91440" cy="128016"/>
+          </a:xfrm>
+          <a:prstGeom prst="rect">
+            <a:avLst/>
+          </a:prstGeom>
+          <a:solidFill>
+            <a:srgbClr val="C9A84C"/>
+          </a:solidFill>
+          <a:ln>
+            <a:noFill/>
+          </a:ln>
+        </p:spPr>
+        <p:style>
+          <a:lnRef idx="1">
+            <a:schemeClr val="accent1"/>
+          </a:lnRef>
+          <a:fillRef idx="3">
+            <a:schemeClr val="accent1"/>
+          </a:fillRef>
+          <a:effectRef idx="2">
+            <a:schemeClr val="accent1"/>
+          </a:effectRef>
+          <a:fontRef idx="minor">
+            <a:schemeClr val="lt1"/>
+          </a:fontRef>
+        </p:style>
+        <p:txBody>
+          <a:bodyPr rtlCol="0" anchor="ctr"/>
+          <a:lstStyle/>
+          <a:p>
+            <a:pPr algn="ctr"/>
+          </a:p>
+        </p:txBody>
+      </p:sp>
+      <p:sp>
+        <p:nvSpPr>
+          <p:cNvPr id="64" name="Rounded Rectangle 63"/>
+          <p:cNvSpPr/>
+          <p:nvPr/>
+        </p:nvSpPr>
+        <p:spPr>
+          <a:xfrm>
+            <a:off x="3977639" y="5641848"/>
+            <a:ext cx="7863840" cy="896112"/>
+          </a:xfrm>
+          <a:prstGeom prst="roundRect">
+            <a:avLst>
+              <a:gd name="adj" fmla="val 5000"/>
+            </a:avLst>
+          </a:prstGeom>
+          <a:solidFill>
+            <a:srgbClr val="FFFFFF"/>
+          </a:solidFill>
+          <a:ln w="6350">
+            <a:solidFill>
+              <a:srgbClr val="E5E7EB"/>
+            </a:solidFill>
+          </a:ln>
+        </p:spPr>
+        <p:style>
+          <a:lnRef idx="1">
+            <a:schemeClr val="accent1"/>
+          </a:lnRef>
+          <a:fillRef idx="3">
+            <a:schemeClr val="accent1"/>
+          </a:fillRef>
+          <a:effectRef idx="2">
+            <a:schemeClr val="accent1"/>
+          </a:effectRef>
+          <a:fontRef idx="minor">
+            <a:schemeClr val="lt1"/>
+          </a:fontRef>
+        </p:style>
+        <p:txBody>
+          <a:bodyPr rtlCol="0" anchor="ctr"/>
+          <a:lstStyle/>
+          <a:p>
+            <a:pPr algn="ctr"/>
+          </a:p>
+        </p:txBody>
+      </p:sp>
+      <p:sp>
+        <p:nvSpPr>
+          <p:cNvPr id="65" name="Oval 64"/>
+          <p:cNvSpPr/>
+          <p:nvPr/>
+        </p:nvSpPr>
+        <p:spPr>
+          <a:xfrm>
+            <a:off x="4069080" y="5806440"/>
+            <a:ext cx="566928" cy="566928"/>
+          </a:xfrm>
+          <a:prstGeom prst="ellipse">
+            <a:avLst/>
+          </a:prstGeom>
+          <a:solidFill>
+            <a:srgbClr val="7C3AED"/>
+          </a:solidFill>
+          <a:ln>
+            <a:noFill/>
+          </a:ln>
+        </p:spPr>
+        <p:style>
+          <a:lnRef idx="1">
+            <a:schemeClr val="accent1"/>
+          </a:lnRef>
+          <a:fillRef idx="3">
+            <a:schemeClr val="accent1"/>
+          </a:fillRef>
+          <a:effectRef idx="2">
+            <a:schemeClr val="accent1"/>
+          </a:effectRef>
+          <a:fontRef idx="minor">
+            <a:schemeClr val="lt1"/>
+          </a:fontRef>
+        </p:style>
+        <p:txBody>
+          <a:bodyPr rtlCol="0" anchor="ctr"/>
+          <a:lstStyle/>
+          <a:p>
+            <a:pPr algn="ctr"/>
+          </a:p>
+        </p:txBody>
+      </p:sp>
+      <p:sp>
+        <p:nvSpPr>
+          <p:cNvPr id="66" name="TextBox 65"/>
+          <p:cNvSpPr txBox="1"/>
+          <p:nvPr/>
+        </p:nvSpPr>
+        <p:spPr>
+          <a:xfrm>
+            <a:off x="4069080" y="5897880"/>
+            <a:ext cx="566928" cy="411480"/>
+          </a:xfrm>
+          <a:prstGeom prst="rect">
+            <a:avLst/>
+          </a:prstGeom>
+          <a:noFill/>
+        </p:spPr>
+        <p:txBody>
+          <a:bodyPr wrap="square">
+            <a:spAutoFit/>
+          </a:bodyPr>
+          <a:lstStyle/>
+          <a:p>
+            <a:pPr algn="ctr"/>
+            <a:r>
+              <a:rPr sz="1400" b="1" i="0">
+                <a:solidFill>
+                  <a:srgbClr val="C9A84C"/>
+                </a:solidFill>
+                <a:latin typeface="Calibri"/>
+              </a:rPr>
+              <a:t>05</a:t>
+            </a:r>
+          </a:p>
+        </p:txBody>
+      </p:sp>
+      <p:sp>
+        <p:nvSpPr>
+          <p:cNvPr id="67" name="TextBox 66"/>
+          <p:cNvSpPr txBox="1"/>
+          <p:nvPr/>
+        </p:nvSpPr>
+        <p:spPr>
+          <a:xfrm>
+            <a:off x="4754880" y="5715000"/>
+            <a:ext cx="5029200" cy="347472"/>
+          </a:xfrm>
+          <a:prstGeom prst="rect">
+            <a:avLst/>
+          </a:prstGeom>
+          <a:noFill/>
+        </p:spPr>
+        <p:txBody>
+          <a:bodyPr wrap="square">
+            <a:spAutoFit/>
+          </a:bodyPr>
+          <a:lstStyle/>
+          <a:p>
+            <a:pPr algn="l"/>
+            <a:r>
+              <a:rPr sz="1300" b="1" i="0">
+                <a:solidFill>
+                  <a:srgbClr val="122649"/>
+                </a:solidFill>
+                <a:latin typeface="Calibri"/>
+              </a:rPr>
+              <a:t>Status &amp; Audit Trail</a:t>
+            </a:r>
+          </a:p>
+        </p:txBody>
+      </p:sp>
+      <p:sp>
+        <p:nvSpPr>
+          <p:cNvPr id="68" name="TextBox 67"/>
+          <p:cNvSpPr txBox="1"/>
+          <p:nvPr/>
+        </p:nvSpPr>
+        <p:spPr>
+          <a:xfrm>
+            <a:off x="4754880" y="6062472"/>
+            <a:ext cx="6858000" cy="457200"/>
+          </a:xfrm>
+          <a:prstGeom prst="rect">
+            <a:avLst/>
+          </a:prstGeom>
+          <a:noFill/>
+        </p:spPr>
+        <p:txBody>
+          <a:bodyPr wrap="square">
+            <a:spAutoFit/>
+          </a:bodyPr>
+          <a:lstStyle/>
+          <a:p>
+            <a:pPr algn="l"/>
+            <a:r>
+              <a:rPr sz="1000" b="0" i="0">
+                <a:solidFill>
+                  <a:srgbClr val="6B7280"/>
+                </a:solidFill>
+                <a:latin typeface="Calibri"/>
+              </a:rPr>
+              <a:t>Employee sees live status: Pending to Approved to Confirmed. Full audit trail preserved for compliance.</a:t>
+            </a:r>
+          </a:p>
+        </p:txBody>
+      </p:sp>
+      <p:sp>
+        <p:nvSpPr>
+          <p:cNvPr id="69" name="Rounded Rectangle 68"/>
+          <p:cNvSpPr/>
+          <p:nvPr/>
+        </p:nvSpPr>
+        <p:spPr>
+          <a:xfrm>
+            <a:off x="10469880" y="5934456"/>
+            <a:ext cx="1280160" cy="310896"/>
+          </a:xfrm>
+          <a:prstGeom prst="roundRect">
+            <a:avLst/>
+          </a:prstGeom>
+          <a:solidFill>
+            <a:srgbClr val="E5E7EB"/>
+          </a:solidFill>
+          <a:ln>
+            <a:noFill/>
+          </a:ln>
+        </p:spPr>
+        <p:style>
+          <a:lnRef idx="1">
+            <a:schemeClr val="accent1"/>
+          </a:lnRef>
+          <a:fillRef idx="3">
+            <a:schemeClr val="accent1"/>
+          </a:fillRef>
+          <a:effectRef idx="2">
+            <a:schemeClr val="accent1"/>
+          </a:effectRef>
+          <a:fontRef idx="minor">
+            <a:schemeClr val="lt1"/>
+          </a:fontRef>
+        </p:style>
+        <p:txBody>
+          <a:bodyPr rtlCol="0" anchor="ctr"/>
+          <a:lstStyle/>
+          <a:p>
+            <a:pPr algn="ctr"/>
+          </a:p>
+        </p:txBody>
+      </p:sp>
+      <p:sp>
+        <p:nvSpPr>
+          <p:cNvPr id="70" name="TextBox 69"/>
+          <p:cNvSpPr txBox="1"/>
+          <p:nvPr/>
+        </p:nvSpPr>
+        <p:spPr>
+          <a:xfrm>
+            <a:off x="10469880" y="5952744"/>
+            <a:ext cx="1280160" cy="292608"/>
+          </a:xfrm>
+          <a:prstGeom prst="rect">
+            <a:avLst/>
+          </a:prstGeom>
+          <a:noFill/>
+        </p:spPr>
+        <p:txBody>
+          <a:bodyPr wrap="square">
+            <a:spAutoFit/>
+          </a:bodyPr>
+          <a:lstStyle/>
+          <a:p>
+            <a:pPr algn="ctr"/>
+            <a:r>
+              <a:rPr sz="1000" b="1" i="0">
+                <a:solidFill>
+                  <a:srgbClr val="6B7280"/>
+                </a:solidFill>
+                <a:latin typeface="Calibri"/>
+              </a:rPr>
+              <a:t>Awaiting</a:t>
+            </a:r>
+          </a:p>
+        </p:txBody>
+      </p:sp>
+    </p:spTree>
+  </p:cSld>
+  <p:clrMapOvr>
+    <a:masterClrMapping/>
+  </p:clrMapOvr>
+</p:sld>
+</file>
+
+<file path=ppt/slides/slide18.xml><?xml version="1.0" encoding="utf-8"?>
 <p:sld xmlns:a="http://schemas.openxmlformats.org/drawingml/2006/main" xmlns:p="http://schemas.openxmlformats.org/presentationml/2006/main" xmlns:r="http://schemas.openxmlformats.org/officeDocument/2006/relationships">
   <p:cSld>
     <p:spTree>
